--- a/deliverable/case-for-fossil-fuels.pptx
+++ b/deliverable/case-for-fossil-fuels.pptx
@@ -13,6 +13,7 @@
     <p:sldId id="261" r:id="rId13"/>
     <p:sldId id="262" r:id="rId14"/>
     <p:sldId id="263" r:id="rId15"/>
+    <p:sldId id="264" r:id="rId16"/>
   </p:sldIdLst>
   <p:sldSz cx="12191695" cy="6858000" type="screen4x3"/>
   <p:notesSz cx="6858000" cy="9144000"/>
@@ -649,7 +650,7 @@
           <a:lstStyle/>
           <a:p>
             <a:r>
-              <a:t>(~30 sec) The climate data hasn’t moved. CO₂ is rising, temperatures are rising, disasters are increasing. That deck was honest about half the story. Today I want to show you the other half.</a:t>
+              <a:t>(~30 sec) The climate data hasn't moved. CO₂ is rising, temperatures are rising, disasters are increasing. That deck was honest about half the story. Today I want to show you the other half.</a:t>
             </a:r>
           </a:p>
         </p:txBody>
@@ -719,7 +720,7 @@
           <a:lstStyle/>
           <a:p>
             <a:r>
-              <a:t>(~40 sec) My last deck counted future deaths from climate change. It did not count the 3.2 million people who die EVERY YEAR right now from cooking on open fires because they have no clean fuel. In sub-Saharan Africa alone that’s 815,000 deaths a year — most of them women and children. Energy poverty has a body count today.</a:t>
+              <a:t>(~40 sec) My last deck counted future deaths from climate change. It did not count the 3.2 million people who die EVERY YEAR right now from cooking on open fires because they have no clean fuel. In sub-Saharan Africa alone that's 815,000 deaths a year — most of them women and children. Energy poverty has a body count today.</a:t>
             </a:r>
           </a:p>
         </p:txBody>
@@ -789,7 +790,7 @@
           <a:lstStyle/>
           <a:p>
             <a:r>
-              <a:t>(~40 sec) Look at this asymmetry. Every wealthy country on Earth got rich by burning coal, then oil, then gas. They are now asking the continent that contributed least to the problem to skip that ladder — using clean-energy technology whose OWN supply chain still runs on fossil fuels. That’s not a climate plan. That’s an injustice with a green sticker on it.</a:t>
+              <a:t>(~40 sec) Look at this asymmetry. Every wealthy country on Earth got rich by burning coal, then oil, then gas. They are now asking the continent that contributed least to the problem to skip that ladder — using clean-energy technology whose OWN supply chain still runs on fossil fuels. That's not a climate plan. That's an injustice with a green sticker on it.</a:t>
             </a:r>
           </a:p>
         </p:txBody>
@@ -859,7 +860,7 @@
           <a:lstStyle/>
           <a:p>
             <a:r>
-              <a:t>(~40 sec) We lived this. We did the ‘clean’ thing — 85% of our installed capacity is hydropower. Then the climate broke our climate solution. ZESCO ran load shedding of up to 21 hours a day. The lesson is NOT ‘burn more coal.’ The lesson is: firm power matters, and pretending otherwise is paid for in dark hospitals and empty cold-chains.</a:t>
+              <a:t>(~40 sec) We lived this. We did the 'clean' thing — 85% of our installed capacity is hydropower. Then the climate broke our climate solution. ZESCO ran load shedding of up to 21 hours a day. The lesson is NOT 'burn more coal.' The lesson is: firm power matters, and pretending otherwise is paid for in dark hospitals and empty cold-chains.</a:t>
             </a:r>
           </a:p>
         </p:txBody>
@@ -929,7 +930,7 @@
           <a:lstStyle/>
           <a:p>
             <a:r>
-              <a:t>(~50 sec) I’m not arguing fossil fuels forever. I’m arguing for a MANAGED transition. Natural gas as a bridge — emits half what coal does and Africa holds 13% of global reserves. Renewables scaled aggressively on top — solar in Zambia is already the cheapest new capacity. And firm power kept on until storage and grid infrastructure can stand alone. That’s how we lift the bottom billion while decarbonising the top.</a:t>
+              <a:t>(~30 sec) This is the Hans Rosling curve. Below about three thousand kilowatt-hours per person per year, every additional kilowatt-hour translates directly into life-years — through clinics, refrigerated vaccines, lit classrooms, water pumps. Zambia is right on the steep part of that curve. Cutting energy access there costs life-years immediately. That's why the moral arithmetic doesn't end with climate.</a:t>
             </a:r>
           </a:p>
         </p:txBody>
@@ -999,7 +1000,77 @@
           <a:lstStyle/>
           <a:p>
             <a:r>
-              <a:t>(~30 sec) Two columns in the ledger. My first deck only filled out one of them. The honest case for fossil fuels — really, the honest case for a managed transition — is the column my first deck left blank. Thank you. Questions?</a:t>
+              <a:t>(~50 sec) I'm not arguing fossil fuels forever. I'm arguing for a MANAGED transition. Natural gas as a bridge — emits half what coal does and Africa holds 13% of global reserves. Renewables scaled aggressively on top — solar in Zambia is already the cheapest new capacity. And firm power kept on until storage and grid infrastructure can stand alone. That's how we lift the bottom billion while decarbonising the top.</a:t>
+            </a:r>
+          </a:p>
+        </p:txBody>
+      </p:sp>
+      <p:sp>
+        <p:nvSpPr>
+          <p:cNvPr id="4" name="Slide Number Placeholder 3"/>
+          <p:cNvSpPr>
+            <a:spLocks noGrp="1"/>
+          </p:cNvSpPr>
+          <p:nvPr>
+            <p:ph type="sldNum" idx="5" sz="quarter"/>
+          </p:nvPr>
+        </p:nvSpPr>
+        <p:spPr/>
+      </p:sp>
+    </p:spTree>
+  </p:cSld>
+  <p:clrMapOvr>
+    <a:masterClrMapping/>
+  </p:clrMapOvr>
+</p:notes>
+</file>
+
+<file path=ppt/notesSlides/notesSlide9.xml><?xml version="1.0" encoding="utf-8"?>
+<p:notes xmlns:a="http://schemas.openxmlformats.org/drawingml/2006/main" xmlns:p="http://schemas.openxmlformats.org/presentationml/2006/main" xmlns:r="http://schemas.openxmlformats.org/officeDocument/2006/relationships">
+  <p:cSld>
+    <p:spTree>
+      <p:nvGrpSpPr>
+        <p:cNvPr id="1" name=""/>
+        <p:cNvGrpSpPr/>
+        <p:nvPr/>
+      </p:nvGrpSpPr>
+      <p:grpSpPr>
+        <a:xfrm>
+          <a:off x="0" y="0"/>
+          <a:ext cx="0" cy="0"/>
+          <a:chOff x="0" y="0"/>
+          <a:chExt cx="0" cy="0"/>
+        </a:xfrm>
+      </p:grpSpPr>
+      <p:sp>
+        <p:nvSpPr>
+          <p:cNvPr id="2" name="Slide Image Placeholder 1"/>
+          <p:cNvSpPr>
+            <a:spLocks noGrp="1"/>
+          </p:cNvSpPr>
+          <p:nvPr>
+            <p:ph type="sldImg" idx="2"/>
+          </p:nvPr>
+        </p:nvSpPr>
+        <p:spPr/>
+      </p:sp>
+      <p:sp>
+        <p:nvSpPr>
+          <p:cNvPr id="3" name="Notes Placeholder 2"/>
+          <p:cNvSpPr>
+            <a:spLocks noGrp="1"/>
+          </p:cNvSpPr>
+          <p:nvPr>
+            <p:ph type="body" idx="3" sz="quarter"/>
+          </p:nvPr>
+        </p:nvSpPr>
+        <p:spPr/>
+        <p:txBody>
+          <a:bodyPr/>
+          <a:lstStyle/>
+          <a:p>
+            <a:r>
+              <a:t>Reference slide for Q&amp;A. If anyone questions a stat, the source is here. Full URLs are in the repo's research/notes.md.</a:t>
             </a:r>
           </a:p>
         </p:txBody>
@@ -4014,7 +4085,7 @@
         <p:spPr>
           <a:xfrm>
             <a:off x="0" y="0"/>
-            <a:ext cx="3840480" cy="6858000"/>
+            <a:ext cx="4389120" cy="6858000"/>
           </a:xfrm>
           <a:prstGeom prst="rect">
             <a:avLst/>
@@ -4051,14 +4122,58 @@
       </p:sp>
       <p:sp>
         <p:nvSpPr>
-          <p:cNvPr id="3" name="TextBox 2"/>
+          <p:cNvPr id="3" name="Rectangle 2"/>
+          <p:cNvSpPr/>
+          <p:nvPr/>
+        </p:nvSpPr>
+        <p:spPr>
+          <a:xfrm>
+            <a:off x="4389120" y="0"/>
+            <a:ext cx="146304" cy="6858000"/>
+          </a:xfrm>
+          <a:prstGeom prst="rect">
+            <a:avLst/>
+          </a:prstGeom>
+          <a:solidFill>
+            <a:srgbClr val="D97706"/>
+          </a:solidFill>
+          <a:ln>
+            <a:noFill/>
+          </a:ln>
+          <a:effectLst/>
+        </p:spPr>
+        <p:style>
+          <a:lnRef idx="1">
+            <a:schemeClr val="accent1"/>
+          </a:lnRef>
+          <a:fillRef idx="3">
+            <a:schemeClr val="accent1"/>
+          </a:fillRef>
+          <a:effectRef idx="2">
+            <a:schemeClr val="accent1"/>
+          </a:effectRef>
+          <a:fontRef idx="minor">
+            <a:schemeClr val="lt1"/>
+          </a:fontRef>
+        </p:style>
+        <p:txBody>
+          <a:bodyPr rtlCol="0" anchor="ctr"/>
+          <a:lstStyle/>
+          <a:p>
+            <a:pPr algn="ctr"/>
+          </a:p>
+        </p:txBody>
+      </p:sp>
+      <p:sp>
+        <p:nvSpPr>
+          <p:cNvPr id="4" name="TextBox 3"/>
           <p:cNvSpPr txBox="1"/>
           <p:nvPr/>
         </p:nvSpPr>
         <p:spPr>
           <a:xfrm>
-            <a:off x="457200" y="2743200"/>
-            <a:ext cx="3200400" cy="914400"/>
+            <a:off x="548640" y="1828800"/>
+            <a:ext cx="3474720" cy="457200"/>
           </a:xfrm>
           <a:prstGeom prst="rect">
             <a:avLst/>
@@ -4073,7 +4188,42 @@
           <a:p>
             <a:pPr algn="l"/>
             <a:r>
-              <a:rPr sz="4400" b="1">
+              <a:rPr sz="1200" b="1">
+                <a:solidFill>
+                  <a:srgbClr val="D97706"/>
+                </a:solidFill>
+                <a:latin typeface="Calibri"/>
+              </a:rPr>
+              <a:t>FOLLOW-UP</a:t>
+            </a:r>
+          </a:p>
+        </p:txBody>
+      </p:sp>
+      <p:sp>
+        <p:nvSpPr>
+          <p:cNvPr id="5" name="TextBox 4"/>
+          <p:cNvSpPr txBox="1"/>
+          <p:nvPr/>
+        </p:nvSpPr>
+        <p:spPr>
+          <a:xfrm>
+            <a:off x="548640" y="2468880"/>
+            <a:ext cx="3474720" cy="914400"/>
+          </a:xfrm>
+          <a:prstGeom prst="rect">
+            <a:avLst/>
+          </a:prstGeom>
+          <a:noFill/>
+        </p:spPr>
+        <p:txBody>
+          <a:bodyPr wrap="square" lIns="0" rIns="0" tIns="0" bIns="0" anchor="t">
+            <a:spAutoFit/>
+          </a:bodyPr>
+          <a:lstStyle/>
+          <a:p>
+            <a:pPr algn="l"/>
+            <a:r>
+              <a:rPr sz="4600" b="1">
                 <a:solidFill>
                   <a:srgbClr val="FFFFFF"/>
                 </a:solidFill>
@@ -4086,14 +4236,14 @@
       </p:sp>
       <p:sp>
         <p:nvSpPr>
-          <p:cNvPr id="4" name="TextBox 3"/>
+          <p:cNvPr id="6" name="TextBox 5"/>
           <p:cNvSpPr txBox="1"/>
           <p:nvPr/>
         </p:nvSpPr>
         <p:spPr>
           <a:xfrm>
-            <a:off x="457200" y="3383280"/>
-            <a:ext cx="3200400" cy="914400"/>
+            <a:off x="548640" y="3154680"/>
+            <a:ext cx="3474720" cy="914400"/>
           </a:xfrm>
           <a:prstGeom prst="rect">
             <a:avLst/>
@@ -4108,27 +4258,27 @@
           <a:p>
             <a:pPr algn="l"/>
             <a:r>
-              <a:rPr sz="4400" b="1">
+              <a:rPr sz="4600" b="1">
                 <a:solidFill>
                   <a:srgbClr val="FFFFFF"/>
                 </a:solidFill>
                 <a:latin typeface="Calibri"/>
               </a:rPr>
-              <a:t>For Fossil Fuels</a:t>
-            </a:r>
-          </a:p>
-        </p:txBody>
-      </p:sp>
-      <p:sp>
-        <p:nvSpPr>
-          <p:cNvPr id="5" name="TextBox 4"/>
+              <a:t>For Fossil</a:t>
+            </a:r>
+          </a:p>
+        </p:txBody>
+      </p:sp>
+      <p:sp>
+        <p:nvSpPr>
+          <p:cNvPr id="7" name="TextBox 6"/>
           <p:cNvSpPr txBox="1"/>
           <p:nvPr/>
         </p:nvSpPr>
         <p:spPr>
           <a:xfrm>
-            <a:off x="457200" y="4572000"/>
-            <a:ext cx="3200400" cy="457200"/>
+            <a:off x="548640" y="3840480"/>
+            <a:ext cx="3474720" cy="914400"/>
           </a:xfrm>
           <a:prstGeom prst="rect">
             <a:avLst/>
@@ -4143,27 +4293,27 @@
           <a:p>
             <a:pPr algn="l"/>
             <a:r>
-              <a:rPr sz="1600" b="0">
+              <a:rPr sz="4600" b="1">
                 <a:solidFill>
                   <a:srgbClr val="FFFFFF"/>
                 </a:solidFill>
                 <a:latin typeface="Calibri"/>
               </a:rPr>
-              <a:t>A steelman follow-up</a:t>
-            </a:r>
-          </a:p>
-        </p:txBody>
-      </p:sp>
-      <p:sp>
-        <p:nvSpPr>
-          <p:cNvPr id="6" name="TextBox 5"/>
+              <a:t>Fuels</a:t>
+            </a:r>
+          </a:p>
+        </p:txBody>
+      </p:sp>
+      <p:sp>
+        <p:nvSpPr>
+          <p:cNvPr id="8" name="TextBox 7"/>
           <p:cNvSpPr txBox="1"/>
           <p:nvPr/>
         </p:nvSpPr>
         <p:spPr>
           <a:xfrm>
-            <a:off x="4572000" y="2194560"/>
-            <a:ext cx="6858000" cy="548640"/>
+            <a:off x="548640" y="5029200"/>
+            <a:ext cx="3474720" cy="365760"/>
           </a:xfrm>
           <a:prstGeom prst="rect">
             <a:avLst/>
@@ -4180,25 +4330,25 @@
             <a:r>
               <a:rPr sz="1400" b="0">
                 <a:solidFill>
-                  <a:srgbClr val="4B5563"/>
+                  <a:srgbClr val="DBE5F1"/>
                 </a:solidFill>
                 <a:latin typeface="Calibri"/>
               </a:rPr>
-              <a:t>Follow-up to:</a:t>
-            </a:r>
-          </a:p>
-        </p:txBody>
-      </p:sp>
-      <p:sp>
-        <p:nvSpPr>
-          <p:cNvPr id="7" name="TextBox 6"/>
+              <a:t>A steelman counter-argument</a:t>
+            </a:r>
+          </a:p>
+        </p:txBody>
+      </p:sp>
+      <p:sp>
+        <p:nvSpPr>
+          <p:cNvPr id="9" name="TextBox 8"/>
           <p:cNvSpPr txBox="1"/>
           <p:nvPr/>
         </p:nvSpPr>
         <p:spPr>
           <a:xfrm>
-            <a:off x="4572000" y="2560320"/>
-            <a:ext cx="6858000" cy="1371600"/>
+            <a:off x="4937760" y="1828800"/>
+            <a:ext cx="6858000" cy="457200"/>
           </a:xfrm>
           <a:prstGeom prst="rect">
             <a:avLst/>
@@ -4213,27 +4363,27 @@
           <a:p>
             <a:pPr algn="l"/>
             <a:r>
-              <a:rPr sz="2200" b="0">
-                <a:solidFill>
-                  <a:srgbClr val="1F2937"/>
+              <a:rPr sz="1100" b="1">
+                <a:solidFill>
+                  <a:srgbClr val="9CA3AF"/>
                 </a:solidFill>
                 <a:latin typeface="Calibri"/>
               </a:rPr>
-              <a:t>“How Climate Change Affects the World We Live In”</a:t>
-            </a:r>
-          </a:p>
-        </p:txBody>
-      </p:sp>
-      <p:sp>
-        <p:nvSpPr>
-          <p:cNvPr id="8" name="TextBox 7"/>
+              <a:t>REPLY TO</a:t>
+            </a:r>
+          </a:p>
+        </p:txBody>
+      </p:sp>
+      <p:sp>
+        <p:nvSpPr>
+          <p:cNvPr id="10" name="TextBox 9"/>
           <p:cNvSpPr txBox="1"/>
           <p:nvPr/>
         </p:nvSpPr>
         <p:spPr>
           <a:xfrm>
-            <a:off x="4572000" y="4389120"/>
-            <a:ext cx="6858000" cy="457200"/>
+            <a:off x="4937760" y="2286000"/>
+            <a:ext cx="6858000" cy="1828800"/>
           </a:xfrm>
           <a:prstGeom prst="rect">
             <a:avLst/>
@@ -4248,9 +4398,46 @@
           <a:p>
             <a:pPr algn="l"/>
             <a:r>
-              <a:rPr sz="2000" b="1">
+              <a:rPr sz="2800" b="1">
                 <a:solidFill>
                   <a:srgbClr val="1F2937"/>
+                </a:solidFill>
+                <a:latin typeface="Calibri"/>
+              </a:rPr>
+              <a:t>“How Climate Change
+Affects the World
+We Live In”</a:t>
+            </a:r>
+          </a:p>
+        </p:txBody>
+      </p:sp>
+      <p:sp>
+        <p:nvSpPr>
+          <p:cNvPr id="11" name="TextBox 10"/>
+          <p:cNvSpPr txBox="1"/>
+          <p:nvPr/>
+        </p:nvSpPr>
+        <p:spPr>
+          <a:xfrm>
+            <a:off x="4937760" y="4389120"/>
+            <a:ext cx="6858000" cy="457200"/>
+          </a:xfrm>
+          <a:prstGeom prst="rect">
+            <a:avLst/>
+          </a:prstGeom>
+          <a:noFill/>
+        </p:spPr>
+        <p:txBody>
+          <a:bodyPr wrap="square" lIns="0" rIns="0" tIns="0" bIns="0" anchor="t">
+            <a:spAutoFit/>
+          </a:bodyPr>
+          <a:lstStyle/>
+          <a:p>
+            <a:pPr algn="l"/>
+            <a:r>
+              <a:rPr sz="2200" b="1">
+                <a:solidFill>
+                  <a:srgbClr val="1F4E79"/>
                 </a:solidFill>
                 <a:latin typeface="Calibri"/>
               </a:rPr>
@@ -4261,13 +4448,13 @@
       </p:sp>
       <p:sp>
         <p:nvSpPr>
-          <p:cNvPr id="9" name="TextBox 8"/>
+          <p:cNvPr id="12" name="TextBox 11"/>
           <p:cNvSpPr txBox="1"/>
           <p:nvPr/>
         </p:nvSpPr>
         <p:spPr>
           <a:xfrm>
-            <a:off x="4572000" y="4846320"/>
+            <a:off x="4937760" y="4892040"/>
             <a:ext cx="6858000" cy="365760"/>
           </a:xfrm>
           <a:prstGeom prst="rect">
@@ -4291,6 +4478,182 @@
               </a:rPr>
               <a:t>Analytics in Training  •  May 2026</a:t>
             </a:r>
+          </a:p>
+        </p:txBody>
+      </p:sp>
+      <p:sp>
+        <p:nvSpPr>
+          <p:cNvPr id="13" name="Oval 12"/>
+          <p:cNvSpPr/>
+          <p:nvPr/>
+        </p:nvSpPr>
+        <p:spPr>
+          <a:xfrm>
+            <a:off x="10378440" y="5591556"/>
+            <a:ext cx="640080" cy="704088"/>
+          </a:xfrm>
+          <a:prstGeom prst="ellipse">
+            <a:avLst/>
+          </a:prstGeom>
+          <a:solidFill>
+            <a:srgbClr val="D97706"/>
+          </a:solidFill>
+          <a:ln>
+            <a:noFill/>
+          </a:ln>
+          <a:effectLst/>
+        </p:spPr>
+        <p:style>
+          <a:lnRef idx="1">
+            <a:schemeClr val="accent1"/>
+          </a:lnRef>
+          <a:fillRef idx="3">
+            <a:schemeClr val="accent1"/>
+          </a:fillRef>
+          <a:effectRef idx="2">
+            <a:schemeClr val="accent1"/>
+          </a:effectRef>
+          <a:fontRef idx="minor">
+            <a:schemeClr val="lt1"/>
+          </a:fontRef>
+        </p:style>
+        <p:txBody>
+          <a:bodyPr rtlCol="0" anchor="ctr"/>
+          <a:lstStyle/>
+          <a:p>
+            <a:pPr algn="ctr"/>
+          </a:p>
+        </p:txBody>
+      </p:sp>
+      <p:sp>
+        <p:nvSpPr>
+          <p:cNvPr id="14" name="Oval 13"/>
+          <p:cNvSpPr/>
+          <p:nvPr/>
+        </p:nvSpPr>
+        <p:spPr>
+          <a:xfrm>
+            <a:off x="10554462" y="5815584"/>
+            <a:ext cx="288036" cy="384048"/>
+          </a:xfrm>
+          <a:prstGeom prst="ellipse">
+            <a:avLst/>
+          </a:prstGeom>
+          <a:solidFill>
+            <a:srgbClr val="FDE8CC"/>
+          </a:solidFill>
+          <a:ln>
+            <a:noFill/>
+          </a:ln>
+          <a:effectLst/>
+        </p:spPr>
+        <p:style>
+          <a:lnRef idx="1">
+            <a:schemeClr val="accent1"/>
+          </a:lnRef>
+          <a:fillRef idx="3">
+            <a:schemeClr val="accent1"/>
+          </a:fillRef>
+          <a:effectRef idx="2">
+            <a:schemeClr val="accent1"/>
+          </a:effectRef>
+          <a:fontRef idx="minor">
+            <a:schemeClr val="lt1"/>
+          </a:fontRef>
+        </p:style>
+        <p:txBody>
+          <a:bodyPr rtlCol="0" anchor="ctr"/>
+          <a:lstStyle/>
+          <a:p>
+            <a:pPr algn="ctr"/>
+          </a:p>
+        </p:txBody>
+      </p:sp>
+      <p:sp>
+        <p:nvSpPr>
+          <p:cNvPr id="15" name="Oval 14"/>
+          <p:cNvSpPr/>
+          <p:nvPr/>
+        </p:nvSpPr>
+        <p:spPr>
+          <a:xfrm>
+            <a:off x="11109960" y="5623560"/>
+            <a:ext cx="640080" cy="640080"/>
+          </a:xfrm>
+          <a:prstGeom prst="ellipse">
+            <a:avLst/>
+          </a:prstGeom>
+          <a:solidFill>
+            <a:srgbClr val="1F4E79"/>
+          </a:solidFill>
+          <a:ln>
+            <a:noFill/>
+          </a:ln>
+          <a:effectLst/>
+        </p:spPr>
+        <p:style>
+          <a:lnRef idx="1">
+            <a:schemeClr val="accent1"/>
+          </a:lnRef>
+          <a:fillRef idx="3">
+            <a:schemeClr val="accent1"/>
+          </a:fillRef>
+          <a:effectRef idx="2">
+            <a:schemeClr val="accent1"/>
+          </a:effectRef>
+          <a:fontRef idx="minor">
+            <a:schemeClr val="lt1"/>
+          </a:fontRef>
+        </p:style>
+        <p:txBody>
+          <a:bodyPr rtlCol="0" anchor="ctr"/>
+          <a:lstStyle/>
+          <a:p>
+            <a:pPr algn="ctr"/>
+          </a:p>
+        </p:txBody>
+      </p:sp>
+      <p:sp>
+        <p:nvSpPr>
+          <p:cNvPr id="16" name="Lightning Bolt 15"/>
+          <p:cNvSpPr/>
+          <p:nvPr/>
+        </p:nvSpPr>
+        <p:spPr>
+          <a:xfrm>
+            <a:off x="11269980" y="5703570"/>
+            <a:ext cx="320040" cy="480060"/>
+          </a:xfrm>
+          <a:prstGeom prst="lightningBolt">
+            <a:avLst/>
+          </a:prstGeom>
+          <a:solidFill>
+            <a:srgbClr val="FFFFFF"/>
+          </a:solidFill>
+          <a:ln>
+            <a:noFill/>
+          </a:ln>
+          <a:effectLst/>
+        </p:spPr>
+        <p:style>
+          <a:lnRef idx="1">
+            <a:schemeClr val="accent1"/>
+          </a:lnRef>
+          <a:fillRef idx="3">
+            <a:schemeClr val="accent1"/>
+          </a:fillRef>
+          <a:effectRef idx="2">
+            <a:schemeClr val="accent1"/>
+          </a:effectRef>
+          <a:fontRef idx="minor">
+            <a:schemeClr val="lt1"/>
+          </a:fontRef>
+        </p:style>
+        <p:txBody>
+          <a:bodyPr rtlCol="0" anchor="ctr"/>
+          <a:lstStyle/>
+          <a:p>
+            <a:pPr algn="ctr"/>
           </a:p>
         </p:txBody>
       </p:sp>
@@ -4321,7 +4684,7 @@
         <p:spPr>
           <a:xfrm>
             <a:off x="0" y="0"/>
-            <a:ext cx="12191695" cy="73152"/>
+            <a:ext cx="12191695" cy="146304"/>
           </a:xfrm>
           <a:prstGeom prst="rect">
             <a:avLst/>
@@ -4358,72 +4721,102 @@
       </p:sp>
       <p:sp>
         <p:nvSpPr>
-          <p:cNvPr id="3" name="TextBox 2"/>
+          <p:cNvPr id="3" name="Rectangle 2"/>
+          <p:cNvSpPr/>
+          <p:nvPr/>
+        </p:nvSpPr>
+        <p:spPr>
+          <a:xfrm>
+            <a:off x="0" y="146304"/>
+            <a:ext cx="411480" cy="6711696"/>
+          </a:xfrm>
+          <a:prstGeom prst="rect">
+            <a:avLst/>
+          </a:prstGeom>
+          <a:solidFill>
+            <a:srgbClr val="D97706"/>
+          </a:solidFill>
+          <a:ln>
+            <a:noFill/>
+          </a:ln>
+          <a:effectLst/>
+        </p:spPr>
+        <p:style>
+          <a:lnRef idx="1">
+            <a:schemeClr val="accent1"/>
+          </a:lnRef>
+          <a:fillRef idx="3">
+            <a:schemeClr val="accent1"/>
+          </a:fillRef>
+          <a:effectRef idx="2">
+            <a:schemeClr val="accent1"/>
+          </a:effectRef>
+          <a:fontRef idx="minor">
+            <a:schemeClr val="lt1"/>
+          </a:fontRef>
+        </p:style>
+        <p:txBody>
+          <a:bodyPr rtlCol="0" anchor="ctr"/>
+          <a:lstStyle/>
+          <a:p>
+            <a:pPr algn="ctr"/>
+          </a:p>
+        </p:txBody>
+      </p:sp>
+      <p:sp>
+        <p:nvSpPr>
+          <p:cNvPr id="4" name="Oval 3"/>
+          <p:cNvSpPr/>
+          <p:nvPr/>
+        </p:nvSpPr>
+        <p:spPr>
+          <a:xfrm>
+            <a:off x="850392" y="722376"/>
+            <a:ext cx="128016" cy="128016"/>
+          </a:xfrm>
+          <a:prstGeom prst="ellipse">
+            <a:avLst/>
+          </a:prstGeom>
+          <a:solidFill>
+            <a:srgbClr val="D97706"/>
+          </a:solidFill>
+          <a:ln>
+            <a:noFill/>
+          </a:ln>
+          <a:effectLst/>
+        </p:spPr>
+        <p:style>
+          <a:lnRef idx="1">
+            <a:schemeClr val="accent1"/>
+          </a:lnRef>
+          <a:fillRef idx="3">
+            <a:schemeClr val="accent1"/>
+          </a:fillRef>
+          <a:effectRef idx="2">
+            <a:schemeClr val="accent1"/>
+          </a:effectRef>
+          <a:fontRef idx="minor">
+            <a:schemeClr val="lt1"/>
+          </a:fontRef>
+        </p:style>
+        <p:txBody>
+          <a:bodyPr rtlCol="0" anchor="ctr"/>
+          <a:lstStyle/>
+          <a:p>
+            <a:pPr algn="ctr"/>
+          </a:p>
+        </p:txBody>
+      </p:sp>
+      <p:sp>
+        <p:nvSpPr>
+          <p:cNvPr id="5" name="TextBox 4"/>
           <p:cNvSpPr txBox="1"/>
           <p:nvPr/>
         </p:nvSpPr>
         <p:spPr>
           <a:xfrm>
-            <a:off x="1097280" y="1828800"/>
-            <a:ext cx="10058400" cy="3474720"/>
-          </a:xfrm>
-          <a:prstGeom prst="rect">
-            <a:avLst/>
-          </a:prstGeom>
-          <a:noFill/>
-        </p:spPr>
-        <p:txBody>
-          <a:bodyPr wrap="square" lIns="0" rIns="0" anchor="t">
-            <a:spAutoFit/>
-          </a:bodyPr>
-          <a:lstStyle/>
-          <a:p>
-            <a:pPr algn="l"/>
-            <a:r>
-              <a:rPr sz="3000">
-                <a:solidFill>
-                  <a:srgbClr val="4B5563"/>
-                </a:solidFill>
-                <a:latin typeface="Calibri"/>
-              </a:rPr>
-              <a:t>Africa caused 3% of climate change but pays the highest price — and pure clean-energy already failed us in last year's drought.</a:t>
-            </a:r>
-          </a:p>
-          <a:p>
-            <a:pPr>
-              <a:spcBef>
-                <a:spcPts val="1800"/>
-              </a:spcBef>
-            </a:pPr>
-            <a:r>
-              <a:rPr sz="1200"/>
-              <a:t> </a:t>
-            </a:r>
-          </a:p>
-          <a:p>
-            <a:pPr algn="l"/>
-            <a:r>
-              <a:rPr sz="3400" b="1">
-                <a:solidFill>
-                  <a:srgbClr val="1F4E79"/>
-                </a:solidFill>
-                <a:latin typeface="Calibri"/>
-              </a:rPr>
-              <a:t>The honest path forward is a managed transition, not abandonment.</a:t>
-            </a:r>
-          </a:p>
-        </p:txBody>
-      </p:sp>
-      <p:sp>
-        <p:nvSpPr>
-          <p:cNvPr id="4" name="TextBox 3"/>
-          <p:cNvSpPr txBox="1"/>
-          <p:nvPr/>
-        </p:nvSpPr>
-        <p:spPr>
-          <a:xfrm>
-            <a:off x="1097280" y="1188720"/>
-            <a:ext cx="2743200" cy="365760"/>
+            <a:off x="1097280" y="640080"/>
+            <a:ext cx="4572000" cy="365760"/>
           </a:xfrm>
           <a:prstGeom prst="rect">
             <a:avLst/>
@@ -4440,7 +4833,7 @@
             <a:r>
               <a:rPr sz="1100" b="1">
                 <a:solidFill>
-                  <a:srgbClr val="1F4E79"/>
+                  <a:srgbClr val="D97706"/>
                 </a:solidFill>
                 <a:latin typeface="Calibri"/>
               </a:rPr>
@@ -4451,14 +4844,84 @@
       </p:sp>
       <p:sp>
         <p:nvSpPr>
-          <p:cNvPr id="5" name="TextBox 4"/>
+          <p:cNvPr id="6" name="TextBox 5"/>
           <p:cNvSpPr txBox="1"/>
           <p:nvPr/>
         </p:nvSpPr>
         <p:spPr>
           <a:xfrm>
-            <a:off x="457200" y="6446520"/>
-            <a:ext cx="7315200" cy="274320"/>
+            <a:off x="822960" y="1554480"/>
+            <a:ext cx="10515600" cy="1828800"/>
+          </a:xfrm>
+          <a:prstGeom prst="rect">
+            <a:avLst/>
+          </a:prstGeom>
+          <a:noFill/>
+        </p:spPr>
+        <p:txBody>
+          <a:bodyPr wrap="square" lIns="0" rIns="0">
+            <a:spAutoFit/>
+          </a:bodyPr>
+          <a:lstStyle/>
+          <a:p>
+            <a:r>
+              <a:rPr sz="2800">
+                <a:solidFill>
+                  <a:srgbClr val="4B5563"/>
+                </a:solidFill>
+                <a:latin typeface="Calibri"/>
+              </a:rPr>
+              <a:t>Africa caused </a:t>
+            </a:r>
+            <a:r>
+              <a:rPr sz="2800" b="1">
+                <a:solidFill>
+                  <a:srgbClr val="D97706"/>
+                </a:solidFill>
+                <a:latin typeface="Calibri"/>
+              </a:rPr>
+              <a:t>3% of climate change</a:t>
+            </a:r>
+            <a:r>
+              <a:rPr sz="2800">
+                <a:solidFill>
+                  <a:srgbClr val="4B5563"/>
+                </a:solidFill>
+                <a:latin typeface="Calibri"/>
+              </a:rPr>
+              <a:t> but pays the highest price — and </a:t>
+            </a:r>
+            <a:r>
+              <a:rPr sz="2800" b="1">
+                <a:solidFill>
+                  <a:srgbClr val="D97706"/>
+                </a:solidFill>
+                <a:latin typeface="Calibri"/>
+              </a:rPr>
+              <a:t>pure clean-energy already failed us</a:t>
+            </a:r>
+            <a:r>
+              <a:rPr sz="2800">
+                <a:solidFill>
+                  <a:srgbClr val="4B5563"/>
+                </a:solidFill>
+                <a:latin typeface="Calibri"/>
+              </a:rPr>
+              <a:t> in last year's drought.</a:t>
+            </a:r>
+          </a:p>
+        </p:txBody>
+      </p:sp>
+      <p:sp>
+        <p:nvSpPr>
+          <p:cNvPr id="7" name="TextBox 6"/>
+          <p:cNvSpPr txBox="1"/>
+          <p:nvPr/>
+        </p:nvSpPr>
+        <p:spPr>
+          <a:xfrm>
+            <a:off x="822960" y="4023360"/>
+            <a:ext cx="10515600" cy="1828800"/>
           </a:xfrm>
           <a:prstGeom prst="rect">
             <a:avLst/>
@@ -4473,27 +4936,160 @@
           <a:p>
             <a:pPr algn="l"/>
             <a:r>
-              <a:rPr sz="900" b="0">
-                <a:solidFill>
-                  <a:srgbClr val="9CA3AF"/>
+              <a:rPr sz="4000" b="1">
+                <a:solidFill>
+                  <a:srgbClr val="1F4E79"/>
                 </a:solidFill>
                 <a:latin typeface="Calibri"/>
               </a:rPr>
-              <a:t>Choolwe  •  The Case For Fossil Fuels  •  Follow-up to “How Climate Change Affects the World We Live In”</a:t>
-            </a:r>
-          </a:p>
-        </p:txBody>
-      </p:sp>
-      <p:sp>
-        <p:nvSpPr>
-          <p:cNvPr id="6" name="TextBox 5"/>
+              <a:t>The honest path forward is a managed transition,
+not abandonment.</a:t>
+            </a:r>
+          </a:p>
+        </p:txBody>
+      </p:sp>
+      <p:sp>
+        <p:nvSpPr>
+          <p:cNvPr id="8" name="Oval 7"/>
+          <p:cNvSpPr/>
+          <p:nvPr/>
+        </p:nvSpPr>
+        <p:spPr>
+          <a:xfrm>
+            <a:off x="10972800" y="594360"/>
+            <a:ext cx="731520" cy="731520"/>
+          </a:xfrm>
+          <a:prstGeom prst="ellipse">
+            <a:avLst/>
+          </a:prstGeom>
+          <a:solidFill>
+            <a:srgbClr val="1F4E79"/>
+          </a:solidFill>
+          <a:ln>
+            <a:noFill/>
+          </a:ln>
+          <a:effectLst/>
+        </p:spPr>
+        <p:style>
+          <a:lnRef idx="1">
+            <a:schemeClr val="accent1"/>
+          </a:lnRef>
+          <a:fillRef idx="3">
+            <a:schemeClr val="accent1"/>
+          </a:fillRef>
+          <a:effectRef idx="2">
+            <a:schemeClr val="accent1"/>
+          </a:effectRef>
+          <a:fontRef idx="minor">
+            <a:schemeClr val="lt1"/>
+          </a:fontRef>
+        </p:style>
+        <p:txBody>
+          <a:bodyPr rtlCol="0" anchor="ctr"/>
+          <a:lstStyle/>
+          <a:p>
+            <a:pPr algn="ctr"/>
+          </a:p>
+        </p:txBody>
+      </p:sp>
+      <p:sp>
+        <p:nvSpPr>
+          <p:cNvPr id="9" name="Rectangle 8"/>
+          <p:cNvSpPr/>
+          <p:nvPr/>
+        </p:nvSpPr>
+        <p:spPr>
+          <a:xfrm>
+            <a:off x="11082528" y="941832"/>
+            <a:ext cx="512063" cy="36576"/>
+          </a:xfrm>
+          <a:prstGeom prst="rect">
+            <a:avLst/>
+          </a:prstGeom>
+          <a:solidFill>
+            <a:srgbClr val="FFFFFF"/>
+          </a:solidFill>
+          <a:ln>
+            <a:noFill/>
+          </a:ln>
+          <a:effectLst/>
+        </p:spPr>
+        <p:style>
+          <a:lnRef idx="1">
+            <a:schemeClr val="accent1"/>
+          </a:lnRef>
+          <a:fillRef idx="3">
+            <a:schemeClr val="accent1"/>
+          </a:fillRef>
+          <a:effectRef idx="2">
+            <a:schemeClr val="accent1"/>
+          </a:effectRef>
+          <a:fontRef idx="minor">
+            <a:schemeClr val="lt1"/>
+          </a:fontRef>
+        </p:style>
+        <p:txBody>
+          <a:bodyPr rtlCol="0" anchor="ctr"/>
+          <a:lstStyle/>
+          <a:p>
+            <a:pPr algn="ctr"/>
+          </a:p>
+        </p:txBody>
+      </p:sp>
+      <p:sp>
+        <p:nvSpPr>
+          <p:cNvPr id="10" name="Rectangle 9"/>
+          <p:cNvSpPr/>
+          <p:nvPr/>
+        </p:nvSpPr>
+        <p:spPr>
+          <a:xfrm>
+            <a:off x="11320272" y="941832"/>
+            <a:ext cx="36576" cy="237744"/>
+          </a:xfrm>
+          <a:prstGeom prst="rect">
+            <a:avLst/>
+          </a:prstGeom>
+          <a:solidFill>
+            <a:srgbClr val="FFFFFF"/>
+          </a:solidFill>
+          <a:ln>
+            <a:noFill/>
+          </a:ln>
+          <a:effectLst/>
+        </p:spPr>
+        <p:style>
+          <a:lnRef idx="1">
+            <a:schemeClr val="accent1"/>
+          </a:lnRef>
+          <a:fillRef idx="3">
+            <a:schemeClr val="accent1"/>
+          </a:fillRef>
+          <a:effectRef idx="2">
+            <a:schemeClr val="accent1"/>
+          </a:effectRef>
+          <a:fontRef idx="minor">
+            <a:schemeClr val="lt1"/>
+          </a:fontRef>
+        </p:style>
+        <p:txBody>
+          <a:bodyPr rtlCol="0" anchor="ctr"/>
+          <a:lstStyle/>
+          <a:p>
+            <a:pPr algn="ctr"/>
+          </a:p>
+        </p:txBody>
+      </p:sp>
+      <p:sp>
+        <p:nvSpPr>
+          <p:cNvPr id="11" name="TextBox 10"/>
           <p:cNvSpPr txBox="1"/>
           <p:nvPr/>
         </p:nvSpPr>
         <p:spPr>
           <a:xfrm>
-            <a:off x="10972800" y="6446520"/>
-            <a:ext cx="914400" cy="274320"/>
+            <a:off x="457200" y="6537960"/>
+            <a:ext cx="7315200" cy="274320"/>
           </a:xfrm>
           <a:prstGeom prst="rect">
             <a:avLst/>
@@ -4506,7 +5102,7 @@
           </a:bodyPr>
           <a:lstStyle/>
           <a:p>
-            <a:pPr algn="r"/>
+            <a:pPr algn="l"/>
             <a:r>
               <a:rPr sz="900" b="0">
                 <a:solidFill>
@@ -4514,7 +5110,42 @@
                 </a:solidFill>
                 <a:latin typeface="Calibri"/>
               </a:rPr>
-              <a:t>2 / 8</a:t>
+              <a:t>Choolwe  •  The Case For Fossil Fuels</a:t>
+            </a:r>
+          </a:p>
+        </p:txBody>
+      </p:sp>
+      <p:sp>
+        <p:nvSpPr>
+          <p:cNvPr id="12" name="TextBox 11"/>
+          <p:cNvSpPr txBox="1"/>
+          <p:nvPr/>
+        </p:nvSpPr>
+        <p:spPr>
+          <a:xfrm>
+            <a:off x="10789920" y="6537960"/>
+            <a:ext cx="1097280" cy="274320"/>
+          </a:xfrm>
+          <a:prstGeom prst="rect">
+            <a:avLst/>
+          </a:prstGeom>
+          <a:noFill/>
+        </p:spPr>
+        <p:txBody>
+          <a:bodyPr wrap="square" lIns="0" rIns="0" tIns="0" bIns="0" anchor="t">
+            <a:spAutoFit/>
+          </a:bodyPr>
+          <a:lstStyle/>
+          <a:p>
+            <a:pPr algn="r"/>
+            <a:r>
+              <a:rPr sz="900" b="0">
+                <a:solidFill>
+                  <a:srgbClr val="9CA3AF"/>
+                </a:solidFill>
+                <a:latin typeface="Calibri"/>
+              </a:rPr>
+              <a:t>2 / 9</a:t>
             </a:r>
           </a:p>
         </p:txBody>
@@ -4546,7 +5177,7 @@
         <p:spPr>
           <a:xfrm>
             <a:off x="0" y="0"/>
-            <a:ext cx="12191695" cy="73152"/>
+            <a:ext cx="12191695" cy="146304"/>
           </a:xfrm>
           <a:prstGeom prst="rect">
             <a:avLst/>
@@ -4583,55 +5214,20 @@
       </p:sp>
       <p:sp>
         <p:nvSpPr>
-          <p:cNvPr id="3" name="TextBox 2"/>
-          <p:cNvSpPr txBox="1"/>
-          <p:nvPr/>
-        </p:nvSpPr>
-        <p:spPr>
-          <a:xfrm>
-            <a:off x="548640" y="365760"/>
-            <a:ext cx="11064240" cy="1097280"/>
-          </a:xfrm>
-          <a:prstGeom prst="rect">
-            <a:avLst/>
-          </a:prstGeom>
-          <a:noFill/>
-        </p:spPr>
-        <p:txBody>
-          <a:bodyPr wrap="square" lIns="0" rIns="0" tIns="0" bIns="0" anchor="t">
-            <a:spAutoFit/>
-          </a:bodyPr>
-          <a:lstStyle/>
-          <a:p>
-            <a:pPr algn="l"/>
-            <a:r>
-              <a:rPr sz="2200" b="1">
-                <a:solidFill>
-                  <a:srgbClr val="1F2937"/>
-                </a:solidFill>
-                <a:latin typeface="Calibri"/>
-              </a:rPr>
-              <a:t>Last week, the case I made was: fossil fuels drive climate change, climate change kills, therefore cut fossil fuels.</a:t>
-            </a:r>
-          </a:p>
-        </p:txBody>
-      </p:sp>
-      <p:sp>
-        <p:nvSpPr>
-          <p:cNvPr id="4" name="Rectangle 3"/>
+          <p:cNvPr id="3" name="Oval 2"/>
           <p:cNvSpPr/>
           <p:nvPr/>
         </p:nvSpPr>
         <p:spPr>
           <a:xfrm>
-            <a:off x="548640" y="2194560"/>
-            <a:ext cx="3520440" cy="2743200"/>
-          </a:xfrm>
-          <a:prstGeom prst="rect">
+            <a:off x="576072" y="539496"/>
+            <a:ext cx="128016" cy="128016"/>
+          </a:xfrm>
+          <a:prstGeom prst="ellipse">
             <a:avLst/>
           </a:prstGeom>
           <a:solidFill>
-            <a:srgbClr val="F3F4F6"/>
+            <a:srgbClr val="1F4E79"/>
           </a:solidFill>
           <a:ln>
             <a:noFill/>
@@ -4662,20 +5258,93 @@
       </p:sp>
       <p:sp>
         <p:nvSpPr>
-          <p:cNvPr id="5" name="Rectangle 4"/>
+          <p:cNvPr id="4" name="TextBox 3"/>
+          <p:cNvSpPr txBox="1"/>
+          <p:nvPr/>
+        </p:nvSpPr>
+        <p:spPr>
+          <a:xfrm>
+            <a:off x="822960" y="457200"/>
+            <a:ext cx="4572000" cy="365760"/>
+          </a:xfrm>
+          <a:prstGeom prst="rect">
+            <a:avLst/>
+          </a:prstGeom>
+          <a:noFill/>
+        </p:spPr>
+        <p:txBody>
+          <a:bodyPr wrap="square" lIns="0" rIns="0" tIns="0" bIns="0" anchor="t">
+            <a:spAutoFit/>
+          </a:bodyPr>
+          <a:lstStyle/>
+          <a:p>
+            <a:pPr algn="l"/>
+            <a:r>
+              <a:rPr sz="1100" b="1">
+                <a:solidFill>
+                  <a:srgbClr val="1F4E79"/>
+                </a:solidFill>
+                <a:latin typeface="Calibri"/>
+              </a:rPr>
+              <a:t>SITUATION  •  WHAT I ARGUED LAST WEEK</a:t>
+            </a:r>
+          </a:p>
+        </p:txBody>
+      </p:sp>
+      <p:sp>
+        <p:nvSpPr>
+          <p:cNvPr id="5" name="TextBox 4"/>
+          <p:cNvSpPr txBox="1"/>
+          <p:nvPr/>
+        </p:nvSpPr>
+        <p:spPr>
+          <a:xfrm>
+            <a:off x="548640" y="1097280"/>
+            <a:ext cx="11064240" cy="1097280"/>
+          </a:xfrm>
+          <a:prstGeom prst="rect">
+            <a:avLst/>
+          </a:prstGeom>
+          <a:noFill/>
+        </p:spPr>
+        <p:txBody>
+          <a:bodyPr wrap="square" lIns="0" rIns="0" tIns="0" bIns="0" anchor="t">
+            <a:spAutoFit/>
+          </a:bodyPr>
+          <a:lstStyle/>
+          <a:p>
+            <a:pPr algn="l"/>
+            <a:r>
+              <a:rPr sz="2400" b="1">
+                <a:solidFill>
+                  <a:srgbClr val="1F2937"/>
+                </a:solidFill>
+                <a:latin typeface="Calibri"/>
+              </a:rPr>
+              <a:t>Last week, the case was: fossil fuels drive climate change,
+climate change kills, therefore — cut fossil fuels.</a:t>
+            </a:r>
+          </a:p>
+        </p:txBody>
+      </p:sp>
+      <p:sp>
+        <p:nvSpPr>
+          <p:cNvPr id="6" name="Rounded Rectangle 5"/>
           <p:cNvSpPr/>
           <p:nvPr/>
         </p:nvSpPr>
         <p:spPr>
           <a:xfrm>
-            <a:off x="548640" y="2194560"/>
-            <a:ext cx="3520440" cy="73152"/>
-          </a:xfrm>
-          <a:prstGeom prst="rect">
-            <a:avLst/>
+            <a:off x="548640" y="2743200"/>
+            <a:ext cx="3520440" cy="3108960"/>
+          </a:xfrm>
+          <a:prstGeom prst="roundRect">
+            <a:avLst>
+              <a:gd name="adj" fmla="val 10000"/>
+            </a:avLst>
           </a:prstGeom>
           <a:solidFill>
-            <a:srgbClr val="9CA3AF"/>
+            <a:srgbClr val="F9FAFB"/>
           </a:solidFill>
           <a:ln>
             <a:noFill/>
@@ -4706,90 +5375,20 @@
       </p:sp>
       <p:sp>
         <p:nvSpPr>
-          <p:cNvPr id="6" name="TextBox 5"/>
-          <p:cNvSpPr txBox="1"/>
-          <p:nvPr/>
-        </p:nvSpPr>
-        <p:spPr>
-          <a:xfrm>
-            <a:off x="777240" y="2468880"/>
-            <a:ext cx="3063240" cy="914400"/>
-          </a:xfrm>
-          <a:prstGeom prst="rect">
-            <a:avLst/>
-          </a:prstGeom>
-          <a:noFill/>
-        </p:spPr>
-        <p:txBody>
-          <a:bodyPr wrap="square" lIns="0" rIns="0" tIns="0" bIns="0" anchor="t">
-            <a:spAutoFit/>
-          </a:bodyPr>
-          <a:lstStyle/>
-          <a:p>
-            <a:pPr algn="l"/>
-            <a:r>
-              <a:rPr sz="1600" b="1">
-                <a:solidFill>
-                  <a:srgbClr val="1F2937"/>
-                </a:solidFill>
-                <a:latin typeface="Calibri"/>
-              </a:rPr>
-              <a:t>CO₂ at record highs</a:t>
-            </a:r>
-          </a:p>
-        </p:txBody>
-      </p:sp>
-      <p:sp>
-        <p:nvSpPr>
-          <p:cNvPr id="7" name="TextBox 6"/>
-          <p:cNvSpPr txBox="1"/>
-          <p:nvPr/>
-        </p:nvSpPr>
-        <p:spPr>
-          <a:xfrm>
-            <a:off x="777240" y="3566160"/>
-            <a:ext cx="3063240" cy="1371600"/>
-          </a:xfrm>
-          <a:prstGeom prst="rect">
-            <a:avLst/>
-          </a:prstGeom>
-          <a:noFill/>
-        </p:spPr>
-        <p:txBody>
-          <a:bodyPr wrap="square" lIns="0" rIns="0" tIns="0" bIns="0" anchor="t">
-            <a:spAutoFit/>
-          </a:bodyPr>
-          <a:lstStyle/>
-          <a:p>
-            <a:pPr algn="l"/>
-            <a:r>
-              <a:rPr sz="1200" b="0">
-                <a:solidFill>
-                  <a:srgbClr val="4B5563"/>
-                </a:solidFill>
-                <a:latin typeface="Calibri"/>
-              </a:rPr>
-              <a:t>Fossil fuels = ~90% of human CO₂ emissions.</a:t>
-            </a:r>
-          </a:p>
-        </p:txBody>
-      </p:sp>
-      <p:sp>
-        <p:nvSpPr>
-          <p:cNvPr id="8" name="Rectangle 7"/>
+          <p:cNvPr id="7" name="Rectangle 6"/>
           <p:cNvSpPr/>
           <p:nvPr/>
         </p:nvSpPr>
         <p:spPr>
           <a:xfrm>
-            <a:off x="4343400" y="2194560"/>
-            <a:ext cx="3520440" cy="2743200"/>
+            <a:off x="548640" y="2743200"/>
+            <a:ext cx="164592" cy="3108960"/>
           </a:xfrm>
           <a:prstGeom prst="rect">
             <a:avLst/>
           </a:prstGeom>
           <a:solidFill>
-            <a:srgbClr val="F3F4F6"/>
+            <a:srgbClr val="1F4E79"/>
           </a:solidFill>
           <a:ln>
             <a:noFill/>
@@ -4820,20 +5419,20 @@
       </p:sp>
       <p:sp>
         <p:nvSpPr>
-          <p:cNvPr id="9" name="Rectangle 8"/>
+          <p:cNvPr id="8" name="Oval 7"/>
           <p:cNvSpPr/>
           <p:nvPr/>
         </p:nvSpPr>
         <p:spPr>
           <a:xfrm>
-            <a:off x="4343400" y="2194560"/>
-            <a:ext cx="3520440" cy="73152"/>
-          </a:xfrm>
-          <a:prstGeom prst="rect">
+            <a:off x="896112" y="3044952"/>
+            <a:ext cx="585216" cy="585216"/>
+          </a:xfrm>
+          <a:prstGeom prst="ellipse">
             <a:avLst/>
           </a:prstGeom>
           <a:solidFill>
-            <a:srgbClr val="9CA3AF"/>
+            <a:srgbClr val="1F4E79"/>
           </a:solidFill>
           <a:ln>
             <a:noFill/>
@@ -4864,92 +5463,20 @@
       </p:sp>
       <p:sp>
         <p:nvSpPr>
-          <p:cNvPr id="10" name="TextBox 9"/>
-          <p:cNvSpPr txBox="1"/>
-          <p:nvPr/>
-        </p:nvSpPr>
-        <p:spPr>
-          <a:xfrm>
-            <a:off x="4572000" y="2468880"/>
-            <a:ext cx="3063240" cy="914400"/>
-          </a:xfrm>
-          <a:prstGeom prst="rect">
-            <a:avLst/>
-          </a:prstGeom>
-          <a:noFill/>
-        </p:spPr>
-        <p:txBody>
-          <a:bodyPr wrap="square" lIns="0" rIns="0" tIns="0" bIns="0" anchor="t">
-            <a:spAutoFit/>
-          </a:bodyPr>
-          <a:lstStyle/>
-          <a:p>
-            <a:pPr algn="l"/>
-            <a:r>
-              <a:rPr sz="1600" b="1">
-                <a:solidFill>
-                  <a:srgbClr val="1F2937"/>
-                </a:solidFill>
-                <a:latin typeface="Calibri"/>
-              </a:rPr>
-              <a:t>Temperature, sea level,
-and disasters all rising</a:t>
-            </a:r>
-          </a:p>
-        </p:txBody>
-      </p:sp>
-      <p:sp>
-        <p:nvSpPr>
-          <p:cNvPr id="11" name="TextBox 10"/>
-          <p:cNvSpPr txBox="1"/>
-          <p:nvPr/>
-        </p:nvSpPr>
-        <p:spPr>
-          <a:xfrm>
-            <a:off x="4572000" y="3566160"/>
-            <a:ext cx="3063240" cy="1371600"/>
-          </a:xfrm>
-          <a:prstGeom prst="rect">
-            <a:avLst/>
-          </a:prstGeom>
-          <a:noFill/>
-        </p:spPr>
-        <p:txBody>
-          <a:bodyPr wrap="square" lIns="0" rIns="0" tIns="0" bIns="0" anchor="t">
-            <a:spAutoFit/>
-          </a:bodyPr>
-          <a:lstStyle/>
-          <a:p>
-            <a:pPr algn="l"/>
-            <a:r>
-              <a:rPr sz="1200" b="0">
-                <a:solidFill>
-                  <a:srgbClr val="4B5563"/>
-                </a:solidFill>
-                <a:latin typeface="Calibri"/>
-              </a:rPr>
-              <a:t>98% chance one of the next five years
-will be the warmest on record.</a:t>
-            </a:r>
-          </a:p>
-        </p:txBody>
-      </p:sp>
-      <p:sp>
-        <p:nvSpPr>
-          <p:cNvPr id="12" name="Rectangle 11"/>
+          <p:cNvPr id="9" name="Rectangle 8"/>
           <p:cNvSpPr/>
           <p:nvPr/>
         </p:nvSpPr>
         <p:spPr>
           <a:xfrm>
-            <a:off x="8138160" y="2194560"/>
-            <a:ext cx="3520440" cy="2743200"/>
+            <a:off x="940003" y="3325855"/>
+            <a:ext cx="497433" cy="23408"/>
           </a:xfrm>
           <a:prstGeom prst="rect">
             <a:avLst/>
           </a:prstGeom>
           <a:solidFill>
-            <a:srgbClr val="F3F4F6"/>
+            <a:srgbClr val="FFFFFF"/>
           </a:solidFill>
           <a:ln>
             <a:noFill/>
@@ -4980,20 +5507,20 @@
       </p:sp>
       <p:sp>
         <p:nvSpPr>
-          <p:cNvPr id="13" name="Rectangle 12"/>
+          <p:cNvPr id="10" name="Rectangle 9"/>
           <p:cNvSpPr/>
           <p:nvPr/>
         </p:nvSpPr>
         <p:spPr>
           <a:xfrm>
-            <a:off x="8138160" y="2194560"/>
-            <a:ext cx="3520440" cy="73152"/>
+            <a:off x="1177015" y="3088843"/>
+            <a:ext cx="23408" cy="497433"/>
           </a:xfrm>
           <a:prstGeom prst="rect">
             <a:avLst/>
           </a:prstGeom>
           <a:solidFill>
-            <a:srgbClr val="9CA3AF"/>
+            <a:srgbClr val="FFFFFF"/>
           </a:solidFill>
           <a:ln>
             <a:noFill/>
@@ -5024,14 +5551,14 @@
       </p:sp>
       <p:sp>
         <p:nvSpPr>
-          <p:cNvPr id="14" name="TextBox 13"/>
+          <p:cNvPr id="11" name="TextBox 10"/>
           <p:cNvSpPr txBox="1"/>
           <p:nvPr/>
         </p:nvSpPr>
         <p:spPr>
           <a:xfrm>
-            <a:off x="8366760" y="2468880"/>
-            <a:ext cx="3063240" cy="914400"/>
+            <a:off x="1691640" y="3063240"/>
+            <a:ext cx="2240280" cy="914400"/>
           </a:xfrm>
           <a:prstGeom prst="rect">
             <a:avLst/>
@@ -5046,7 +5573,505 @@
           <a:p>
             <a:pPr algn="l"/>
             <a:r>
-              <a:rPr sz="1600" b="1">
+              <a:rPr sz="1500" b="1">
+                <a:solidFill>
+                  <a:srgbClr val="1F2937"/>
+                </a:solidFill>
+                <a:latin typeface="Calibri"/>
+              </a:rPr>
+              <a:t>CO₂ at record highs</a:t>
+            </a:r>
+          </a:p>
+        </p:txBody>
+      </p:sp>
+      <p:sp>
+        <p:nvSpPr>
+          <p:cNvPr id="12" name="TextBox 11"/>
+          <p:cNvSpPr txBox="1"/>
+          <p:nvPr/>
+        </p:nvSpPr>
+        <p:spPr>
+          <a:xfrm>
+            <a:off x="914400" y="4297680"/>
+            <a:ext cx="2971800" cy="1371600"/>
+          </a:xfrm>
+          <a:prstGeom prst="rect">
+            <a:avLst/>
+          </a:prstGeom>
+          <a:noFill/>
+        </p:spPr>
+        <p:txBody>
+          <a:bodyPr wrap="square" lIns="0" rIns="0" tIns="0" bIns="0" anchor="t">
+            <a:spAutoFit/>
+          </a:bodyPr>
+          <a:lstStyle/>
+          <a:p>
+            <a:pPr algn="l"/>
+            <a:r>
+              <a:rPr sz="1250" b="0">
+                <a:solidFill>
+                  <a:srgbClr val="4B5563"/>
+                </a:solidFill>
+                <a:latin typeface="Calibri"/>
+              </a:rPr>
+              <a:t>Fossil fuels = ~90% of human CO₂ emissions.</a:t>
+            </a:r>
+          </a:p>
+        </p:txBody>
+      </p:sp>
+      <p:sp>
+        <p:nvSpPr>
+          <p:cNvPr id="13" name="Rounded Rectangle 12"/>
+          <p:cNvSpPr/>
+          <p:nvPr/>
+        </p:nvSpPr>
+        <p:spPr>
+          <a:xfrm>
+            <a:off x="4343400" y="2743200"/>
+            <a:ext cx="3520440" cy="3108960"/>
+          </a:xfrm>
+          <a:prstGeom prst="roundRect">
+            <a:avLst>
+              <a:gd name="adj" fmla="val 10000"/>
+            </a:avLst>
+          </a:prstGeom>
+          <a:solidFill>
+            <a:srgbClr val="F9FAFB"/>
+          </a:solidFill>
+          <a:ln>
+            <a:noFill/>
+          </a:ln>
+          <a:effectLst/>
+        </p:spPr>
+        <p:style>
+          <a:lnRef idx="1">
+            <a:schemeClr val="accent1"/>
+          </a:lnRef>
+          <a:fillRef idx="3">
+            <a:schemeClr val="accent1"/>
+          </a:fillRef>
+          <a:effectRef idx="2">
+            <a:schemeClr val="accent1"/>
+          </a:effectRef>
+          <a:fontRef idx="minor">
+            <a:schemeClr val="lt1"/>
+          </a:fontRef>
+        </p:style>
+        <p:txBody>
+          <a:bodyPr rtlCol="0" anchor="ctr"/>
+          <a:lstStyle/>
+          <a:p>
+            <a:pPr algn="ctr"/>
+          </a:p>
+        </p:txBody>
+      </p:sp>
+      <p:sp>
+        <p:nvSpPr>
+          <p:cNvPr id="14" name="Rectangle 13"/>
+          <p:cNvSpPr/>
+          <p:nvPr/>
+        </p:nvSpPr>
+        <p:spPr>
+          <a:xfrm>
+            <a:off x="4343400" y="2743200"/>
+            <a:ext cx="164592" cy="3108960"/>
+          </a:xfrm>
+          <a:prstGeom prst="rect">
+            <a:avLst/>
+          </a:prstGeom>
+          <a:solidFill>
+            <a:srgbClr val="D97706"/>
+          </a:solidFill>
+          <a:ln>
+            <a:noFill/>
+          </a:ln>
+          <a:effectLst/>
+        </p:spPr>
+        <p:style>
+          <a:lnRef idx="1">
+            <a:schemeClr val="accent1"/>
+          </a:lnRef>
+          <a:fillRef idx="3">
+            <a:schemeClr val="accent1"/>
+          </a:fillRef>
+          <a:effectRef idx="2">
+            <a:schemeClr val="accent1"/>
+          </a:effectRef>
+          <a:fontRef idx="minor">
+            <a:schemeClr val="lt1"/>
+          </a:fontRef>
+        </p:style>
+        <p:txBody>
+          <a:bodyPr rtlCol="0" anchor="ctr"/>
+          <a:lstStyle/>
+          <a:p>
+            <a:pPr algn="ctr"/>
+          </a:p>
+        </p:txBody>
+      </p:sp>
+      <p:sp>
+        <p:nvSpPr>
+          <p:cNvPr id="15" name="Oval 14"/>
+          <p:cNvSpPr/>
+          <p:nvPr/>
+        </p:nvSpPr>
+        <p:spPr>
+          <a:xfrm>
+            <a:off x="4690872" y="3015691"/>
+            <a:ext cx="585216" cy="643737"/>
+          </a:xfrm>
+          <a:prstGeom prst="ellipse">
+            <a:avLst/>
+          </a:prstGeom>
+          <a:solidFill>
+            <a:srgbClr val="D97706"/>
+          </a:solidFill>
+          <a:ln>
+            <a:noFill/>
+          </a:ln>
+          <a:effectLst/>
+        </p:spPr>
+        <p:style>
+          <a:lnRef idx="1">
+            <a:schemeClr val="accent1"/>
+          </a:lnRef>
+          <a:fillRef idx="3">
+            <a:schemeClr val="accent1"/>
+          </a:fillRef>
+          <a:effectRef idx="2">
+            <a:schemeClr val="accent1"/>
+          </a:effectRef>
+          <a:fontRef idx="minor">
+            <a:schemeClr val="lt1"/>
+          </a:fontRef>
+        </p:style>
+        <p:txBody>
+          <a:bodyPr rtlCol="0" anchor="ctr"/>
+          <a:lstStyle/>
+          <a:p>
+            <a:pPr algn="ctr"/>
+          </a:p>
+        </p:txBody>
+      </p:sp>
+      <p:sp>
+        <p:nvSpPr>
+          <p:cNvPr id="16" name="Oval 15"/>
+          <p:cNvSpPr/>
+          <p:nvPr/>
+        </p:nvSpPr>
+        <p:spPr>
+          <a:xfrm>
+            <a:off x="4851806" y="3220516"/>
+            <a:ext cx="263347" cy="351129"/>
+          </a:xfrm>
+          <a:prstGeom prst="ellipse">
+            <a:avLst/>
+          </a:prstGeom>
+          <a:solidFill>
+            <a:srgbClr val="FDE8CC"/>
+          </a:solidFill>
+          <a:ln>
+            <a:noFill/>
+          </a:ln>
+          <a:effectLst/>
+        </p:spPr>
+        <p:style>
+          <a:lnRef idx="1">
+            <a:schemeClr val="accent1"/>
+          </a:lnRef>
+          <a:fillRef idx="3">
+            <a:schemeClr val="accent1"/>
+          </a:fillRef>
+          <a:effectRef idx="2">
+            <a:schemeClr val="accent1"/>
+          </a:effectRef>
+          <a:fontRef idx="minor">
+            <a:schemeClr val="lt1"/>
+          </a:fontRef>
+        </p:style>
+        <p:txBody>
+          <a:bodyPr rtlCol="0" anchor="ctr"/>
+          <a:lstStyle/>
+          <a:p>
+            <a:pPr algn="ctr"/>
+          </a:p>
+        </p:txBody>
+      </p:sp>
+      <p:sp>
+        <p:nvSpPr>
+          <p:cNvPr id="17" name="TextBox 16"/>
+          <p:cNvSpPr txBox="1"/>
+          <p:nvPr/>
+        </p:nvSpPr>
+        <p:spPr>
+          <a:xfrm>
+            <a:off x="5486400" y="3063240"/>
+            <a:ext cx="2240280" cy="914400"/>
+          </a:xfrm>
+          <a:prstGeom prst="rect">
+            <a:avLst/>
+          </a:prstGeom>
+          <a:noFill/>
+        </p:spPr>
+        <p:txBody>
+          <a:bodyPr wrap="square" lIns="0" rIns="0" tIns="0" bIns="0" anchor="t">
+            <a:spAutoFit/>
+          </a:bodyPr>
+          <a:lstStyle/>
+          <a:p>
+            <a:pPr algn="l"/>
+            <a:r>
+              <a:rPr sz="1500" b="1">
+                <a:solidFill>
+                  <a:srgbClr val="1F2937"/>
+                </a:solidFill>
+                <a:latin typeface="Calibri"/>
+              </a:rPr>
+              <a:t>Rising temperature,
+rising disasters</a:t>
+            </a:r>
+          </a:p>
+        </p:txBody>
+      </p:sp>
+      <p:sp>
+        <p:nvSpPr>
+          <p:cNvPr id="18" name="TextBox 17"/>
+          <p:cNvSpPr txBox="1"/>
+          <p:nvPr/>
+        </p:nvSpPr>
+        <p:spPr>
+          <a:xfrm>
+            <a:off x="4709160" y="4297680"/>
+            <a:ext cx="2971800" cy="1371600"/>
+          </a:xfrm>
+          <a:prstGeom prst="rect">
+            <a:avLst/>
+          </a:prstGeom>
+          <a:noFill/>
+        </p:spPr>
+        <p:txBody>
+          <a:bodyPr wrap="square" lIns="0" rIns="0" tIns="0" bIns="0" anchor="t">
+            <a:spAutoFit/>
+          </a:bodyPr>
+          <a:lstStyle/>
+          <a:p>
+            <a:pPr algn="l"/>
+            <a:r>
+              <a:rPr sz="1250" b="0">
+                <a:solidFill>
+                  <a:srgbClr val="4B5563"/>
+                </a:solidFill>
+                <a:latin typeface="Calibri"/>
+              </a:rPr>
+              <a:t>98% chance one of the next five years
+will be the warmest on record.</a:t>
+            </a:r>
+          </a:p>
+        </p:txBody>
+      </p:sp>
+      <p:sp>
+        <p:nvSpPr>
+          <p:cNvPr id="19" name="Rounded Rectangle 18"/>
+          <p:cNvSpPr/>
+          <p:nvPr/>
+        </p:nvSpPr>
+        <p:spPr>
+          <a:xfrm>
+            <a:off x="8138160" y="2743200"/>
+            <a:ext cx="3520440" cy="3108960"/>
+          </a:xfrm>
+          <a:prstGeom prst="roundRect">
+            <a:avLst>
+              <a:gd name="adj" fmla="val 10000"/>
+            </a:avLst>
+          </a:prstGeom>
+          <a:solidFill>
+            <a:srgbClr val="F9FAFB"/>
+          </a:solidFill>
+          <a:ln>
+            <a:noFill/>
+          </a:ln>
+          <a:effectLst/>
+        </p:spPr>
+        <p:style>
+          <a:lnRef idx="1">
+            <a:schemeClr val="accent1"/>
+          </a:lnRef>
+          <a:fillRef idx="3">
+            <a:schemeClr val="accent1"/>
+          </a:fillRef>
+          <a:effectRef idx="2">
+            <a:schemeClr val="accent1"/>
+          </a:effectRef>
+          <a:fontRef idx="minor">
+            <a:schemeClr val="lt1"/>
+          </a:fontRef>
+        </p:style>
+        <p:txBody>
+          <a:bodyPr rtlCol="0" anchor="ctr"/>
+          <a:lstStyle/>
+          <a:p>
+            <a:pPr algn="ctr"/>
+          </a:p>
+        </p:txBody>
+      </p:sp>
+      <p:sp>
+        <p:nvSpPr>
+          <p:cNvPr id="20" name="Rectangle 19"/>
+          <p:cNvSpPr/>
+          <p:nvPr/>
+        </p:nvSpPr>
+        <p:spPr>
+          <a:xfrm>
+            <a:off x="8138160" y="2743200"/>
+            <a:ext cx="164592" cy="3108960"/>
+          </a:xfrm>
+          <a:prstGeom prst="rect">
+            <a:avLst/>
+          </a:prstGeom>
+          <a:solidFill>
+            <a:srgbClr val="1F4E79"/>
+          </a:solidFill>
+          <a:ln>
+            <a:noFill/>
+          </a:ln>
+          <a:effectLst/>
+        </p:spPr>
+        <p:style>
+          <a:lnRef idx="1">
+            <a:schemeClr val="accent1"/>
+          </a:lnRef>
+          <a:fillRef idx="3">
+            <a:schemeClr val="accent1"/>
+          </a:fillRef>
+          <a:effectRef idx="2">
+            <a:schemeClr val="accent1"/>
+          </a:effectRef>
+          <a:fontRef idx="minor">
+            <a:schemeClr val="lt1"/>
+          </a:fontRef>
+        </p:style>
+        <p:txBody>
+          <a:bodyPr rtlCol="0" anchor="ctr"/>
+          <a:lstStyle/>
+          <a:p>
+            <a:pPr algn="ctr"/>
+          </a:p>
+        </p:txBody>
+      </p:sp>
+      <p:sp>
+        <p:nvSpPr>
+          <p:cNvPr id="21" name="Oval 20"/>
+          <p:cNvSpPr/>
+          <p:nvPr/>
+        </p:nvSpPr>
+        <p:spPr>
+          <a:xfrm>
+            <a:off x="8485632" y="3044952"/>
+            <a:ext cx="585216" cy="585216"/>
+          </a:xfrm>
+          <a:prstGeom prst="ellipse">
+            <a:avLst/>
+          </a:prstGeom>
+          <a:solidFill>
+            <a:srgbClr val="1F4E79"/>
+          </a:solidFill>
+          <a:ln>
+            <a:noFill/>
+          </a:ln>
+          <a:effectLst/>
+        </p:spPr>
+        <p:style>
+          <a:lnRef idx="1">
+            <a:schemeClr val="accent1"/>
+          </a:lnRef>
+          <a:fillRef idx="3">
+            <a:schemeClr val="accent1"/>
+          </a:fillRef>
+          <a:effectRef idx="2">
+            <a:schemeClr val="accent1"/>
+          </a:effectRef>
+          <a:fontRef idx="minor">
+            <a:schemeClr val="lt1"/>
+          </a:fontRef>
+        </p:style>
+        <p:txBody>
+          <a:bodyPr rtlCol="0" anchor="ctr"/>
+          <a:lstStyle/>
+          <a:p>
+            <a:pPr algn="ctr"/>
+          </a:p>
+        </p:txBody>
+      </p:sp>
+      <p:sp>
+        <p:nvSpPr>
+          <p:cNvPr id="22" name="Lightning Bolt 21"/>
+          <p:cNvSpPr/>
+          <p:nvPr/>
+        </p:nvSpPr>
+        <p:spPr>
+          <a:xfrm>
+            <a:off x="8631936" y="3118104"/>
+            <a:ext cx="292608" cy="438912"/>
+          </a:xfrm>
+          <a:prstGeom prst="lightningBolt">
+            <a:avLst/>
+          </a:prstGeom>
+          <a:solidFill>
+            <a:srgbClr val="FFFFFF"/>
+          </a:solidFill>
+          <a:ln>
+            <a:noFill/>
+          </a:ln>
+          <a:effectLst/>
+        </p:spPr>
+        <p:style>
+          <a:lnRef idx="1">
+            <a:schemeClr val="accent1"/>
+          </a:lnRef>
+          <a:fillRef idx="3">
+            <a:schemeClr val="accent1"/>
+          </a:fillRef>
+          <a:effectRef idx="2">
+            <a:schemeClr val="accent1"/>
+          </a:effectRef>
+          <a:fontRef idx="minor">
+            <a:schemeClr val="lt1"/>
+          </a:fontRef>
+        </p:style>
+        <p:txBody>
+          <a:bodyPr rtlCol="0" anchor="ctr"/>
+          <a:lstStyle/>
+          <a:p>
+            <a:pPr algn="ctr"/>
+          </a:p>
+        </p:txBody>
+      </p:sp>
+      <p:sp>
+        <p:nvSpPr>
+          <p:cNvPr id="23" name="TextBox 22"/>
+          <p:cNvSpPr txBox="1"/>
+          <p:nvPr/>
+        </p:nvSpPr>
+        <p:spPr>
+          <a:xfrm>
+            <a:off x="9281160" y="3063240"/>
+            <a:ext cx="2240280" cy="914400"/>
+          </a:xfrm>
+          <a:prstGeom prst="rect">
+            <a:avLst/>
+          </a:prstGeom>
+          <a:noFill/>
+        </p:spPr>
+        <p:txBody>
+          <a:bodyPr wrap="square" lIns="0" rIns="0" tIns="0" bIns="0" anchor="t">
+            <a:spAutoFit/>
+          </a:bodyPr>
+          <a:lstStyle/>
+          <a:p>
+            <a:pPr algn="l"/>
+            <a:r>
+              <a:rPr sz="1500" b="1">
                 <a:solidFill>
                   <a:srgbClr val="1F2937"/>
                 </a:solidFill>
@@ -5059,14 +6084,14 @@
       </p:sp>
       <p:sp>
         <p:nvSpPr>
-          <p:cNvPr id="15" name="TextBox 14"/>
+          <p:cNvPr id="24" name="TextBox 23"/>
           <p:cNvSpPr txBox="1"/>
           <p:nvPr/>
         </p:nvSpPr>
         <p:spPr>
           <a:xfrm>
-            <a:off x="8366760" y="3566160"/>
-            <a:ext cx="3063240" cy="1371600"/>
+            <a:off x="8503920" y="4297680"/>
+            <a:ext cx="2971800" cy="1371600"/>
           </a:xfrm>
           <a:prstGeom prst="rect">
             <a:avLst/>
@@ -5081,7 +6106,7 @@
           <a:p>
             <a:pPr algn="l"/>
             <a:r>
-              <a:rPr sz="1200" b="0">
+              <a:rPr sz="1250" b="0">
                 <a:solidFill>
                   <a:srgbClr val="4B5563"/>
                 </a:solidFill>
@@ -5094,13 +6119,13 @@
       </p:sp>
       <p:sp>
         <p:nvSpPr>
-          <p:cNvPr id="16" name="TextBox 15"/>
+          <p:cNvPr id="25" name="TextBox 24"/>
           <p:cNvSpPr txBox="1"/>
           <p:nvPr/>
         </p:nvSpPr>
         <p:spPr>
           <a:xfrm>
-            <a:off x="548640" y="5303520"/>
+            <a:off x="548640" y="6080760"/>
             <a:ext cx="10972800" cy="365760"/>
           </a:xfrm>
           <a:prstGeom prst="rect">
@@ -5122,20 +6147,20 @@
                 </a:solidFill>
                 <a:latin typeface="Calibri"/>
               </a:rPr>
-              <a:t>I stand by the data. What follows is what that deck didn’t show.</a:t>
-            </a:r>
-          </a:p>
-        </p:txBody>
-      </p:sp>
-      <p:sp>
-        <p:nvSpPr>
-          <p:cNvPr id="17" name="TextBox 16"/>
+              <a:t>I stand by the data. What follows is what that deck didn't show.</a:t>
+            </a:r>
+          </a:p>
+        </p:txBody>
+      </p:sp>
+      <p:sp>
+        <p:nvSpPr>
+          <p:cNvPr id="26" name="TextBox 25"/>
           <p:cNvSpPr txBox="1"/>
           <p:nvPr/>
         </p:nvSpPr>
         <p:spPr>
           <a:xfrm>
-            <a:off x="457200" y="6446520"/>
+            <a:off x="457200" y="6537960"/>
             <a:ext cx="7315200" cy="274320"/>
           </a:xfrm>
           <a:prstGeom prst="rect">
@@ -5157,21 +6182,21 @@
                 </a:solidFill>
                 <a:latin typeface="Calibri"/>
               </a:rPr>
-              <a:t>Choolwe  •  The Case For Fossil Fuels  •  Follow-up to “How Climate Change Affects the World We Live In”</a:t>
-            </a:r>
-          </a:p>
-        </p:txBody>
-      </p:sp>
-      <p:sp>
-        <p:nvSpPr>
-          <p:cNvPr id="18" name="TextBox 17"/>
+              <a:t>Choolwe  •  The Case For Fossil Fuels</a:t>
+            </a:r>
+          </a:p>
+        </p:txBody>
+      </p:sp>
+      <p:sp>
+        <p:nvSpPr>
+          <p:cNvPr id="27" name="TextBox 26"/>
           <p:cNvSpPr txBox="1"/>
           <p:nvPr/>
         </p:nvSpPr>
         <p:spPr>
           <a:xfrm>
-            <a:off x="10972800" y="6446520"/>
-            <a:ext cx="914400" cy="274320"/>
+            <a:off x="10789920" y="6537960"/>
+            <a:ext cx="1097280" cy="274320"/>
           </a:xfrm>
           <a:prstGeom prst="rect">
             <a:avLst/>
@@ -5192,7 +6217,7 @@
                 </a:solidFill>
                 <a:latin typeface="Calibri"/>
               </a:rPr>
-              <a:t>3 / 8</a:t>
+              <a:t>3 / 9</a:t>
             </a:r>
           </a:p>
         </p:txBody>
@@ -5224,13 +6249,13 @@
         <p:spPr>
           <a:xfrm>
             <a:off x="0" y="0"/>
-            <a:ext cx="12191695" cy="73152"/>
+            <a:ext cx="12191695" cy="146304"/>
           </a:xfrm>
           <a:prstGeom prst="rect">
             <a:avLst/>
           </a:prstGeom>
           <a:solidFill>
-            <a:srgbClr val="1F4E79"/>
+            <a:srgbClr val="D97706"/>
           </a:solidFill>
           <a:ln>
             <a:noFill/>
@@ -5261,14 +6286,58 @@
       </p:sp>
       <p:sp>
         <p:nvSpPr>
-          <p:cNvPr id="3" name="TextBox 2"/>
+          <p:cNvPr id="3" name="Oval 2"/>
+          <p:cNvSpPr/>
+          <p:nvPr/>
+        </p:nvSpPr>
+        <p:spPr>
+          <a:xfrm>
+            <a:off x="576072" y="539496"/>
+            <a:ext cx="128016" cy="128016"/>
+          </a:xfrm>
+          <a:prstGeom prst="ellipse">
+            <a:avLst/>
+          </a:prstGeom>
+          <a:solidFill>
+            <a:srgbClr val="D97706"/>
+          </a:solidFill>
+          <a:ln>
+            <a:noFill/>
+          </a:ln>
+          <a:effectLst/>
+        </p:spPr>
+        <p:style>
+          <a:lnRef idx="1">
+            <a:schemeClr val="accent1"/>
+          </a:lnRef>
+          <a:fillRef idx="3">
+            <a:schemeClr val="accent1"/>
+          </a:fillRef>
+          <a:effectRef idx="2">
+            <a:schemeClr val="accent1"/>
+          </a:effectRef>
+          <a:fontRef idx="minor">
+            <a:schemeClr val="lt1"/>
+          </a:fontRef>
+        </p:style>
+        <p:txBody>
+          <a:bodyPr rtlCol="0" anchor="ctr"/>
+          <a:lstStyle/>
+          <a:p>
+            <a:pPr algn="ctr"/>
+          </a:p>
+        </p:txBody>
+      </p:sp>
+      <p:sp>
+        <p:nvSpPr>
+          <p:cNvPr id="4" name="TextBox 3"/>
           <p:cNvSpPr txBox="1"/>
           <p:nvPr/>
         </p:nvSpPr>
         <p:spPr>
           <a:xfrm>
-            <a:off x="548640" y="365760"/>
-            <a:ext cx="11064240" cy="1188720"/>
+            <a:off x="822960" y="457200"/>
+            <a:ext cx="4572000" cy="365760"/>
           </a:xfrm>
           <a:prstGeom prst="rect">
             <a:avLst/>
@@ -5283,20 +6352,56 @@
           <a:p>
             <a:pPr algn="l"/>
             <a:r>
-              <a:rPr sz="2200" b="1">
-                <a:solidFill>
-                  <a:srgbClr val="1F2937"/>
+              <a:rPr sz="1100" b="1">
+                <a:solidFill>
+                  <a:srgbClr val="D97706"/>
                 </a:solidFill>
                 <a:latin typeface="Calibri"/>
               </a:rPr>
-              <a:t>Cooking smoke from biomass kills ~3.2 million people every year — most in homes that lack access to clean fuel.</a:t>
+              <a:t>COMPLICATION  •  THE PRESENT-DAY DEATH TOLL</a:t>
+            </a:r>
+          </a:p>
+        </p:txBody>
+      </p:sp>
+      <p:sp>
+        <p:nvSpPr>
+          <p:cNvPr id="5" name="TextBox 4"/>
+          <p:cNvSpPr txBox="1"/>
+          <p:nvPr/>
+        </p:nvSpPr>
+        <p:spPr>
+          <a:xfrm>
+            <a:off x="548640" y="1005840"/>
+            <a:ext cx="11064240" cy="1188720"/>
+          </a:xfrm>
+          <a:prstGeom prst="rect">
+            <a:avLst/>
+          </a:prstGeom>
+          <a:noFill/>
+        </p:spPr>
+        <p:txBody>
+          <a:bodyPr wrap="square" lIns="0" rIns="0" tIns="0" bIns="0" anchor="t">
+            <a:spAutoFit/>
+          </a:bodyPr>
+          <a:lstStyle/>
+          <a:p>
+            <a:pPr algn="l"/>
+            <a:r>
+              <a:rPr sz="2300" b="1">
+                <a:solidFill>
+                  <a:srgbClr val="1F2937"/>
+                </a:solidFill>
+                <a:latin typeface="Calibri"/>
+              </a:rPr>
+              <a:t>Cooking smoke kills ~3.2 million people every year —
+most in homes that have no clean fuel.</a:t>
             </a:r>
           </a:p>
         </p:txBody>
       </p:sp>
       <p:pic>
         <p:nvPicPr>
-          <p:cNvPr id="4" name="Picture 3" descr="deaths_per_year.png"/>
+          <p:cNvPr id="6" name="Picture 5" descr="deaths_per_year.png"/>
           <p:cNvPicPr>
             <a:picLocks noChangeAspect="1"/>
           </p:cNvPicPr>
@@ -5310,8 +6415,8 @@
         </p:blipFill>
         <p:spPr>
           <a:xfrm>
-            <a:off x="548640" y="1737360"/>
-            <a:ext cx="8229600" cy="4172045"/>
+            <a:off x="548640" y="2926080"/>
+            <a:ext cx="7863840" cy="2274325"/>
           </a:xfrm>
           <a:prstGeom prst="rect">
             <a:avLst/>
@@ -5320,13 +6425,59 @@
       </p:pic>
       <p:sp>
         <p:nvSpPr>
-          <p:cNvPr id="5" name="TextBox 4"/>
+          <p:cNvPr id="7" name="Rounded Rectangle 6"/>
+          <p:cNvSpPr/>
+          <p:nvPr/>
+        </p:nvSpPr>
+        <p:spPr>
+          <a:xfrm>
+            <a:off x="8686800" y="2926080"/>
+            <a:ext cx="3108960" cy="2926080"/>
+          </a:xfrm>
+          <a:prstGeom prst="roundRect">
+            <a:avLst>
+              <a:gd name="adj" fmla="val 10000"/>
+            </a:avLst>
+          </a:prstGeom>
+          <a:solidFill>
+            <a:srgbClr val="FDE8CC"/>
+          </a:solidFill>
+          <a:ln>
+            <a:noFill/>
+          </a:ln>
+          <a:effectLst/>
+        </p:spPr>
+        <p:style>
+          <a:lnRef idx="1">
+            <a:schemeClr val="accent1"/>
+          </a:lnRef>
+          <a:fillRef idx="3">
+            <a:schemeClr val="accent1"/>
+          </a:fillRef>
+          <a:effectRef idx="2">
+            <a:schemeClr val="accent1"/>
+          </a:effectRef>
+          <a:fontRef idx="minor">
+            <a:schemeClr val="lt1"/>
+          </a:fontRef>
+        </p:style>
+        <p:txBody>
+          <a:bodyPr rtlCol="0" anchor="ctr"/>
+          <a:lstStyle/>
+          <a:p>
+            <a:pPr algn="ctr"/>
+          </a:p>
+        </p:txBody>
+      </p:sp>
+      <p:sp>
+        <p:nvSpPr>
+          <p:cNvPr id="8" name="TextBox 7"/>
           <p:cNvSpPr txBox="1"/>
           <p:nvPr/>
         </p:nvSpPr>
         <p:spPr>
           <a:xfrm>
-            <a:off x="9144000" y="2103120"/>
+            <a:off x="8915400" y="3108960"/>
             <a:ext cx="2743200" cy="457200"/>
           </a:xfrm>
           <a:prstGeom prst="rect">
@@ -5342,28 +6493,27 @@
           <a:p>
             <a:pPr algn="l"/>
             <a:r>
-              <a:rPr sz="1300" b="0">
-                <a:solidFill>
-                  <a:srgbClr val="4B5563"/>
+              <a:rPr sz="1000" b="1">
+                <a:solidFill>
+                  <a:srgbClr val="D97706"/>
                 </a:solidFill>
                 <a:latin typeface="Calibri"/>
               </a:rPr>
-              <a:t>What my first deck
-left out:</a:t>
-            </a:r>
-          </a:p>
-        </p:txBody>
-      </p:sp>
-      <p:sp>
-        <p:nvSpPr>
-          <p:cNvPr id="6" name="TextBox 5"/>
+              <a:t>WHAT MY FIRST</a:t>
+            </a:r>
+          </a:p>
+        </p:txBody>
+      </p:sp>
+      <p:sp>
+        <p:nvSpPr>
+          <p:cNvPr id="9" name="TextBox 8"/>
           <p:cNvSpPr txBox="1"/>
           <p:nvPr/>
         </p:nvSpPr>
         <p:spPr>
           <a:xfrm>
-            <a:off x="9144000" y="2926080"/>
-            <a:ext cx="2743200" cy="2286000"/>
+            <a:off x="8915400" y="3337560"/>
+            <a:ext cx="2743200" cy="457200"/>
           </a:xfrm>
           <a:prstGeom prst="rect">
             <a:avLst/>
@@ -5378,28 +6528,27 @@
           <a:p>
             <a:pPr algn="l"/>
             <a:r>
-              <a:rPr sz="1400" b="0">
-                <a:solidFill>
-                  <a:srgbClr val="1F2937"/>
+              <a:rPr sz="1000" b="1">
+                <a:solidFill>
+                  <a:srgbClr val="D97706"/>
                 </a:solidFill>
                 <a:latin typeface="Calibri"/>
               </a:rPr>
-              <a:t>Energy poverty has a body count — today, not tomorrow.
-Of those 3.2M deaths, ~815,000 are in sub-Saharan Africa.</a:t>
-            </a:r>
-          </a:p>
-        </p:txBody>
-      </p:sp>
-      <p:sp>
-        <p:nvSpPr>
-          <p:cNvPr id="7" name="TextBox 6"/>
+              <a:t>DECK LEFT OUT</a:t>
+            </a:r>
+          </a:p>
+        </p:txBody>
+      </p:sp>
+      <p:sp>
+        <p:nvSpPr>
+          <p:cNvPr id="10" name="TextBox 9"/>
           <p:cNvSpPr txBox="1"/>
           <p:nvPr/>
         </p:nvSpPr>
         <p:spPr>
           <a:xfrm>
-            <a:off x="548640" y="6035040"/>
-            <a:ext cx="10972800" cy="274320"/>
+            <a:off x="8915400" y="3886200"/>
+            <a:ext cx="2743200" cy="640080"/>
           </a:xfrm>
           <a:prstGeom prst="rect">
             <a:avLst/>
@@ -5414,27 +6563,27 @@
           <a:p>
             <a:pPr algn="l"/>
             <a:r>
-              <a:rPr sz="900" b="0">
-                <a:solidFill>
-                  <a:srgbClr val="9CA3AF"/>
+              <a:rPr sz="3200" b="1">
+                <a:solidFill>
+                  <a:srgbClr val="D97706"/>
                 </a:solidFill>
                 <a:latin typeface="Calibri"/>
               </a:rPr>
-              <a:t>Sources: WHO Household Air Pollution Fact Sheet; WHO Ambient Air Pollution; WHO World Malaria Report.</a:t>
-            </a:r>
-          </a:p>
-        </p:txBody>
-      </p:sp>
-      <p:sp>
-        <p:nvSpPr>
-          <p:cNvPr id="8" name="TextBox 7"/>
+              <a:t>815,000</a:t>
+            </a:r>
+          </a:p>
+        </p:txBody>
+      </p:sp>
+      <p:sp>
+        <p:nvSpPr>
+          <p:cNvPr id="11" name="TextBox 10"/>
           <p:cNvSpPr txBox="1"/>
           <p:nvPr/>
         </p:nvSpPr>
         <p:spPr>
           <a:xfrm>
-            <a:off x="457200" y="6446520"/>
-            <a:ext cx="7315200" cy="274320"/>
+            <a:off x="8915400" y="4526280"/>
+            <a:ext cx="2743200" cy="457200"/>
           </a:xfrm>
           <a:prstGeom prst="rect">
             <a:avLst/>
@@ -5449,27 +6598,27 @@
           <a:p>
             <a:pPr algn="l"/>
             <a:r>
-              <a:rPr sz="900" b="0">
-                <a:solidFill>
-                  <a:srgbClr val="9CA3AF"/>
+              <a:rPr sz="1200" b="0">
+                <a:solidFill>
+                  <a:srgbClr val="1F2937"/>
                 </a:solidFill>
                 <a:latin typeface="Calibri"/>
               </a:rPr>
-              <a:t>Choolwe  •  The Case For Fossil Fuels  •  Follow-up to “How Climate Change Affects the World We Live In”</a:t>
-            </a:r>
-          </a:p>
-        </p:txBody>
-      </p:sp>
-      <p:sp>
-        <p:nvSpPr>
-          <p:cNvPr id="9" name="TextBox 8"/>
+              <a:t>deaths in sub-Saharan</a:t>
+            </a:r>
+          </a:p>
+        </p:txBody>
+      </p:sp>
+      <p:sp>
+        <p:nvSpPr>
+          <p:cNvPr id="12" name="TextBox 11"/>
           <p:cNvSpPr txBox="1"/>
           <p:nvPr/>
         </p:nvSpPr>
         <p:spPr>
           <a:xfrm>
-            <a:off x="10972800" y="6446520"/>
-            <a:ext cx="914400" cy="274320"/>
+            <a:off x="8915400" y="4754880"/>
+            <a:ext cx="2743200" cy="457200"/>
           </a:xfrm>
           <a:prstGeom prst="rect">
             <a:avLst/>
@@ -5482,15 +6631,121 @@
           </a:bodyPr>
           <a:lstStyle/>
           <a:p>
-            <a:pPr algn="r"/>
-            <a:r>
-              <a:rPr sz="900" b="0">
-                <a:solidFill>
-                  <a:srgbClr val="9CA3AF"/>
+            <a:pPr algn="l"/>
+            <a:r>
+              <a:rPr sz="1200" b="0">
+                <a:solidFill>
+                  <a:srgbClr val="1F2937"/>
                 </a:solidFill>
                 <a:latin typeface="Calibri"/>
               </a:rPr>
-              <a:t>4 / 8</a:t>
+              <a:t>Africa, every year.</a:t>
+            </a:r>
+          </a:p>
+        </p:txBody>
+      </p:sp>
+      <p:sp>
+        <p:nvSpPr>
+          <p:cNvPr id="13" name="TextBox 12"/>
+          <p:cNvSpPr txBox="1"/>
+          <p:nvPr/>
+        </p:nvSpPr>
+        <p:spPr>
+          <a:xfrm>
+            <a:off x="8915400" y="5212080"/>
+            <a:ext cx="2743200" cy="457200"/>
+          </a:xfrm>
+          <a:prstGeom prst="rect">
+            <a:avLst/>
+          </a:prstGeom>
+          <a:noFill/>
+        </p:spPr>
+        <p:txBody>
+          <a:bodyPr wrap="square" lIns="0" rIns="0" tIns="0" bIns="0" anchor="t">
+            <a:spAutoFit/>
+          </a:bodyPr>
+          <a:lstStyle/>
+          <a:p>
+            <a:pPr algn="l"/>
+            <a:r>
+              <a:rPr sz="1100" b="0">
+                <a:solidFill>
+                  <a:srgbClr val="4B5563"/>
+                </a:solidFill>
+                <a:latin typeface="Calibri"/>
+              </a:rPr>
+              <a:t>From a problem we already know
+how to solve: clean fuel.</a:t>
+            </a:r>
+          </a:p>
+        </p:txBody>
+      </p:sp>
+      <p:sp>
+        <p:nvSpPr>
+          <p:cNvPr id="14" name="TextBox 13"/>
+          <p:cNvSpPr txBox="1"/>
+          <p:nvPr/>
+        </p:nvSpPr>
+        <p:spPr>
+          <a:xfrm>
+            <a:off x="457200" y="6537960"/>
+            <a:ext cx="7315200" cy="274320"/>
+          </a:xfrm>
+          <a:prstGeom prst="rect">
+            <a:avLst/>
+          </a:prstGeom>
+          <a:noFill/>
+        </p:spPr>
+        <p:txBody>
+          <a:bodyPr wrap="square" lIns="0" rIns="0" tIns="0" bIns="0" anchor="t">
+            <a:spAutoFit/>
+          </a:bodyPr>
+          <a:lstStyle/>
+          <a:p>
+            <a:pPr algn="l"/>
+            <a:r>
+              <a:rPr sz="900" b="0">
+                <a:solidFill>
+                  <a:srgbClr val="9CA3AF"/>
+                </a:solidFill>
+                <a:latin typeface="Calibri"/>
+              </a:rPr>
+              <a:t>Choolwe  •  The Case For Fossil Fuels</a:t>
+            </a:r>
+          </a:p>
+        </p:txBody>
+      </p:sp>
+      <p:sp>
+        <p:nvSpPr>
+          <p:cNvPr id="15" name="TextBox 14"/>
+          <p:cNvSpPr txBox="1"/>
+          <p:nvPr/>
+        </p:nvSpPr>
+        <p:spPr>
+          <a:xfrm>
+            <a:off x="10789920" y="6537960"/>
+            <a:ext cx="1097280" cy="274320"/>
+          </a:xfrm>
+          <a:prstGeom prst="rect">
+            <a:avLst/>
+          </a:prstGeom>
+          <a:noFill/>
+        </p:spPr>
+        <p:txBody>
+          <a:bodyPr wrap="square" lIns="0" rIns="0" tIns="0" bIns="0" anchor="t">
+            <a:spAutoFit/>
+          </a:bodyPr>
+          <a:lstStyle/>
+          <a:p>
+            <a:pPr algn="r"/>
+            <a:r>
+              <a:rPr sz="900" b="0">
+                <a:solidFill>
+                  <a:srgbClr val="9CA3AF"/>
+                </a:solidFill>
+                <a:latin typeface="Calibri"/>
+              </a:rPr>
+              <a:t>4 / 9</a:t>
             </a:r>
           </a:p>
         </p:txBody>
@@ -5522,13 +6777,13 @@
         <p:spPr>
           <a:xfrm>
             <a:off x="0" y="0"/>
-            <a:ext cx="12191695" cy="73152"/>
+            <a:ext cx="12191695" cy="146304"/>
           </a:xfrm>
           <a:prstGeom prst="rect">
             <a:avLst/>
           </a:prstGeom>
           <a:solidFill>
-            <a:srgbClr val="1F4E79"/>
+            <a:srgbClr val="D97706"/>
           </a:solidFill>
           <a:ln>
             <a:noFill/>
@@ -5559,14 +6814,58 @@
       </p:sp>
       <p:sp>
         <p:nvSpPr>
-          <p:cNvPr id="3" name="TextBox 2"/>
+          <p:cNvPr id="3" name="Oval 2"/>
+          <p:cNvSpPr/>
+          <p:nvPr/>
+        </p:nvSpPr>
+        <p:spPr>
+          <a:xfrm>
+            <a:off x="576072" y="539496"/>
+            <a:ext cx="128016" cy="128016"/>
+          </a:xfrm>
+          <a:prstGeom prst="ellipse">
+            <a:avLst/>
+          </a:prstGeom>
+          <a:solidFill>
+            <a:srgbClr val="D97706"/>
+          </a:solidFill>
+          <a:ln>
+            <a:noFill/>
+          </a:ln>
+          <a:effectLst/>
+        </p:spPr>
+        <p:style>
+          <a:lnRef idx="1">
+            <a:schemeClr val="accent1"/>
+          </a:lnRef>
+          <a:fillRef idx="3">
+            <a:schemeClr val="accent1"/>
+          </a:fillRef>
+          <a:effectRef idx="2">
+            <a:schemeClr val="accent1"/>
+          </a:effectRef>
+          <a:fontRef idx="minor">
+            <a:schemeClr val="lt1"/>
+          </a:fontRef>
+        </p:style>
+        <p:txBody>
+          <a:bodyPr rtlCol="0" anchor="ctr"/>
+          <a:lstStyle/>
+          <a:p>
+            <a:pPr algn="ctr"/>
+          </a:p>
+        </p:txBody>
+      </p:sp>
+      <p:sp>
+        <p:nvSpPr>
+          <p:cNvPr id="4" name="TextBox 3"/>
           <p:cNvSpPr txBox="1"/>
           <p:nvPr/>
         </p:nvSpPr>
         <p:spPr>
           <a:xfrm>
-            <a:off x="548640" y="365760"/>
-            <a:ext cx="11064240" cy="1188720"/>
+            <a:off x="822960" y="457200"/>
+            <a:ext cx="4572000" cy="365760"/>
           </a:xfrm>
           <a:prstGeom prst="rect">
             <a:avLst/>
@@ -5581,20 +6880,56 @@
           <a:p>
             <a:pPr algn="l"/>
             <a:r>
-              <a:rPr sz="2000" b="1">
-                <a:solidFill>
-                  <a:srgbClr val="1F2937"/>
+              <a:rPr sz="1100" b="1">
+                <a:solidFill>
+                  <a:srgbClr val="D97706"/>
                 </a:solidFill>
                 <a:latin typeface="Calibri"/>
               </a:rPr>
-              <a:t>Africa hosts 17% of the world’s people, caused under 3% of cumulative emissions — and is being asked to skip the ladder every wealthy country climbed.</a:t>
+              <a:t>COMPLICATION  •  THE JUSTICE ASYMMETRY</a:t>
+            </a:r>
+          </a:p>
+        </p:txBody>
+      </p:sp>
+      <p:sp>
+        <p:nvSpPr>
+          <p:cNvPr id="5" name="TextBox 4"/>
+          <p:cNvSpPr txBox="1"/>
+          <p:nvPr/>
+        </p:nvSpPr>
+        <p:spPr>
+          <a:xfrm>
+            <a:off x="548640" y="1005840"/>
+            <a:ext cx="11064240" cy="1280160"/>
+          </a:xfrm>
+          <a:prstGeom prst="rect">
+            <a:avLst/>
+          </a:prstGeom>
+          <a:noFill/>
+        </p:spPr>
+        <p:txBody>
+          <a:bodyPr wrap="square" lIns="0" rIns="0" tIns="0" bIns="0" anchor="t">
+            <a:spAutoFit/>
+          </a:bodyPr>
+          <a:lstStyle/>
+          <a:p>
+            <a:pPr algn="l"/>
+            <a:r>
+              <a:rPr sz="2100" b="1">
+                <a:solidFill>
+                  <a:srgbClr val="1F2937"/>
+                </a:solidFill>
+                <a:latin typeface="Calibri"/>
+              </a:rPr>
+              <a:t>Africa hosts 17% of the world's people, caused under 3% of cumulative
+emissions — and is being asked to skip the ladder every wealthy country climbed.</a:t>
             </a:r>
           </a:p>
         </p:txBody>
       </p:sp>
       <p:pic>
         <p:nvPicPr>
-          <p:cNvPr id="4" name="Picture 3" descr="africa_asymmetry.png"/>
+          <p:cNvPr id="6" name="Picture 5" descr="africa_asymmetry.png"/>
           <p:cNvPicPr>
             <a:picLocks noChangeAspect="1"/>
           </p:cNvPicPr>
@@ -5608,8 +6943,8 @@
         </p:blipFill>
         <p:spPr>
           <a:xfrm>
-            <a:off x="548640" y="1828800"/>
-            <a:ext cx="6858000" cy="4618434"/>
+            <a:off x="365760" y="2651760"/>
+            <a:ext cx="11430000" cy="2230367"/>
           </a:xfrm>
           <a:prstGeom prst="rect">
             <a:avLst/>
@@ -5618,14 +6953,60 @@
       </p:pic>
       <p:sp>
         <p:nvSpPr>
-          <p:cNvPr id="5" name="TextBox 4"/>
+          <p:cNvPr id="7" name="Rounded Rectangle 6"/>
+          <p:cNvSpPr/>
+          <p:nvPr/>
+        </p:nvSpPr>
+        <p:spPr>
+          <a:xfrm>
+            <a:off x="548640" y="5440680"/>
+            <a:ext cx="11064240" cy="868680"/>
+          </a:xfrm>
+          <a:prstGeom prst="roundRect">
+            <a:avLst>
+              <a:gd name="adj" fmla="val 10000"/>
+            </a:avLst>
+          </a:prstGeom>
+          <a:solidFill>
+            <a:srgbClr val="DBE5F1"/>
+          </a:solidFill>
+          <a:ln>
+            <a:noFill/>
+          </a:ln>
+          <a:effectLst/>
+        </p:spPr>
+        <p:style>
+          <a:lnRef idx="1">
+            <a:schemeClr val="accent1"/>
+          </a:lnRef>
+          <a:fillRef idx="3">
+            <a:schemeClr val="accent1"/>
+          </a:fillRef>
+          <a:effectRef idx="2">
+            <a:schemeClr val="accent1"/>
+          </a:effectRef>
+          <a:fontRef idx="minor">
+            <a:schemeClr val="lt1"/>
+          </a:fontRef>
+        </p:style>
+        <p:txBody>
+          <a:bodyPr rtlCol="0" anchor="ctr"/>
+          <a:lstStyle/>
+          <a:p>
+            <a:pPr algn="ctr"/>
+          </a:p>
+        </p:txBody>
+      </p:sp>
+      <p:sp>
+        <p:nvSpPr>
+          <p:cNvPr id="8" name="TextBox 7"/>
           <p:cNvSpPr txBox="1"/>
           <p:nvPr/>
         </p:nvSpPr>
         <p:spPr>
           <a:xfrm>
-            <a:off x="7863840" y="2103120"/>
-            <a:ext cx="4023360" cy="457200"/>
+            <a:off x="868680" y="5577840"/>
+            <a:ext cx="10515600" cy="365760"/>
           </a:xfrm>
           <a:prstGeom prst="rect">
             <a:avLst/>
@@ -5646,21 +7027,21 @@
                 </a:solidFill>
                 <a:latin typeface="Calibri"/>
               </a:rPr>
-              <a:t>The asymmetry:</a:t>
-            </a:r>
-          </a:p>
-        </p:txBody>
-      </p:sp>
-      <p:sp>
-        <p:nvSpPr>
-          <p:cNvPr id="6" name="TextBox 5"/>
+              <a:t>Every wealthy country got rich by burning coal, then oil, then gas.</a:t>
+            </a:r>
+          </a:p>
+        </p:txBody>
+      </p:sp>
+      <p:sp>
+        <p:nvSpPr>
+          <p:cNvPr id="9" name="TextBox 8"/>
           <p:cNvSpPr txBox="1"/>
           <p:nvPr/>
         </p:nvSpPr>
         <p:spPr>
           <a:xfrm>
-            <a:off x="7863840" y="2651760"/>
-            <a:ext cx="4023360" cy="3200400"/>
+            <a:off x="868680" y="5897880"/>
+            <a:ext cx="10515600" cy="365760"/>
           </a:xfrm>
           <a:prstGeom prst="rect">
             <a:avLst/>
@@ -5675,29 +7056,27 @@
           <a:p>
             <a:pPr algn="l"/>
             <a:r>
-              <a:rPr sz="1300" b="0">
+              <a:rPr sz="1200" b="0">
                 <a:solidFill>
                   <a:srgbClr val="4B5563"/>
                 </a:solidFill>
                 <a:latin typeface="Calibri"/>
               </a:rPr>
-              <a:t>Every wealthy country got rich by burning coal, then oil, then gas.
-The clean-energy supply chain itself — steel, cement, shipping — still runs on fossil fuels.
-Asking Africa to skip the ladder, today, means asking it to stay poor.</a:t>
-            </a:r>
-          </a:p>
-        </p:txBody>
-      </p:sp>
-      <p:sp>
-        <p:nvSpPr>
-          <p:cNvPr id="7" name="TextBox 6"/>
+              <a:t>Even the clean-energy supply chain itself — steel, cement, shipping — still runs on fossil fuels today.</a:t>
+            </a:r>
+          </a:p>
+        </p:txBody>
+      </p:sp>
+      <p:sp>
+        <p:nvSpPr>
+          <p:cNvPr id="10" name="TextBox 9"/>
           <p:cNvSpPr txBox="1"/>
           <p:nvPr/>
         </p:nvSpPr>
         <p:spPr>
           <a:xfrm>
-            <a:off x="548640" y="6035040"/>
-            <a:ext cx="10972800" cy="274320"/>
+            <a:off x="457200" y="6537960"/>
+            <a:ext cx="7315200" cy="274320"/>
           </a:xfrm>
           <a:prstGeom prst="rect">
             <a:avLst/>
@@ -5718,21 +7097,21 @@
                 </a:solidFill>
                 <a:latin typeface="Calibri"/>
               </a:rPr>
-              <a:t>Sources: UN World Population Prospects; Our World in Data / Energy for Growth Hub.</a:t>
-            </a:r>
-          </a:p>
-        </p:txBody>
-      </p:sp>
-      <p:sp>
-        <p:nvSpPr>
-          <p:cNvPr id="8" name="TextBox 7"/>
+              <a:t>Choolwe  •  The Case For Fossil Fuels</a:t>
+            </a:r>
+          </a:p>
+        </p:txBody>
+      </p:sp>
+      <p:sp>
+        <p:nvSpPr>
+          <p:cNvPr id="11" name="TextBox 10"/>
           <p:cNvSpPr txBox="1"/>
           <p:nvPr/>
         </p:nvSpPr>
         <p:spPr>
           <a:xfrm>
-            <a:off x="457200" y="6446520"/>
-            <a:ext cx="7315200" cy="274320"/>
+            <a:off x="10789920" y="6537960"/>
+            <a:ext cx="1097280" cy="274320"/>
           </a:xfrm>
           <a:prstGeom prst="rect">
             <a:avLst/>
@@ -5745,7 +7124,7 @@
           </a:bodyPr>
           <a:lstStyle/>
           <a:p>
-            <a:pPr algn="l"/>
+            <a:pPr algn="r"/>
             <a:r>
               <a:rPr sz="900" b="0">
                 <a:solidFill>
@@ -5753,42 +7132,7 @@
                 </a:solidFill>
                 <a:latin typeface="Calibri"/>
               </a:rPr>
-              <a:t>Choolwe  •  The Case For Fossil Fuels  •  Follow-up to “How Climate Change Affects the World We Live In”</a:t>
-            </a:r>
-          </a:p>
-        </p:txBody>
-      </p:sp>
-      <p:sp>
-        <p:nvSpPr>
-          <p:cNvPr id="9" name="TextBox 8"/>
-          <p:cNvSpPr txBox="1"/>
-          <p:nvPr/>
-        </p:nvSpPr>
-        <p:spPr>
-          <a:xfrm>
-            <a:off x="10972800" y="6446520"/>
-            <a:ext cx="914400" cy="274320"/>
-          </a:xfrm>
-          <a:prstGeom prst="rect">
-            <a:avLst/>
-          </a:prstGeom>
-          <a:noFill/>
-        </p:spPr>
-        <p:txBody>
-          <a:bodyPr wrap="square" lIns="0" rIns="0" tIns="0" bIns="0" anchor="t">
-            <a:spAutoFit/>
-          </a:bodyPr>
-          <a:lstStyle/>
-          <a:p>
-            <a:pPr algn="r"/>
-            <a:r>
-              <a:rPr sz="900" b="0">
-                <a:solidFill>
-                  <a:srgbClr val="9CA3AF"/>
-                </a:solidFill>
-                <a:latin typeface="Calibri"/>
-              </a:rPr>
-              <a:t>5 / 8</a:t>
+              <a:t>5 / 9</a:t>
             </a:r>
           </a:p>
         </p:txBody>
@@ -5820,13 +7164,13 @@
         <p:spPr>
           <a:xfrm>
             <a:off x="0" y="0"/>
-            <a:ext cx="12191695" cy="73152"/>
+            <a:ext cx="12191695" cy="146304"/>
           </a:xfrm>
           <a:prstGeom prst="rect">
             <a:avLst/>
           </a:prstGeom>
           <a:solidFill>
-            <a:srgbClr val="1F4E79"/>
+            <a:srgbClr val="D97706"/>
           </a:solidFill>
           <a:ln>
             <a:noFill/>
@@ -5857,14 +7201,58 @@
       </p:sp>
       <p:sp>
         <p:nvSpPr>
-          <p:cNvPr id="3" name="TextBox 2"/>
+          <p:cNvPr id="3" name="Oval 2"/>
+          <p:cNvSpPr/>
+          <p:nvPr/>
+        </p:nvSpPr>
+        <p:spPr>
+          <a:xfrm>
+            <a:off x="576072" y="539496"/>
+            <a:ext cx="128016" cy="128016"/>
+          </a:xfrm>
+          <a:prstGeom prst="ellipse">
+            <a:avLst/>
+          </a:prstGeom>
+          <a:solidFill>
+            <a:srgbClr val="D97706"/>
+          </a:solidFill>
+          <a:ln>
+            <a:noFill/>
+          </a:ln>
+          <a:effectLst/>
+        </p:spPr>
+        <p:style>
+          <a:lnRef idx="1">
+            <a:schemeClr val="accent1"/>
+          </a:lnRef>
+          <a:fillRef idx="3">
+            <a:schemeClr val="accent1"/>
+          </a:fillRef>
+          <a:effectRef idx="2">
+            <a:schemeClr val="accent1"/>
+          </a:effectRef>
+          <a:fontRef idx="minor">
+            <a:schemeClr val="lt1"/>
+          </a:fontRef>
+        </p:style>
+        <p:txBody>
+          <a:bodyPr rtlCol="0" anchor="ctr"/>
+          <a:lstStyle/>
+          <a:p>
+            <a:pPr algn="ctr"/>
+          </a:p>
+        </p:txBody>
+      </p:sp>
+      <p:sp>
+        <p:nvSpPr>
+          <p:cNvPr id="4" name="TextBox 3"/>
           <p:cNvSpPr txBox="1"/>
           <p:nvPr/>
         </p:nvSpPr>
         <p:spPr>
           <a:xfrm>
-            <a:off x="548640" y="365760"/>
-            <a:ext cx="11064240" cy="1188720"/>
+            <a:off x="822960" y="457200"/>
+            <a:ext cx="4572000" cy="365760"/>
           </a:xfrm>
           <a:prstGeom prst="rect">
             <a:avLst/>
@@ -5879,20 +7267,56 @@
           <a:p>
             <a:pPr algn="l"/>
             <a:r>
-              <a:rPr sz="2100" b="1">
-                <a:solidFill>
-                  <a:srgbClr val="1F2937"/>
+              <a:rPr sz="1100" b="1">
+                <a:solidFill>
+                  <a:srgbClr val="D97706"/>
                 </a:solidFill>
                 <a:latin typeface="Calibri"/>
               </a:rPr>
-              <a:t>Zambia bet 85% of its grid on “clean” hydropower — and a climate-driven drought left us in the dark for 21 hours a day.</a:t>
+              <a:t>COMPLICATION  •  THE ZAMBIA LESSON</a:t>
+            </a:r>
+          </a:p>
+        </p:txBody>
+      </p:sp>
+      <p:sp>
+        <p:nvSpPr>
+          <p:cNvPr id="5" name="TextBox 4"/>
+          <p:cNvSpPr txBox="1"/>
+          <p:nvPr/>
+        </p:nvSpPr>
+        <p:spPr>
+          <a:xfrm>
+            <a:off x="548640" y="1005840"/>
+            <a:ext cx="11064240" cy="1280160"/>
+          </a:xfrm>
+          <a:prstGeom prst="rect">
+            <a:avLst/>
+          </a:prstGeom>
+          <a:noFill/>
+        </p:spPr>
+        <p:txBody>
+          <a:bodyPr wrap="square" lIns="0" rIns="0" tIns="0" bIns="0" anchor="t">
+            <a:spAutoFit/>
+          </a:bodyPr>
+          <a:lstStyle/>
+          <a:p>
+            <a:pPr algn="l"/>
+            <a:r>
+              <a:rPr sz="2200" b="1">
+                <a:solidFill>
+                  <a:srgbClr val="1F2937"/>
+                </a:solidFill>
+                <a:latin typeface="Calibri"/>
+              </a:rPr>
+              <a:t>Zambia bet 85% of its grid on "clean" hydropower —
+and a climate-driven drought left us in the dark for 21 hours a day.</a:t>
             </a:r>
           </a:p>
         </p:txBody>
       </p:sp>
       <p:pic>
         <p:nvPicPr>
-          <p:cNvPr id="4" name="Picture 3" descr="zambia_mix.png"/>
+          <p:cNvPr id="6" name="Picture 5" descr="zambia_mix.png"/>
           <p:cNvPicPr>
             <a:picLocks noChangeAspect="1"/>
           </p:cNvPicPr>
@@ -5906,8 +7330,8 @@
         </p:blipFill>
         <p:spPr>
           <a:xfrm>
-            <a:off x="548640" y="1737360"/>
-            <a:ext cx="8229600" cy="5008600"/>
+            <a:off x="365760" y="2377440"/>
+            <a:ext cx="6858000" cy="5531087"/>
           </a:xfrm>
           <a:prstGeom prst="rect">
             <a:avLst/>
@@ -5916,14 +7340,60 @@
       </p:pic>
       <p:sp>
         <p:nvSpPr>
-          <p:cNvPr id="5" name="TextBox 4"/>
+          <p:cNvPr id="7" name="Rounded Rectangle 6"/>
+          <p:cNvSpPr/>
+          <p:nvPr/>
+        </p:nvSpPr>
+        <p:spPr>
+          <a:xfrm>
+            <a:off x="7680960" y="2468880"/>
+            <a:ext cx="4114800" cy="1554480"/>
+          </a:xfrm>
+          <a:prstGeom prst="roundRect">
+            <a:avLst>
+              <a:gd name="adj" fmla="val 10000"/>
+            </a:avLst>
+          </a:prstGeom>
+          <a:solidFill>
+            <a:srgbClr val="FDE8CC"/>
+          </a:solidFill>
+          <a:ln>
+            <a:noFill/>
+          </a:ln>
+          <a:effectLst/>
+        </p:spPr>
+        <p:style>
+          <a:lnRef idx="1">
+            <a:schemeClr val="accent1"/>
+          </a:lnRef>
+          <a:fillRef idx="3">
+            <a:schemeClr val="accent1"/>
+          </a:fillRef>
+          <a:effectRef idx="2">
+            <a:schemeClr val="accent1"/>
+          </a:effectRef>
+          <a:fontRef idx="minor">
+            <a:schemeClr val="lt1"/>
+          </a:fontRef>
+        </p:style>
+        <p:txBody>
+          <a:bodyPr rtlCol="0" anchor="ctr"/>
+          <a:lstStyle/>
+          <a:p>
+            <a:pPr algn="ctr"/>
+          </a:p>
+        </p:txBody>
+      </p:sp>
+      <p:sp>
+        <p:nvSpPr>
+          <p:cNvPr id="8" name="TextBox 7"/>
           <p:cNvSpPr txBox="1"/>
           <p:nvPr/>
         </p:nvSpPr>
         <p:spPr>
           <a:xfrm>
-            <a:off x="9144000" y="2103120"/>
-            <a:ext cx="2743200" cy="457200"/>
+            <a:off x="7955280" y="2606040"/>
+            <a:ext cx="3566160" cy="365760"/>
           </a:xfrm>
           <a:prstGeom prst="rect">
             <a:avLst/>
@@ -5938,27 +7408,27 @@
           <a:p>
             <a:pPr algn="l"/>
             <a:r>
-              <a:rPr sz="1400" b="1">
-                <a:solidFill>
-                  <a:srgbClr val="1F4E79"/>
+              <a:rPr sz="1100" b="1">
+                <a:solidFill>
+                  <a:srgbClr val="D97706"/>
                 </a:solidFill>
                 <a:latin typeface="Calibri"/>
               </a:rPr>
-              <a:t>The lesson:</a:t>
-            </a:r>
-          </a:p>
-        </p:txBody>
-      </p:sp>
-      <p:sp>
-        <p:nvSpPr>
-          <p:cNvPr id="6" name="TextBox 5"/>
+              <a:t>THE BET</a:t>
+            </a:r>
+          </a:p>
+        </p:txBody>
+      </p:sp>
+      <p:sp>
+        <p:nvSpPr>
+          <p:cNvPr id="9" name="TextBox 8"/>
           <p:cNvSpPr txBox="1"/>
           <p:nvPr/>
         </p:nvSpPr>
         <p:spPr>
           <a:xfrm>
-            <a:off x="9144000" y="2651760"/>
-            <a:ext cx="2743200" cy="2743200"/>
+            <a:off x="7955280" y="2926080"/>
+            <a:ext cx="3566160" cy="1097280"/>
           </a:xfrm>
           <a:prstGeom prst="rect">
             <a:avLst/>
@@ -5973,28 +7443,74 @@
           <a:p>
             <a:pPr algn="l"/>
             <a:r>
-              <a:rPr sz="1300" b="0">
-                <a:solidFill>
-                  <a:srgbClr val="4B5563"/>
+              <a:rPr sz="1800" b="1">
+                <a:solidFill>
+                  <a:srgbClr val="1F2937"/>
                 </a:solidFill>
                 <a:latin typeface="Calibri"/>
               </a:rPr>
-              <a:t>Not “burn more coal.”
-Firm, dispatchable power matters — and pretending otherwise is paid for in dark hospitals and broken cold-chains.</a:t>
-            </a:r>
-          </a:p>
-        </p:txBody>
-      </p:sp>
-      <p:sp>
-        <p:nvSpPr>
-          <p:cNvPr id="7" name="TextBox 6"/>
+              <a:t>85% of installed capacity
+is hydropower.</a:t>
+            </a:r>
+          </a:p>
+        </p:txBody>
+      </p:sp>
+      <p:sp>
+        <p:nvSpPr>
+          <p:cNvPr id="10" name="Rounded Rectangle 9"/>
+          <p:cNvSpPr/>
+          <p:nvPr/>
+        </p:nvSpPr>
+        <p:spPr>
+          <a:xfrm>
+            <a:off x="7680960" y="4160520"/>
+            <a:ext cx="4114800" cy="1554480"/>
+          </a:xfrm>
+          <a:prstGeom prst="roundRect">
+            <a:avLst>
+              <a:gd name="adj" fmla="val 10000"/>
+            </a:avLst>
+          </a:prstGeom>
+          <a:solidFill>
+            <a:srgbClr val="DBE5F1"/>
+          </a:solidFill>
+          <a:ln>
+            <a:noFill/>
+          </a:ln>
+          <a:effectLst/>
+        </p:spPr>
+        <p:style>
+          <a:lnRef idx="1">
+            <a:schemeClr val="accent1"/>
+          </a:lnRef>
+          <a:fillRef idx="3">
+            <a:schemeClr val="accent1"/>
+          </a:fillRef>
+          <a:effectRef idx="2">
+            <a:schemeClr val="accent1"/>
+          </a:effectRef>
+          <a:fontRef idx="minor">
+            <a:schemeClr val="lt1"/>
+          </a:fontRef>
+        </p:style>
+        <p:txBody>
+          <a:bodyPr rtlCol="0" anchor="ctr"/>
+          <a:lstStyle/>
+          <a:p>
+            <a:pPr algn="ctr"/>
+          </a:p>
+        </p:txBody>
+      </p:sp>
+      <p:sp>
+        <p:nvSpPr>
+          <p:cNvPr id="11" name="TextBox 10"/>
           <p:cNvSpPr txBox="1"/>
           <p:nvPr/>
         </p:nvSpPr>
         <p:spPr>
           <a:xfrm>
-            <a:off x="457200" y="6446520"/>
-            <a:ext cx="7315200" cy="274320"/>
+            <a:off x="7955280" y="4297680"/>
+            <a:ext cx="3566160" cy="365760"/>
           </a:xfrm>
           <a:prstGeom prst="rect">
             <a:avLst/>
@@ -6009,27 +7525,27 @@
           <a:p>
             <a:pPr algn="l"/>
             <a:r>
-              <a:rPr sz="900" b="0">
-                <a:solidFill>
-                  <a:srgbClr val="9CA3AF"/>
+              <a:rPr sz="1100" b="1">
+                <a:solidFill>
+                  <a:srgbClr val="1F4E79"/>
                 </a:solidFill>
                 <a:latin typeface="Calibri"/>
               </a:rPr>
-              <a:t>Choolwe  •  The Case For Fossil Fuels  •  Follow-up to “How Climate Change Affects the World We Live In”</a:t>
-            </a:r>
-          </a:p>
-        </p:txBody>
-      </p:sp>
-      <p:sp>
-        <p:nvSpPr>
-          <p:cNvPr id="8" name="TextBox 7"/>
+              <a:t>THE LESSON</a:t>
+            </a:r>
+          </a:p>
+        </p:txBody>
+      </p:sp>
+      <p:sp>
+        <p:nvSpPr>
+          <p:cNvPr id="12" name="TextBox 11"/>
           <p:cNvSpPr txBox="1"/>
           <p:nvPr/>
         </p:nvSpPr>
         <p:spPr>
           <a:xfrm>
-            <a:off x="10972800" y="6446520"/>
-            <a:ext cx="914400" cy="274320"/>
+            <a:off x="7955280" y="4617720"/>
+            <a:ext cx="3566160" cy="1097280"/>
           </a:xfrm>
           <a:prstGeom prst="rect">
             <a:avLst/>
@@ -6042,15 +7558,121 @@
           </a:bodyPr>
           <a:lstStyle/>
           <a:p>
-            <a:pPr algn="r"/>
-            <a:r>
-              <a:rPr sz="900" b="0">
-                <a:solidFill>
-                  <a:srgbClr val="9CA3AF"/>
+            <a:pPr algn="l"/>
+            <a:r>
+              <a:rPr sz="1300" b="0">
+                <a:solidFill>
+                  <a:srgbClr val="1F2937"/>
                 </a:solidFill>
                 <a:latin typeface="Calibri"/>
               </a:rPr>
-              <a:t>6 / 8</a:t>
+              <a:t>Firm, dispatchable power matters.
+Pretending otherwise is paid for in dark hospitals.</a:t>
+            </a:r>
+          </a:p>
+        </p:txBody>
+      </p:sp>
+      <p:sp>
+        <p:nvSpPr>
+          <p:cNvPr id="13" name="TextBox 12"/>
+          <p:cNvSpPr txBox="1"/>
+          <p:nvPr/>
+        </p:nvSpPr>
+        <p:spPr>
+          <a:xfrm>
+            <a:off x="548640" y="6080760"/>
+            <a:ext cx="10972800" cy="365760"/>
+          </a:xfrm>
+          <a:prstGeom prst="rect">
+            <a:avLst/>
+          </a:prstGeom>
+          <a:noFill/>
+        </p:spPr>
+        <p:txBody>
+          <a:bodyPr wrap="square" lIns="0" rIns="0" tIns="0" bIns="0" anchor="t">
+            <a:spAutoFit/>
+          </a:bodyPr>
+          <a:lstStyle/>
+          <a:p>
+            <a:pPr algn="l"/>
+            <a:r>
+              <a:rPr sz="1300" b="0">
+                <a:solidFill>
+                  <a:srgbClr val="4B5563"/>
+                </a:solidFill>
+                <a:latin typeface="Calibri"/>
+              </a:rPr>
+              <a:t>The answer isn't "burn more coal." It's "don't bet the grid on one weather pattern."</a:t>
+            </a:r>
+          </a:p>
+        </p:txBody>
+      </p:sp>
+      <p:sp>
+        <p:nvSpPr>
+          <p:cNvPr id="14" name="TextBox 13"/>
+          <p:cNvSpPr txBox="1"/>
+          <p:nvPr/>
+        </p:nvSpPr>
+        <p:spPr>
+          <a:xfrm>
+            <a:off x="457200" y="6537960"/>
+            <a:ext cx="7315200" cy="274320"/>
+          </a:xfrm>
+          <a:prstGeom prst="rect">
+            <a:avLst/>
+          </a:prstGeom>
+          <a:noFill/>
+        </p:spPr>
+        <p:txBody>
+          <a:bodyPr wrap="square" lIns="0" rIns="0" tIns="0" bIns="0" anchor="t">
+            <a:spAutoFit/>
+          </a:bodyPr>
+          <a:lstStyle/>
+          <a:p>
+            <a:pPr algn="l"/>
+            <a:r>
+              <a:rPr sz="900" b="0">
+                <a:solidFill>
+                  <a:srgbClr val="9CA3AF"/>
+                </a:solidFill>
+                <a:latin typeface="Calibri"/>
+              </a:rPr>
+              <a:t>Choolwe  •  The Case For Fossil Fuels</a:t>
+            </a:r>
+          </a:p>
+        </p:txBody>
+      </p:sp>
+      <p:sp>
+        <p:nvSpPr>
+          <p:cNvPr id="15" name="TextBox 14"/>
+          <p:cNvSpPr txBox="1"/>
+          <p:nvPr/>
+        </p:nvSpPr>
+        <p:spPr>
+          <a:xfrm>
+            <a:off x="10789920" y="6537960"/>
+            <a:ext cx="1097280" cy="274320"/>
+          </a:xfrm>
+          <a:prstGeom prst="rect">
+            <a:avLst/>
+          </a:prstGeom>
+          <a:noFill/>
+        </p:spPr>
+        <p:txBody>
+          <a:bodyPr wrap="square" lIns="0" rIns="0" tIns="0" bIns="0" anchor="t">
+            <a:spAutoFit/>
+          </a:bodyPr>
+          <a:lstStyle/>
+          <a:p>
+            <a:pPr algn="r"/>
+            <a:r>
+              <a:rPr sz="900" b="0">
+                <a:solidFill>
+                  <a:srgbClr val="9CA3AF"/>
+                </a:solidFill>
+                <a:latin typeface="Calibri"/>
+              </a:rPr>
+              <a:t>6 / 9</a:t>
             </a:r>
           </a:p>
         </p:txBody>
@@ -6082,13 +7704,13 @@
         <p:spPr>
           <a:xfrm>
             <a:off x="0" y="0"/>
-            <a:ext cx="12191695" cy="73152"/>
+            <a:ext cx="12191695" cy="146304"/>
           </a:xfrm>
           <a:prstGeom prst="rect">
             <a:avLst/>
           </a:prstGeom>
           <a:solidFill>
-            <a:srgbClr val="1F4E79"/>
+            <a:srgbClr val="D97706"/>
           </a:solidFill>
           <a:ln>
             <a:noFill/>
@@ -6119,55 +7741,20 @@
       </p:sp>
       <p:sp>
         <p:nvSpPr>
-          <p:cNvPr id="3" name="TextBox 2"/>
-          <p:cNvSpPr txBox="1"/>
-          <p:nvPr/>
-        </p:nvSpPr>
-        <p:spPr>
-          <a:xfrm>
-            <a:off x="548640" y="365760"/>
-            <a:ext cx="11064240" cy="1188720"/>
-          </a:xfrm>
-          <a:prstGeom prst="rect">
-            <a:avLst/>
-          </a:prstGeom>
-          <a:noFill/>
-        </p:spPr>
-        <p:txBody>
-          <a:bodyPr wrap="square" lIns="0" rIns="0" tIns="0" bIns="0" anchor="t">
-            <a:spAutoFit/>
-          </a:bodyPr>
-          <a:lstStyle/>
-          <a:p>
-            <a:pPr algn="l"/>
-            <a:r>
-              <a:rPr sz="2000" b="1">
-                <a:solidFill>
-                  <a:srgbClr val="1F2937"/>
-                </a:solidFill>
-                <a:latin typeface="Calibri"/>
-              </a:rPr>
-              <a:t>The honest middle path: gas as a bridge, renewables stacked on top, firm power kept until storage can carry the load.</a:t>
-            </a:r>
-          </a:p>
-        </p:txBody>
-      </p:sp>
-      <p:sp>
-        <p:nvSpPr>
-          <p:cNvPr id="4" name="Rectangle 3"/>
+          <p:cNvPr id="3" name="Oval 2"/>
           <p:cNvSpPr/>
           <p:nvPr/>
         </p:nvSpPr>
         <p:spPr>
           <a:xfrm>
-            <a:off x="548640" y="2194560"/>
-            <a:ext cx="3474720" cy="3017520"/>
-          </a:xfrm>
-          <a:prstGeom prst="rect">
+            <a:off x="576072" y="539496"/>
+            <a:ext cx="128016" cy="128016"/>
+          </a:xfrm>
+          <a:prstGeom prst="ellipse">
             <a:avLst/>
           </a:prstGeom>
           <a:solidFill>
-            <a:srgbClr val="1F4E79"/>
+            <a:srgbClr val="D97706"/>
           </a:solidFill>
           <a:ln>
             <a:noFill/>
@@ -6198,14 +7785,14 @@
       </p:sp>
       <p:sp>
         <p:nvSpPr>
-          <p:cNvPr id="5" name="TextBox 4"/>
+          <p:cNvPr id="4" name="TextBox 3"/>
           <p:cNvSpPr txBox="1"/>
           <p:nvPr/>
         </p:nvSpPr>
         <p:spPr>
           <a:xfrm>
-            <a:off x="822960" y="2423160"/>
-            <a:ext cx="2926080" cy="365760"/>
+            <a:off x="822960" y="457200"/>
+            <a:ext cx="4572000" cy="365760"/>
           </a:xfrm>
           <a:prstGeom prst="rect">
             <a:avLst/>
@@ -6222,25 +7809,25 @@
             <a:r>
               <a:rPr sz="1100" b="1">
                 <a:solidFill>
-                  <a:srgbClr val="FFFFFF"/>
+                  <a:srgbClr val="D97706"/>
                 </a:solidFill>
                 <a:latin typeface="Calibri"/>
               </a:rPr>
-              <a:t>NOW — BRIDGE</a:t>
-            </a:r>
-          </a:p>
-        </p:txBody>
-      </p:sp>
-      <p:sp>
-        <p:nvSpPr>
-          <p:cNvPr id="6" name="TextBox 5"/>
+              <a:t>BRIDGE  •  WHAT ENERGY ACCESS BUYS</a:t>
+            </a:r>
+          </a:p>
+        </p:txBody>
+      </p:sp>
+      <p:sp>
+        <p:nvSpPr>
+          <p:cNvPr id="5" name="TextBox 4"/>
           <p:cNvSpPr txBox="1"/>
           <p:nvPr/>
         </p:nvSpPr>
         <p:spPr>
           <a:xfrm>
-            <a:off x="822960" y="2834640"/>
-            <a:ext cx="2926080" cy="640080"/>
+            <a:off x="548640" y="1005840"/>
+            <a:ext cx="11064240" cy="1280160"/>
           </a:xfrm>
           <a:prstGeom prst="rect">
             <a:avLst/>
@@ -6255,17 +7842,42 @@
           <a:p>
             <a:pPr algn="l"/>
             <a:r>
-              <a:rPr sz="1800" b="1">
-                <a:solidFill>
-                  <a:srgbClr val="FFFFFF"/>
+              <a:rPr sz="2200" b="1">
+                <a:solidFill>
+                  <a:srgbClr val="1F2937"/>
                 </a:solidFill>
                 <a:latin typeface="Calibri"/>
               </a:rPr>
-              <a:t>Natural gas</a:t>
-            </a:r>
-          </a:p>
-        </p:txBody>
-      </p:sp>
+              <a:t>Below ~3,000 kWh per person per year, every extra kWh
+buys life-years. Zambia sits right on the steep part of the curve.</a:t>
+            </a:r>
+          </a:p>
+        </p:txBody>
+      </p:sp>
+      <p:pic>
+        <p:nvPicPr>
+          <p:cNvPr id="6" name="Picture 5" descr="energy_life.png"/>
+          <p:cNvPicPr>
+            <a:picLocks noChangeAspect="1"/>
+          </p:cNvPicPr>
+          <p:nvPr/>
+        </p:nvPicPr>
+        <p:blipFill>
+          <a:blip r:embed="rId2"/>
+          <a:stretch>
+            <a:fillRect/>
+          </a:stretch>
+        </p:blipFill>
+        <p:spPr>
+          <a:xfrm>
+            <a:off x="548640" y="2560320"/>
+            <a:ext cx="11064240" cy="5988850"/>
+          </a:xfrm>
+          <a:prstGeom prst="rect">
+            <a:avLst/>
+          </a:prstGeom>
+        </p:spPr>
+      </p:pic>
       <p:sp>
         <p:nvSpPr>
           <p:cNvPr id="7" name="TextBox 6"/>
@@ -6274,8 +7886,8 @@
         </p:nvSpPr>
         <p:spPr>
           <a:xfrm>
-            <a:off x="822960" y="3566160"/>
-            <a:ext cx="2926080" cy="1463040"/>
+            <a:off x="457200" y="6537960"/>
+            <a:ext cx="7315200" cy="274320"/>
           </a:xfrm>
           <a:prstGeom prst="rect">
             <a:avLst/>
@@ -6290,76 +7902,27 @@
           <a:p>
             <a:pPr algn="l"/>
             <a:r>
-              <a:rPr sz="1200" b="0">
-                <a:solidFill>
-                  <a:srgbClr val="FFFFFF"/>
+              <a:rPr sz="900" b="0">
+                <a:solidFill>
+                  <a:srgbClr val="9CA3AF"/>
                 </a:solidFill>
                 <a:latin typeface="Calibri"/>
               </a:rPr>
-              <a:t>50–60% less CO₂ than coal.
-Africa holds ~13% of
-proven gas reserves.
-Faster to deploy than
-nuclear, firm in a way solar
-alone is not.</a:t>
-            </a:r>
-          </a:p>
-        </p:txBody>
-      </p:sp>
-      <p:sp>
-        <p:nvSpPr>
-          <p:cNvPr id="8" name="Rectangle 7"/>
-          <p:cNvSpPr/>
-          <p:nvPr/>
-        </p:nvSpPr>
-        <p:spPr>
-          <a:xfrm>
-            <a:off x="4343400" y="2194560"/>
-            <a:ext cx="3474720" cy="3017520"/>
-          </a:xfrm>
-          <a:prstGeom prst="rect">
-            <a:avLst/>
-          </a:prstGeom>
-          <a:solidFill>
-            <a:srgbClr val="E5E7EB"/>
-          </a:solidFill>
-          <a:ln>
-            <a:noFill/>
-          </a:ln>
-          <a:effectLst/>
-        </p:spPr>
-        <p:style>
-          <a:lnRef idx="1">
-            <a:schemeClr val="accent1"/>
-          </a:lnRef>
-          <a:fillRef idx="3">
-            <a:schemeClr val="accent1"/>
-          </a:fillRef>
-          <a:effectRef idx="2">
-            <a:schemeClr val="accent1"/>
-          </a:effectRef>
-          <a:fontRef idx="minor">
-            <a:schemeClr val="lt1"/>
-          </a:fontRef>
-        </p:style>
-        <p:txBody>
-          <a:bodyPr rtlCol="0" anchor="ctr"/>
-          <a:lstStyle/>
-          <a:p>
-            <a:pPr algn="ctr"/>
-          </a:p>
-        </p:txBody>
-      </p:sp>
-      <p:sp>
-        <p:nvSpPr>
-          <p:cNvPr id="9" name="TextBox 8"/>
+              <a:t>Choolwe  •  The Case For Fossil Fuels</a:t>
+            </a:r>
+          </a:p>
+        </p:txBody>
+      </p:sp>
+      <p:sp>
+        <p:nvSpPr>
+          <p:cNvPr id="8" name="TextBox 7"/>
           <p:cNvSpPr txBox="1"/>
           <p:nvPr/>
         </p:nvSpPr>
         <p:spPr>
           <a:xfrm>
-            <a:off x="4617720" y="2423160"/>
-            <a:ext cx="2926080" cy="365760"/>
+            <a:off x="10789920" y="6537960"/>
+            <a:ext cx="1097280" cy="274320"/>
           </a:xfrm>
           <a:prstGeom prst="rect">
             <a:avLst/>
@@ -6372,435 +7935,15 @@
           </a:bodyPr>
           <a:lstStyle/>
           <a:p>
-            <a:pPr algn="l"/>
-            <a:r>
-              <a:rPr sz="1100" b="1">
-                <a:solidFill>
-                  <a:srgbClr val="1F4E79"/>
+            <a:pPr algn="r"/>
+            <a:r>
+              <a:rPr sz="900" b="0">
+                <a:solidFill>
+                  <a:srgbClr val="9CA3AF"/>
                 </a:solidFill>
                 <a:latin typeface="Calibri"/>
               </a:rPr>
-              <a:t>BUILD-OUT</a:t>
-            </a:r>
-          </a:p>
-        </p:txBody>
-      </p:sp>
-      <p:sp>
-        <p:nvSpPr>
-          <p:cNvPr id="10" name="TextBox 9"/>
-          <p:cNvSpPr txBox="1"/>
-          <p:nvPr/>
-        </p:nvSpPr>
-        <p:spPr>
-          <a:xfrm>
-            <a:off x="4617720" y="2834640"/>
-            <a:ext cx="2926080" cy="640080"/>
-          </a:xfrm>
-          <a:prstGeom prst="rect">
-            <a:avLst/>
-          </a:prstGeom>
-          <a:noFill/>
-        </p:spPr>
-        <p:txBody>
-          <a:bodyPr wrap="square" lIns="0" rIns="0" tIns="0" bIns="0" anchor="t">
-            <a:spAutoFit/>
-          </a:bodyPr>
-          <a:lstStyle/>
-          <a:p>
-            <a:pPr algn="l"/>
-            <a:r>
-              <a:rPr sz="1800" b="1">
-                <a:solidFill>
-                  <a:srgbClr val="1F2937"/>
-                </a:solidFill>
-                <a:latin typeface="Calibri"/>
-              </a:rPr>
-              <a:t>Renewables, aggressively</a:t>
-            </a:r>
-          </a:p>
-        </p:txBody>
-      </p:sp>
-      <p:sp>
-        <p:nvSpPr>
-          <p:cNvPr id="11" name="TextBox 10"/>
-          <p:cNvSpPr txBox="1"/>
-          <p:nvPr/>
-        </p:nvSpPr>
-        <p:spPr>
-          <a:xfrm>
-            <a:off x="4617720" y="3566160"/>
-            <a:ext cx="2926080" cy="1463040"/>
-          </a:xfrm>
-          <a:prstGeom prst="rect">
-            <a:avLst/>
-          </a:prstGeom>
-          <a:noFill/>
-        </p:spPr>
-        <p:txBody>
-          <a:bodyPr wrap="square" lIns="0" rIns="0" tIns="0" bIns="0" anchor="t">
-            <a:spAutoFit/>
-          </a:bodyPr>
-          <a:lstStyle/>
-          <a:p>
-            <a:pPr algn="l"/>
-            <a:r>
-              <a:rPr sz="1200" b="0">
-                <a:solidFill>
-                  <a:srgbClr val="4B5563"/>
-                </a:solidFill>
-                <a:latin typeface="Calibri"/>
-              </a:rPr>
-              <a:t>Solar in Zambia is already
-the cheapest new capacity.
-Wind, hydro diversification,
-storage — scaled in parallel,
-not waited for.</a:t>
-            </a:r>
-          </a:p>
-        </p:txBody>
-      </p:sp>
-      <p:sp>
-        <p:nvSpPr>
-          <p:cNvPr id="12" name="Rectangle 11"/>
-          <p:cNvSpPr/>
-          <p:nvPr/>
-        </p:nvSpPr>
-        <p:spPr>
-          <a:xfrm>
-            <a:off x="8138160" y="2194560"/>
-            <a:ext cx="3474720" cy="3017520"/>
-          </a:xfrm>
-          <a:prstGeom prst="rect">
-            <a:avLst/>
-          </a:prstGeom>
-          <a:solidFill>
-            <a:srgbClr val="E5E7EB"/>
-          </a:solidFill>
-          <a:ln>
-            <a:noFill/>
-          </a:ln>
-          <a:effectLst/>
-        </p:spPr>
-        <p:style>
-          <a:lnRef idx="1">
-            <a:schemeClr val="accent1"/>
-          </a:lnRef>
-          <a:fillRef idx="3">
-            <a:schemeClr val="accent1"/>
-          </a:fillRef>
-          <a:effectRef idx="2">
-            <a:schemeClr val="accent1"/>
-          </a:effectRef>
-          <a:fontRef idx="minor">
-            <a:schemeClr val="lt1"/>
-          </a:fontRef>
-        </p:style>
-        <p:txBody>
-          <a:bodyPr rtlCol="0" anchor="ctr"/>
-          <a:lstStyle/>
-          <a:p>
-            <a:pPr algn="ctr"/>
-          </a:p>
-        </p:txBody>
-      </p:sp>
-      <p:sp>
-        <p:nvSpPr>
-          <p:cNvPr id="13" name="TextBox 12"/>
-          <p:cNvSpPr txBox="1"/>
-          <p:nvPr/>
-        </p:nvSpPr>
-        <p:spPr>
-          <a:xfrm>
-            <a:off x="8412480" y="2423160"/>
-            <a:ext cx="2926080" cy="365760"/>
-          </a:xfrm>
-          <a:prstGeom prst="rect">
-            <a:avLst/>
-          </a:prstGeom>
-          <a:noFill/>
-        </p:spPr>
-        <p:txBody>
-          <a:bodyPr wrap="square" lIns="0" rIns="0" tIns="0" bIns="0" anchor="t">
-            <a:spAutoFit/>
-          </a:bodyPr>
-          <a:lstStyle/>
-          <a:p>
-            <a:pPr algn="l"/>
-            <a:r>
-              <a:rPr sz="1100" b="1">
-                <a:solidFill>
-                  <a:srgbClr val="1F4E79"/>
-                </a:solidFill>
-                <a:latin typeface="Calibri"/>
-              </a:rPr>
-              <a:t>THEN — RETIRE</a:t>
-            </a:r>
-          </a:p>
-        </p:txBody>
-      </p:sp>
-      <p:sp>
-        <p:nvSpPr>
-          <p:cNvPr id="14" name="TextBox 13"/>
-          <p:cNvSpPr txBox="1"/>
-          <p:nvPr/>
-        </p:nvSpPr>
-        <p:spPr>
-          <a:xfrm>
-            <a:off x="8412480" y="2834640"/>
-            <a:ext cx="2926080" cy="640080"/>
-          </a:xfrm>
-          <a:prstGeom prst="rect">
-            <a:avLst/>
-          </a:prstGeom>
-          <a:noFill/>
-        </p:spPr>
-        <p:txBody>
-          <a:bodyPr wrap="square" lIns="0" rIns="0" tIns="0" bIns="0" anchor="t">
-            <a:spAutoFit/>
-          </a:bodyPr>
-          <a:lstStyle/>
-          <a:p>
-            <a:pPr algn="l"/>
-            <a:r>
-              <a:rPr sz="1800" b="1">
-                <a:solidFill>
-                  <a:srgbClr val="1F2937"/>
-                </a:solidFill>
-                <a:latin typeface="Calibri"/>
-              </a:rPr>
-              <a:t>Phase fossil fuels down</a:t>
-            </a:r>
-          </a:p>
-        </p:txBody>
-      </p:sp>
-      <p:sp>
-        <p:nvSpPr>
-          <p:cNvPr id="15" name="TextBox 14"/>
-          <p:cNvSpPr txBox="1"/>
-          <p:nvPr/>
-        </p:nvSpPr>
-        <p:spPr>
-          <a:xfrm>
-            <a:off x="8412480" y="3566160"/>
-            <a:ext cx="2926080" cy="1463040"/>
-          </a:xfrm>
-          <a:prstGeom prst="rect">
-            <a:avLst/>
-          </a:prstGeom>
-          <a:noFill/>
-        </p:spPr>
-        <p:txBody>
-          <a:bodyPr wrap="square" lIns="0" rIns="0" tIns="0" bIns="0" anchor="t">
-            <a:spAutoFit/>
-          </a:bodyPr>
-          <a:lstStyle/>
-          <a:p>
-            <a:pPr algn="l"/>
-            <a:r>
-              <a:rPr sz="1200" b="0">
-                <a:solidFill>
-                  <a:srgbClr val="4B5563"/>
-                </a:solidFill>
-                <a:latin typeface="Calibri"/>
-              </a:rPr>
-              <a:t>When grids are firm and
-storage can carry the load,
-retire gas plants.
-Not before. Not as a slogan.
-As an engineering schedule.</a:t>
-            </a:r>
-          </a:p>
-        </p:txBody>
-      </p:sp>
-      <p:sp>
-        <p:nvSpPr>
-          <p:cNvPr id="16" name="Right Arrow 15"/>
-          <p:cNvSpPr/>
-          <p:nvPr/>
-        </p:nvSpPr>
-        <p:spPr>
-          <a:xfrm>
-            <a:off x="4023360" y="3474720"/>
-            <a:ext cx="320040" cy="411480"/>
-          </a:xfrm>
-          <a:prstGeom prst="rightArrow">
-            <a:avLst/>
-          </a:prstGeom>
-          <a:solidFill>
-            <a:srgbClr val="9CA3AF"/>
-          </a:solidFill>
-          <a:ln>
-            <a:noFill/>
-          </a:ln>
-          <a:effectLst/>
-        </p:spPr>
-        <p:style>
-          <a:lnRef idx="1">
-            <a:schemeClr val="accent1"/>
-          </a:lnRef>
-          <a:fillRef idx="3">
-            <a:schemeClr val="accent1"/>
-          </a:fillRef>
-          <a:effectRef idx="2">
-            <a:schemeClr val="accent1"/>
-          </a:effectRef>
-          <a:fontRef idx="minor">
-            <a:schemeClr val="lt1"/>
-          </a:fontRef>
-        </p:style>
-        <p:txBody>
-          <a:bodyPr rtlCol="0" anchor="ctr"/>
-          <a:lstStyle/>
-          <a:p>
-            <a:pPr algn="ctr"/>
-          </a:p>
-        </p:txBody>
-      </p:sp>
-      <p:sp>
-        <p:nvSpPr>
-          <p:cNvPr id="17" name="Right Arrow 16"/>
-          <p:cNvSpPr/>
-          <p:nvPr/>
-        </p:nvSpPr>
-        <p:spPr>
-          <a:xfrm>
-            <a:off x="7818120" y="3474720"/>
-            <a:ext cx="320040" cy="411480"/>
-          </a:xfrm>
-          <a:prstGeom prst="rightArrow">
-            <a:avLst/>
-          </a:prstGeom>
-          <a:solidFill>
-            <a:srgbClr val="9CA3AF"/>
-          </a:solidFill>
-          <a:ln>
-            <a:noFill/>
-          </a:ln>
-          <a:effectLst/>
-        </p:spPr>
-        <p:style>
-          <a:lnRef idx="1">
-            <a:schemeClr val="accent1"/>
-          </a:lnRef>
-          <a:fillRef idx="3">
-            <a:schemeClr val="accent1"/>
-          </a:fillRef>
-          <a:effectRef idx="2">
-            <a:schemeClr val="accent1"/>
-          </a:effectRef>
-          <a:fontRef idx="minor">
-            <a:schemeClr val="lt1"/>
-          </a:fontRef>
-        </p:style>
-        <p:txBody>
-          <a:bodyPr rtlCol="0" anchor="ctr"/>
-          <a:lstStyle/>
-          <a:p>
-            <a:pPr algn="ctr"/>
-          </a:p>
-        </p:txBody>
-      </p:sp>
-      <p:sp>
-        <p:nvSpPr>
-          <p:cNvPr id="18" name="TextBox 17"/>
-          <p:cNvSpPr txBox="1"/>
-          <p:nvPr/>
-        </p:nvSpPr>
-        <p:spPr>
-          <a:xfrm>
-            <a:off x="548640" y="5852160"/>
-            <a:ext cx="10972800" cy="274320"/>
-          </a:xfrm>
-          <a:prstGeom prst="rect">
-            <a:avLst/>
-          </a:prstGeom>
-          <a:noFill/>
-        </p:spPr>
-        <p:txBody>
-          <a:bodyPr wrap="square" lIns="0" rIns="0" tIns="0" bIns="0" anchor="t">
-            <a:spAutoFit/>
-          </a:bodyPr>
-          <a:lstStyle/>
-          <a:p>
-            <a:pPr algn="l"/>
-            <a:r>
-              <a:rPr sz="900" b="0">
-                <a:solidFill>
-                  <a:srgbClr val="9CA3AF"/>
-                </a:solidFill>
-                <a:latin typeface="Calibri"/>
-              </a:rPr>
-              <a:t>Sources: Atlantic Council, “Natural gas in Africa’s energy transition”; IEA, “Financing Electricity Access in Africa” (2025).</a:t>
-            </a:r>
-          </a:p>
-        </p:txBody>
-      </p:sp>
-      <p:sp>
-        <p:nvSpPr>
-          <p:cNvPr id="19" name="TextBox 18"/>
-          <p:cNvSpPr txBox="1"/>
-          <p:nvPr/>
-        </p:nvSpPr>
-        <p:spPr>
-          <a:xfrm>
-            <a:off x="457200" y="6446520"/>
-            <a:ext cx="7315200" cy="274320"/>
-          </a:xfrm>
-          <a:prstGeom prst="rect">
-            <a:avLst/>
-          </a:prstGeom>
-          <a:noFill/>
-        </p:spPr>
-        <p:txBody>
-          <a:bodyPr wrap="square" lIns="0" rIns="0" tIns="0" bIns="0" anchor="t">
-            <a:spAutoFit/>
-          </a:bodyPr>
-          <a:lstStyle/>
-          <a:p>
-            <a:pPr algn="l"/>
-            <a:r>
-              <a:rPr sz="900" b="0">
-                <a:solidFill>
-                  <a:srgbClr val="9CA3AF"/>
-                </a:solidFill>
-                <a:latin typeface="Calibri"/>
-              </a:rPr>
-              <a:t>Choolwe  •  The Case For Fossil Fuels  •  Follow-up to “How Climate Change Affects the World We Live In”</a:t>
-            </a:r>
-          </a:p>
-        </p:txBody>
-      </p:sp>
-      <p:sp>
-        <p:nvSpPr>
-          <p:cNvPr id="20" name="TextBox 19"/>
-          <p:cNvSpPr txBox="1"/>
-          <p:nvPr/>
-        </p:nvSpPr>
-        <p:spPr>
-          <a:xfrm>
-            <a:off x="10972800" y="6446520"/>
-            <a:ext cx="914400" cy="274320"/>
-          </a:xfrm>
-          <a:prstGeom prst="rect">
-            <a:avLst/>
-          </a:prstGeom>
-          <a:noFill/>
-        </p:spPr>
-        <p:txBody>
-          <a:bodyPr wrap="square" lIns="0" rIns="0" tIns="0" bIns="0" anchor="t">
-            <a:spAutoFit/>
-          </a:bodyPr>
-          <a:lstStyle/>
-          <a:p>
-            <a:pPr algn="r"/>
-            <a:r>
-              <a:rPr sz="900" b="0">
-                <a:solidFill>
-                  <a:srgbClr val="9CA3AF"/>
-                </a:solidFill>
-                <a:latin typeface="Calibri"/>
-              </a:rPr>
-              <a:t>7 / 8</a:t>
+              <a:t>7 / 9</a:t>
             </a:r>
           </a:p>
         </p:txBody>
@@ -6832,7 +7975,7 @@
         <p:spPr>
           <a:xfrm>
             <a:off x="0" y="0"/>
-            <a:ext cx="12191695" cy="73152"/>
+            <a:ext cx="12191695" cy="146304"/>
           </a:xfrm>
           <a:prstGeom prst="rect">
             <a:avLst/>
@@ -6869,202 +8012,16 @@
       </p:sp>
       <p:sp>
         <p:nvSpPr>
-          <p:cNvPr id="3" name="TextBox 2"/>
-          <p:cNvSpPr txBox="1"/>
-          <p:nvPr/>
-        </p:nvSpPr>
-        <p:spPr>
-          <a:xfrm>
-            <a:off x="548640" y="457200"/>
-            <a:ext cx="2743200" cy="365760"/>
-          </a:xfrm>
-          <a:prstGeom prst="rect">
-            <a:avLst/>
-          </a:prstGeom>
-          <a:noFill/>
-        </p:spPr>
-        <p:txBody>
-          <a:bodyPr wrap="square" lIns="0" rIns="0" tIns="0" bIns="0" anchor="t">
-            <a:spAutoFit/>
-          </a:bodyPr>
-          <a:lstStyle/>
-          <a:p>
-            <a:pPr algn="l"/>
-            <a:r>
-              <a:rPr sz="1100" b="1">
-                <a:solidFill>
-                  <a:srgbClr val="1F4E79"/>
-                </a:solidFill>
-                <a:latin typeface="Calibri"/>
-              </a:rPr>
-              <a:t>IN CLOSING</a:t>
-            </a:r>
-          </a:p>
-        </p:txBody>
-      </p:sp>
-      <p:sp>
-        <p:nvSpPr>
-          <p:cNvPr id="4" name="TextBox 3"/>
-          <p:cNvSpPr txBox="1"/>
-          <p:nvPr/>
-        </p:nvSpPr>
-        <p:spPr>
-          <a:xfrm>
-            <a:off x="548640" y="1280160"/>
-            <a:ext cx="11064240" cy="2286000"/>
-          </a:xfrm>
-          <a:prstGeom prst="rect">
-            <a:avLst/>
-          </a:prstGeom>
-          <a:noFill/>
-        </p:spPr>
-        <p:txBody>
-          <a:bodyPr wrap="square" lIns="0" rIns="0" tIns="0" bIns="0" anchor="t">
-            <a:spAutoFit/>
-          </a:bodyPr>
-          <a:lstStyle/>
-          <a:p>
-            <a:pPr algn="l"/>
-            <a:r>
-              <a:rPr sz="2800" b="1">
-                <a:solidFill>
-                  <a:srgbClr val="1F2937"/>
-                </a:solidFill>
-                <a:latin typeface="Calibri"/>
-              </a:rPr>
-              <a:t>Counting only future climate deaths and ignoring 3.2 million present-day energy-poverty deaths is bad arithmetic — and bad ethics.</a:t>
-            </a:r>
-          </a:p>
-        </p:txBody>
-      </p:sp>
-      <p:sp>
-        <p:nvSpPr>
-          <p:cNvPr id="5" name="Rectangle 4"/>
+          <p:cNvPr id="3" name="Oval 2"/>
           <p:cNvSpPr/>
           <p:nvPr/>
         </p:nvSpPr>
         <p:spPr>
           <a:xfrm>
-            <a:off x="548640" y="3840480"/>
-            <a:ext cx="5394960" cy="2103120"/>
-          </a:xfrm>
-          <a:prstGeom prst="rect">
-            <a:avLst/>
-          </a:prstGeom>
-          <a:solidFill>
-            <a:srgbClr val="F3F4F6"/>
-          </a:solidFill>
-          <a:ln>
-            <a:noFill/>
-          </a:ln>
-          <a:effectLst/>
-        </p:spPr>
-        <p:style>
-          <a:lnRef idx="1">
-            <a:schemeClr val="accent1"/>
-          </a:lnRef>
-          <a:fillRef idx="3">
-            <a:schemeClr val="accent1"/>
-          </a:fillRef>
-          <a:effectRef idx="2">
-            <a:schemeClr val="accent1"/>
-          </a:effectRef>
-          <a:fontRef idx="minor">
-            <a:schemeClr val="lt1"/>
-          </a:fontRef>
-        </p:style>
-        <p:txBody>
-          <a:bodyPr rtlCol="0" anchor="ctr"/>
-          <a:lstStyle/>
-          <a:p>
-            <a:pPr algn="ctr"/>
-          </a:p>
-        </p:txBody>
-      </p:sp>
-      <p:sp>
-        <p:nvSpPr>
-          <p:cNvPr id="6" name="TextBox 5"/>
-          <p:cNvSpPr txBox="1"/>
-          <p:nvPr/>
-        </p:nvSpPr>
-        <p:spPr>
-          <a:xfrm>
-            <a:off x="777240" y="4069080"/>
-            <a:ext cx="4937760" cy="457200"/>
-          </a:xfrm>
-          <a:prstGeom prst="rect">
-            <a:avLst/>
-          </a:prstGeom>
-          <a:noFill/>
-        </p:spPr>
-        <p:txBody>
-          <a:bodyPr wrap="square" lIns="0" rIns="0" tIns="0" bIns="0" anchor="t">
-            <a:spAutoFit/>
-          </a:bodyPr>
-          <a:lstStyle/>
-          <a:p>
-            <a:pPr algn="l"/>
-            <a:r>
-              <a:rPr sz="1400" b="1">
-                <a:solidFill>
-                  <a:srgbClr val="4B5563"/>
-                </a:solidFill>
-                <a:latin typeface="Calibri"/>
-              </a:rPr>
-              <a:t>I am NOT saying:</a:t>
-            </a:r>
-          </a:p>
-        </p:txBody>
-      </p:sp>
-      <p:sp>
-        <p:nvSpPr>
-          <p:cNvPr id="7" name="TextBox 6"/>
-          <p:cNvSpPr txBox="1"/>
-          <p:nvPr/>
-        </p:nvSpPr>
-        <p:spPr>
-          <a:xfrm>
-            <a:off x="777240" y="4572000"/>
-            <a:ext cx="4937760" cy="1188720"/>
-          </a:xfrm>
-          <a:prstGeom prst="rect">
-            <a:avLst/>
-          </a:prstGeom>
-          <a:noFill/>
-        </p:spPr>
-        <p:txBody>
-          <a:bodyPr wrap="square" lIns="0" rIns="0" tIns="0" bIns="0" anchor="t">
-            <a:spAutoFit/>
-          </a:bodyPr>
-          <a:lstStyle/>
-          <a:p>
-            <a:pPr algn="l"/>
-            <a:r>
-              <a:rPr sz="1400" b="0">
-                <a:solidFill>
-                  <a:srgbClr val="4B5563"/>
-                </a:solidFill>
-                <a:latin typeface="Calibri"/>
-              </a:rPr>
-              <a:t>•  Climate change isn’t real
-•  Renewables don’t work
-•  Africa should burn more coal</a:t>
-            </a:r>
-          </a:p>
-        </p:txBody>
-      </p:sp>
-      <p:sp>
-        <p:nvSpPr>
-          <p:cNvPr id="8" name="Rectangle 7"/>
-          <p:cNvSpPr/>
-          <p:nvPr/>
-        </p:nvSpPr>
-        <p:spPr>
-          <a:xfrm>
-            <a:off x="6263640" y="3840480"/>
-            <a:ext cx="5394960" cy="2103120"/>
-          </a:xfrm>
-          <a:prstGeom prst="rect">
+            <a:off x="576072" y="539496"/>
+            <a:ext cx="128016" cy="128016"/>
+          </a:xfrm>
+          <a:prstGeom prst="ellipse">
             <a:avLst/>
           </a:prstGeom>
           <a:solidFill>
@@ -7099,14 +8056,14 @@
       </p:sp>
       <p:sp>
         <p:nvSpPr>
-          <p:cNvPr id="9" name="TextBox 8"/>
+          <p:cNvPr id="4" name="TextBox 3"/>
           <p:cNvSpPr txBox="1"/>
           <p:nvPr/>
         </p:nvSpPr>
         <p:spPr>
           <a:xfrm>
-            <a:off x="6492240" y="4069080"/>
-            <a:ext cx="4937760" cy="457200"/>
+            <a:off x="822960" y="457200"/>
+            <a:ext cx="4572000" cy="365760"/>
           </a:xfrm>
           <a:prstGeom prst="rect">
             <a:avLst/>
@@ -7121,27 +8078,27 @@
           <a:p>
             <a:pPr algn="l"/>
             <a:r>
-              <a:rPr sz="1400" b="1">
-                <a:solidFill>
-                  <a:srgbClr val="FFFFFF"/>
+              <a:rPr sz="1100" b="1">
+                <a:solidFill>
+                  <a:srgbClr val="1F4E79"/>
                 </a:solidFill>
                 <a:latin typeface="Calibri"/>
               </a:rPr>
-              <a:t>I AM saying:</a:t>
-            </a:r>
-          </a:p>
-        </p:txBody>
-      </p:sp>
-      <p:sp>
-        <p:nvSpPr>
-          <p:cNvPr id="10" name="TextBox 9"/>
+              <a:t>RESOLUTION  •  THE MANAGED TRANSITION</a:t>
+            </a:r>
+          </a:p>
+        </p:txBody>
+      </p:sp>
+      <p:sp>
+        <p:nvSpPr>
+          <p:cNvPr id="5" name="TextBox 4"/>
           <p:cNvSpPr txBox="1"/>
           <p:nvPr/>
         </p:nvSpPr>
         <p:spPr>
           <a:xfrm>
-            <a:off x="6492240" y="4572000"/>
-            <a:ext cx="4937760" cy="1188720"/>
+            <a:off x="548640" y="1005840"/>
+            <a:ext cx="11064240" cy="1280160"/>
           </a:xfrm>
           <a:prstGeom prst="rect">
             <a:avLst/>
@@ -7156,30 +8113,162 @@
           <a:p>
             <a:pPr algn="l"/>
             <a:r>
-              <a:rPr sz="1400" b="0">
-                <a:solidFill>
-                  <a:srgbClr val="FFFFFF"/>
+              <a:rPr sz="2200" b="1">
+                <a:solidFill>
+                  <a:srgbClr val="1F2937"/>
                 </a:solidFill>
                 <a:latin typeface="Calibri"/>
               </a:rPr>
-              <a:t>•  The honest cost-benefit picture
-    includes the people dying today
-    because they have no power, no
-    gas, no light.</a:t>
-            </a:r>
-          </a:p>
-        </p:txBody>
-      </p:sp>
-      <p:sp>
-        <p:nvSpPr>
-          <p:cNvPr id="11" name="TextBox 10"/>
+              <a:t>Gas as a bridge, renewables stacked on top, firm power kept
+until storage can carry the load — in that order.</a:t>
+            </a:r>
+          </a:p>
+        </p:txBody>
+      </p:sp>
+      <p:sp>
+        <p:nvSpPr>
+          <p:cNvPr id="6" name="Rounded Rectangle 5"/>
+          <p:cNvSpPr/>
+          <p:nvPr/>
+        </p:nvSpPr>
+        <p:spPr>
+          <a:xfrm>
+            <a:off x="548640" y="2743200"/>
+            <a:ext cx="3611880" cy="3291840"/>
+          </a:xfrm>
+          <a:prstGeom prst="roundRect">
+            <a:avLst>
+              <a:gd name="adj" fmla="val 10000"/>
+            </a:avLst>
+          </a:prstGeom>
+          <a:solidFill>
+            <a:srgbClr val="1F4E79"/>
+          </a:solidFill>
+          <a:ln>
+            <a:noFill/>
+          </a:ln>
+          <a:effectLst/>
+        </p:spPr>
+        <p:style>
+          <a:lnRef idx="1">
+            <a:schemeClr val="accent1"/>
+          </a:lnRef>
+          <a:fillRef idx="3">
+            <a:schemeClr val="accent1"/>
+          </a:fillRef>
+          <a:effectRef idx="2">
+            <a:schemeClr val="accent1"/>
+          </a:effectRef>
+          <a:fontRef idx="minor">
+            <a:schemeClr val="lt1"/>
+          </a:fontRef>
+        </p:style>
+        <p:txBody>
+          <a:bodyPr rtlCol="0" anchor="ctr"/>
+          <a:lstStyle/>
+          <a:p>
+            <a:pPr algn="ctr"/>
+          </a:p>
+        </p:txBody>
+      </p:sp>
+      <p:sp>
+        <p:nvSpPr>
+          <p:cNvPr id="7" name="Oval 6"/>
+          <p:cNvSpPr/>
+          <p:nvPr/>
+        </p:nvSpPr>
+        <p:spPr>
+          <a:xfrm>
+            <a:off x="3337560" y="2894076"/>
+            <a:ext cx="640080" cy="704088"/>
+          </a:xfrm>
+          <a:prstGeom prst="ellipse">
+            <a:avLst/>
+          </a:prstGeom>
+          <a:solidFill>
+            <a:srgbClr val="FFFFFF"/>
+          </a:solidFill>
+          <a:ln>
+            <a:noFill/>
+          </a:ln>
+          <a:effectLst/>
+        </p:spPr>
+        <p:style>
+          <a:lnRef idx="1">
+            <a:schemeClr val="accent1"/>
+          </a:lnRef>
+          <a:fillRef idx="3">
+            <a:schemeClr val="accent1"/>
+          </a:fillRef>
+          <a:effectRef idx="2">
+            <a:schemeClr val="accent1"/>
+          </a:effectRef>
+          <a:fontRef idx="minor">
+            <a:schemeClr val="lt1"/>
+          </a:fontRef>
+        </p:style>
+        <p:txBody>
+          <a:bodyPr rtlCol="0" anchor="ctr"/>
+          <a:lstStyle/>
+          <a:p>
+            <a:pPr algn="ctr"/>
+          </a:p>
+        </p:txBody>
+      </p:sp>
+      <p:sp>
+        <p:nvSpPr>
+          <p:cNvPr id="8" name="Oval 7"/>
+          <p:cNvSpPr/>
+          <p:nvPr/>
+        </p:nvSpPr>
+        <p:spPr>
+          <a:xfrm>
+            <a:off x="3513582" y="3118104"/>
+            <a:ext cx="288036" cy="384048"/>
+          </a:xfrm>
+          <a:prstGeom prst="ellipse">
+            <a:avLst/>
+          </a:prstGeom>
+          <a:solidFill>
+            <a:srgbClr val="FDE8CC"/>
+          </a:solidFill>
+          <a:ln>
+            <a:noFill/>
+          </a:ln>
+          <a:effectLst/>
+        </p:spPr>
+        <p:style>
+          <a:lnRef idx="1">
+            <a:schemeClr val="accent1"/>
+          </a:lnRef>
+          <a:fillRef idx="3">
+            <a:schemeClr val="accent1"/>
+          </a:fillRef>
+          <a:effectRef idx="2">
+            <a:schemeClr val="accent1"/>
+          </a:effectRef>
+          <a:fontRef idx="minor">
+            <a:schemeClr val="lt1"/>
+          </a:fontRef>
+        </p:style>
+        <p:txBody>
+          <a:bodyPr rtlCol="0" anchor="ctr"/>
+          <a:lstStyle/>
+          <a:p>
+            <a:pPr algn="ctr"/>
+          </a:p>
+        </p:txBody>
+      </p:sp>
+      <p:sp>
+        <p:nvSpPr>
+          <p:cNvPr id="9" name="TextBox 8"/>
           <p:cNvSpPr txBox="1"/>
           <p:nvPr/>
         </p:nvSpPr>
         <p:spPr>
           <a:xfrm>
-            <a:off x="548640" y="6126480"/>
-            <a:ext cx="10972800" cy="274320"/>
+            <a:off x="868680" y="3063240"/>
+            <a:ext cx="2331720" cy="365760"/>
           </a:xfrm>
           <a:prstGeom prst="rect">
             <a:avLst/>
@@ -7194,27 +8283,27 @@
           <a:p>
             <a:pPr algn="l"/>
             <a:r>
-              <a:rPr sz="1400" b="1">
-                <a:solidFill>
-                  <a:srgbClr val="1F4E79"/>
+              <a:rPr sz="1100" b="1">
+                <a:solidFill>
+                  <a:srgbClr val="FFFFFF"/>
                 </a:solidFill>
                 <a:latin typeface="Calibri"/>
               </a:rPr>
-              <a:t>Thank you. Questions?</a:t>
-            </a:r>
-          </a:p>
-        </p:txBody>
-      </p:sp>
-      <p:sp>
-        <p:nvSpPr>
-          <p:cNvPr id="12" name="TextBox 11"/>
+              <a:t>NOW — BRIDGE</a:t>
+            </a:r>
+          </a:p>
+        </p:txBody>
+      </p:sp>
+      <p:sp>
+        <p:nvSpPr>
+          <p:cNvPr id="10" name="TextBox 9"/>
           <p:cNvSpPr txBox="1"/>
           <p:nvPr/>
         </p:nvSpPr>
         <p:spPr>
           <a:xfrm>
-            <a:off x="457200" y="6446520"/>
-            <a:ext cx="7315200" cy="274320"/>
+            <a:off x="868680" y="3520440"/>
+            <a:ext cx="3063240" cy="640080"/>
           </a:xfrm>
           <a:prstGeom prst="rect">
             <a:avLst/>
@@ -7229,27 +8318,27 @@
           <a:p>
             <a:pPr algn="l"/>
             <a:r>
-              <a:rPr sz="900" b="0">
-                <a:solidFill>
-                  <a:srgbClr val="9CA3AF"/>
+              <a:rPr sz="2000" b="1">
+                <a:solidFill>
+                  <a:srgbClr val="FFFFFF"/>
                 </a:solidFill>
                 <a:latin typeface="Calibri"/>
               </a:rPr>
-              <a:t>Choolwe  •  The Case For Fossil Fuels  •  Follow-up to “How Climate Change Affects the World We Live In”</a:t>
-            </a:r>
-          </a:p>
-        </p:txBody>
-      </p:sp>
-      <p:sp>
-        <p:nvSpPr>
-          <p:cNvPr id="13" name="TextBox 12"/>
+              <a:t>Natural gas</a:t>
+            </a:r>
+          </a:p>
+        </p:txBody>
+      </p:sp>
+      <p:sp>
+        <p:nvSpPr>
+          <p:cNvPr id="11" name="TextBox 10"/>
           <p:cNvSpPr txBox="1"/>
           <p:nvPr/>
         </p:nvSpPr>
         <p:spPr>
           <a:xfrm>
-            <a:off x="10972800" y="6446520"/>
-            <a:ext cx="914400" cy="274320"/>
+            <a:off x="868680" y="4389120"/>
+            <a:ext cx="3063240" cy="1463040"/>
           </a:xfrm>
           <a:prstGeom prst="rect">
             <a:avLst/>
@@ -7262,15 +8351,2240 @@
           </a:bodyPr>
           <a:lstStyle/>
           <a:p>
-            <a:pPr algn="r"/>
-            <a:r>
-              <a:rPr sz="900" b="0">
-                <a:solidFill>
-                  <a:srgbClr val="9CA3AF"/>
+            <a:pPr algn="l"/>
+            <a:r>
+              <a:rPr sz="1200" b="0">
+                <a:solidFill>
+                  <a:srgbClr val="FFFFFF"/>
                 </a:solidFill>
                 <a:latin typeface="Calibri"/>
               </a:rPr>
-              <a:t>8 / 8</a:t>
+              <a:t>Emits 50–60% less CO₂ than coal.
+Africa holds ~13% of proven gas reserves.
+Faster to deploy than nuclear,
+firm in a way solar alone is not.</a:t>
+            </a:r>
+          </a:p>
+        </p:txBody>
+      </p:sp>
+      <p:sp>
+        <p:nvSpPr>
+          <p:cNvPr id="12" name="Rounded Rectangle 11"/>
+          <p:cNvSpPr/>
+          <p:nvPr/>
+        </p:nvSpPr>
+        <p:spPr>
+          <a:xfrm>
+            <a:off x="4297680" y="2743200"/>
+            <a:ext cx="3611880" cy="3291840"/>
+          </a:xfrm>
+          <a:prstGeom prst="roundRect">
+            <a:avLst>
+              <a:gd name="adj" fmla="val 10000"/>
+            </a:avLst>
+          </a:prstGeom>
+          <a:solidFill>
+            <a:srgbClr val="F9FAFB"/>
+          </a:solidFill>
+          <a:ln>
+            <a:noFill/>
+          </a:ln>
+          <a:effectLst/>
+        </p:spPr>
+        <p:style>
+          <a:lnRef idx="1">
+            <a:schemeClr val="accent1"/>
+          </a:lnRef>
+          <a:fillRef idx="3">
+            <a:schemeClr val="accent1"/>
+          </a:fillRef>
+          <a:effectRef idx="2">
+            <a:schemeClr val="accent1"/>
+          </a:effectRef>
+          <a:fontRef idx="minor">
+            <a:schemeClr val="lt1"/>
+          </a:fontRef>
+        </p:style>
+        <p:txBody>
+          <a:bodyPr rtlCol="0" anchor="ctr"/>
+          <a:lstStyle/>
+          <a:p>
+            <a:pPr algn="ctr"/>
+          </a:p>
+        </p:txBody>
+      </p:sp>
+      <p:sp>
+        <p:nvSpPr>
+          <p:cNvPr id="13" name="Oval 12"/>
+          <p:cNvSpPr/>
+          <p:nvPr/>
+        </p:nvSpPr>
+        <p:spPr>
+          <a:xfrm>
+            <a:off x="7132320" y="2971800"/>
+            <a:ext cx="548640" cy="548640"/>
+          </a:xfrm>
+          <a:prstGeom prst="ellipse">
+            <a:avLst/>
+          </a:prstGeom>
+          <a:solidFill>
+            <a:srgbClr val="1F4E79"/>
+          </a:solidFill>
+          <a:ln>
+            <a:noFill/>
+          </a:ln>
+          <a:effectLst/>
+        </p:spPr>
+        <p:style>
+          <a:lnRef idx="1">
+            <a:schemeClr val="accent1"/>
+          </a:lnRef>
+          <a:fillRef idx="3">
+            <a:schemeClr val="accent1"/>
+          </a:fillRef>
+          <a:effectRef idx="2">
+            <a:schemeClr val="accent1"/>
+          </a:effectRef>
+          <a:fontRef idx="minor">
+            <a:schemeClr val="lt1"/>
+          </a:fontRef>
+        </p:style>
+        <p:txBody>
+          <a:bodyPr rtlCol="0" anchor="ctr"/>
+          <a:lstStyle/>
+          <a:p>
+            <a:pPr algn="ctr"/>
+          </a:p>
+        </p:txBody>
+      </p:sp>
+      <p:sp>
+        <p:nvSpPr>
+          <p:cNvPr id="14" name="Lightning Bolt 13"/>
+          <p:cNvSpPr/>
+          <p:nvPr/>
+        </p:nvSpPr>
+        <p:spPr>
+          <a:xfrm>
+            <a:off x="7269480" y="3040380"/>
+            <a:ext cx="274320" cy="411480"/>
+          </a:xfrm>
+          <a:prstGeom prst="lightningBolt">
+            <a:avLst/>
+          </a:prstGeom>
+          <a:solidFill>
+            <a:srgbClr val="FFFFFF"/>
+          </a:solidFill>
+          <a:ln>
+            <a:noFill/>
+          </a:ln>
+          <a:effectLst/>
+        </p:spPr>
+        <p:style>
+          <a:lnRef idx="1">
+            <a:schemeClr val="accent1"/>
+          </a:lnRef>
+          <a:fillRef idx="3">
+            <a:schemeClr val="accent1"/>
+          </a:fillRef>
+          <a:effectRef idx="2">
+            <a:schemeClr val="accent1"/>
+          </a:effectRef>
+          <a:fontRef idx="minor">
+            <a:schemeClr val="lt1"/>
+          </a:fontRef>
+        </p:style>
+        <p:txBody>
+          <a:bodyPr rtlCol="0" anchor="ctr"/>
+          <a:lstStyle/>
+          <a:p>
+            <a:pPr algn="ctr"/>
+          </a:p>
+        </p:txBody>
+      </p:sp>
+      <p:sp>
+        <p:nvSpPr>
+          <p:cNvPr id="15" name="TextBox 14"/>
+          <p:cNvSpPr txBox="1"/>
+          <p:nvPr/>
+        </p:nvSpPr>
+        <p:spPr>
+          <a:xfrm>
+            <a:off x="4617720" y="3063240"/>
+            <a:ext cx="2331720" cy="365760"/>
+          </a:xfrm>
+          <a:prstGeom prst="rect">
+            <a:avLst/>
+          </a:prstGeom>
+          <a:noFill/>
+        </p:spPr>
+        <p:txBody>
+          <a:bodyPr wrap="square" lIns="0" rIns="0" tIns="0" bIns="0" anchor="t">
+            <a:spAutoFit/>
+          </a:bodyPr>
+          <a:lstStyle/>
+          <a:p>
+            <a:pPr algn="l"/>
+            <a:r>
+              <a:rPr sz="1100" b="1">
+                <a:solidFill>
+                  <a:srgbClr val="1F4E79"/>
+                </a:solidFill>
+                <a:latin typeface="Calibri"/>
+              </a:rPr>
+              <a:t>BUILD-OUT</a:t>
+            </a:r>
+          </a:p>
+        </p:txBody>
+      </p:sp>
+      <p:sp>
+        <p:nvSpPr>
+          <p:cNvPr id="16" name="TextBox 15"/>
+          <p:cNvSpPr txBox="1"/>
+          <p:nvPr/>
+        </p:nvSpPr>
+        <p:spPr>
+          <a:xfrm>
+            <a:off x="4617720" y="3520440"/>
+            <a:ext cx="3063240" cy="640080"/>
+          </a:xfrm>
+          <a:prstGeom prst="rect">
+            <a:avLst/>
+          </a:prstGeom>
+          <a:noFill/>
+        </p:spPr>
+        <p:txBody>
+          <a:bodyPr wrap="square" lIns="0" rIns="0" tIns="0" bIns="0" anchor="t">
+            <a:spAutoFit/>
+          </a:bodyPr>
+          <a:lstStyle/>
+          <a:p>
+            <a:pPr algn="l"/>
+            <a:r>
+              <a:rPr sz="2000" b="1">
+                <a:solidFill>
+                  <a:srgbClr val="1F2937"/>
+                </a:solidFill>
+                <a:latin typeface="Calibri"/>
+              </a:rPr>
+              <a:t>Renewables, hard</a:t>
+            </a:r>
+          </a:p>
+        </p:txBody>
+      </p:sp>
+      <p:sp>
+        <p:nvSpPr>
+          <p:cNvPr id="17" name="TextBox 16"/>
+          <p:cNvSpPr txBox="1"/>
+          <p:nvPr/>
+        </p:nvSpPr>
+        <p:spPr>
+          <a:xfrm>
+            <a:off x="4617720" y="4389120"/>
+            <a:ext cx="3063240" cy="1463040"/>
+          </a:xfrm>
+          <a:prstGeom prst="rect">
+            <a:avLst/>
+          </a:prstGeom>
+          <a:noFill/>
+        </p:spPr>
+        <p:txBody>
+          <a:bodyPr wrap="square" lIns="0" rIns="0" tIns="0" bIns="0" anchor="t">
+            <a:spAutoFit/>
+          </a:bodyPr>
+          <a:lstStyle/>
+          <a:p>
+            <a:pPr algn="l"/>
+            <a:r>
+              <a:rPr sz="1200" b="0">
+                <a:solidFill>
+                  <a:srgbClr val="4B5563"/>
+                </a:solidFill>
+                <a:latin typeface="Calibri"/>
+              </a:rPr>
+              <a:t>Solar in Zambia is already the
+cheapest new capacity.
+Wind, hydro diversification,
+storage — scaled in parallel,
+not waited for.</a:t>
+            </a:r>
+          </a:p>
+        </p:txBody>
+      </p:sp>
+      <p:sp>
+        <p:nvSpPr>
+          <p:cNvPr id="18" name="Rounded Rectangle 17"/>
+          <p:cNvSpPr/>
+          <p:nvPr/>
+        </p:nvSpPr>
+        <p:spPr>
+          <a:xfrm>
+            <a:off x="8046720" y="2743200"/>
+            <a:ext cx="3611880" cy="3291840"/>
+          </a:xfrm>
+          <a:prstGeom prst="roundRect">
+            <a:avLst>
+              <a:gd name="adj" fmla="val 10000"/>
+            </a:avLst>
+          </a:prstGeom>
+          <a:solidFill>
+            <a:srgbClr val="F9FAFB"/>
+          </a:solidFill>
+          <a:ln>
+            <a:noFill/>
+          </a:ln>
+          <a:effectLst/>
+        </p:spPr>
+        <p:style>
+          <a:lnRef idx="1">
+            <a:schemeClr val="accent1"/>
+          </a:lnRef>
+          <a:fillRef idx="3">
+            <a:schemeClr val="accent1"/>
+          </a:fillRef>
+          <a:effectRef idx="2">
+            <a:schemeClr val="accent1"/>
+          </a:effectRef>
+          <a:fontRef idx="minor">
+            <a:schemeClr val="lt1"/>
+          </a:fontRef>
+        </p:style>
+        <p:txBody>
+          <a:bodyPr rtlCol="0" anchor="ctr"/>
+          <a:lstStyle/>
+          <a:p>
+            <a:pPr algn="ctr"/>
+          </a:p>
+        </p:txBody>
+      </p:sp>
+      <p:sp>
+        <p:nvSpPr>
+          <p:cNvPr id="19" name="Oval 18"/>
+          <p:cNvSpPr/>
+          <p:nvPr/>
+        </p:nvSpPr>
+        <p:spPr>
+          <a:xfrm>
+            <a:off x="10881360" y="2971800"/>
+            <a:ext cx="548640" cy="548640"/>
+          </a:xfrm>
+          <a:prstGeom prst="ellipse">
+            <a:avLst/>
+          </a:prstGeom>
+          <a:solidFill>
+            <a:srgbClr val="1F4E79"/>
+          </a:solidFill>
+          <a:ln>
+            <a:noFill/>
+          </a:ln>
+          <a:effectLst/>
+        </p:spPr>
+        <p:style>
+          <a:lnRef idx="1">
+            <a:schemeClr val="accent1"/>
+          </a:lnRef>
+          <a:fillRef idx="3">
+            <a:schemeClr val="accent1"/>
+          </a:fillRef>
+          <a:effectRef idx="2">
+            <a:schemeClr val="accent1"/>
+          </a:effectRef>
+          <a:fontRef idx="minor">
+            <a:schemeClr val="lt1"/>
+          </a:fontRef>
+        </p:style>
+        <p:txBody>
+          <a:bodyPr rtlCol="0" anchor="ctr"/>
+          <a:lstStyle/>
+          <a:p>
+            <a:pPr algn="ctr"/>
+          </a:p>
+        </p:txBody>
+      </p:sp>
+      <p:sp>
+        <p:nvSpPr>
+          <p:cNvPr id="20" name="Rectangle 19"/>
+          <p:cNvSpPr/>
+          <p:nvPr/>
+        </p:nvSpPr>
+        <p:spPr>
+          <a:xfrm>
+            <a:off x="10922508" y="3235147"/>
+            <a:ext cx="466344" cy="21945"/>
+          </a:xfrm>
+          <a:prstGeom prst="rect">
+            <a:avLst/>
+          </a:prstGeom>
+          <a:solidFill>
+            <a:srgbClr val="FFFFFF"/>
+          </a:solidFill>
+          <a:ln>
+            <a:noFill/>
+          </a:ln>
+          <a:effectLst/>
+        </p:spPr>
+        <p:style>
+          <a:lnRef idx="1">
+            <a:schemeClr val="accent1"/>
+          </a:lnRef>
+          <a:fillRef idx="3">
+            <a:schemeClr val="accent1"/>
+          </a:fillRef>
+          <a:effectRef idx="2">
+            <a:schemeClr val="accent1"/>
+          </a:effectRef>
+          <a:fontRef idx="minor">
+            <a:schemeClr val="lt1"/>
+          </a:fontRef>
+        </p:style>
+        <p:txBody>
+          <a:bodyPr rtlCol="0" anchor="ctr"/>
+          <a:lstStyle/>
+          <a:p>
+            <a:pPr algn="ctr"/>
+          </a:p>
+        </p:txBody>
+      </p:sp>
+      <p:sp>
+        <p:nvSpPr>
+          <p:cNvPr id="21" name="Rectangle 20"/>
+          <p:cNvSpPr/>
+          <p:nvPr/>
+        </p:nvSpPr>
+        <p:spPr>
+          <a:xfrm>
+            <a:off x="11144707" y="3012948"/>
+            <a:ext cx="21945" cy="466344"/>
+          </a:xfrm>
+          <a:prstGeom prst="rect">
+            <a:avLst/>
+          </a:prstGeom>
+          <a:solidFill>
+            <a:srgbClr val="FFFFFF"/>
+          </a:solidFill>
+          <a:ln>
+            <a:noFill/>
+          </a:ln>
+          <a:effectLst/>
+        </p:spPr>
+        <p:style>
+          <a:lnRef idx="1">
+            <a:schemeClr val="accent1"/>
+          </a:lnRef>
+          <a:fillRef idx="3">
+            <a:schemeClr val="accent1"/>
+          </a:fillRef>
+          <a:effectRef idx="2">
+            <a:schemeClr val="accent1"/>
+          </a:effectRef>
+          <a:fontRef idx="minor">
+            <a:schemeClr val="lt1"/>
+          </a:fontRef>
+        </p:style>
+        <p:txBody>
+          <a:bodyPr rtlCol="0" anchor="ctr"/>
+          <a:lstStyle/>
+          <a:p>
+            <a:pPr algn="ctr"/>
+          </a:p>
+        </p:txBody>
+      </p:sp>
+      <p:sp>
+        <p:nvSpPr>
+          <p:cNvPr id="22" name="TextBox 21"/>
+          <p:cNvSpPr txBox="1"/>
+          <p:nvPr/>
+        </p:nvSpPr>
+        <p:spPr>
+          <a:xfrm>
+            <a:off x="8366760" y="3063240"/>
+            <a:ext cx="2331720" cy="365760"/>
+          </a:xfrm>
+          <a:prstGeom prst="rect">
+            <a:avLst/>
+          </a:prstGeom>
+          <a:noFill/>
+        </p:spPr>
+        <p:txBody>
+          <a:bodyPr wrap="square" lIns="0" rIns="0" tIns="0" bIns="0" anchor="t">
+            <a:spAutoFit/>
+          </a:bodyPr>
+          <a:lstStyle/>
+          <a:p>
+            <a:pPr algn="l"/>
+            <a:r>
+              <a:rPr sz="1100" b="1">
+                <a:solidFill>
+                  <a:srgbClr val="1F4E79"/>
+                </a:solidFill>
+                <a:latin typeface="Calibri"/>
+              </a:rPr>
+              <a:t>THEN — RETIRE</a:t>
+            </a:r>
+          </a:p>
+        </p:txBody>
+      </p:sp>
+      <p:sp>
+        <p:nvSpPr>
+          <p:cNvPr id="23" name="TextBox 22"/>
+          <p:cNvSpPr txBox="1"/>
+          <p:nvPr/>
+        </p:nvSpPr>
+        <p:spPr>
+          <a:xfrm>
+            <a:off x="8366760" y="3520440"/>
+            <a:ext cx="3063240" cy="640080"/>
+          </a:xfrm>
+          <a:prstGeom prst="rect">
+            <a:avLst/>
+          </a:prstGeom>
+          <a:noFill/>
+        </p:spPr>
+        <p:txBody>
+          <a:bodyPr wrap="square" lIns="0" rIns="0" tIns="0" bIns="0" anchor="t">
+            <a:spAutoFit/>
+          </a:bodyPr>
+          <a:lstStyle/>
+          <a:p>
+            <a:pPr algn="l"/>
+            <a:r>
+              <a:rPr sz="2000" b="1">
+                <a:solidFill>
+                  <a:srgbClr val="1F2937"/>
+                </a:solidFill>
+                <a:latin typeface="Calibri"/>
+              </a:rPr>
+              <a:t>Phase fossil fuels down</a:t>
+            </a:r>
+          </a:p>
+        </p:txBody>
+      </p:sp>
+      <p:sp>
+        <p:nvSpPr>
+          <p:cNvPr id="24" name="TextBox 23"/>
+          <p:cNvSpPr txBox="1"/>
+          <p:nvPr/>
+        </p:nvSpPr>
+        <p:spPr>
+          <a:xfrm>
+            <a:off x="8366760" y="4389120"/>
+            <a:ext cx="3063240" cy="1463040"/>
+          </a:xfrm>
+          <a:prstGeom prst="rect">
+            <a:avLst/>
+          </a:prstGeom>
+          <a:noFill/>
+        </p:spPr>
+        <p:txBody>
+          <a:bodyPr wrap="square" lIns="0" rIns="0" tIns="0" bIns="0" anchor="t">
+            <a:spAutoFit/>
+          </a:bodyPr>
+          <a:lstStyle/>
+          <a:p>
+            <a:pPr algn="l"/>
+            <a:r>
+              <a:rPr sz="1200" b="0">
+                <a:solidFill>
+                  <a:srgbClr val="4B5563"/>
+                </a:solidFill>
+                <a:latin typeface="Calibri"/>
+              </a:rPr>
+              <a:t>When grids are firm and storage can
+carry the load, retire gas plants.
+Not before. Not as a slogan.
+As an engineering schedule.</a:t>
+            </a:r>
+          </a:p>
+        </p:txBody>
+      </p:sp>
+      <p:sp>
+        <p:nvSpPr>
+          <p:cNvPr id="25" name="Right Arrow 24"/>
+          <p:cNvSpPr/>
+          <p:nvPr/>
+        </p:nvSpPr>
+        <p:spPr>
+          <a:xfrm>
+            <a:off x="4114800" y="4160520"/>
+            <a:ext cx="274320" cy="411480"/>
+          </a:xfrm>
+          <a:prstGeom prst="rightArrow">
+            <a:avLst/>
+          </a:prstGeom>
+          <a:solidFill>
+            <a:srgbClr val="9CA3AF"/>
+          </a:solidFill>
+          <a:ln>
+            <a:noFill/>
+          </a:ln>
+          <a:effectLst/>
+        </p:spPr>
+        <p:style>
+          <a:lnRef idx="1">
+            <a:schemeClr val="accent1"/>
+          </a:lnRef>
+          <a:fillRef idx="3">
+            <a:schemeClr val="accent1"/>
+          </a:fillRef>
+          <a:effectRef idx="2">
+            <a:schemeClr val="accent1"/>
+          </a:effectRef>
+          <a:fontRef idx="minor">
+            <a:schemeClr val="lt1"/>
+          </a:fontRef>
+        </p:style>
+        <p:txBody>
+          <a:bodyPr rtlCol="0" anchor="ctr"/>
+          <a:lstStyle/>
+          <a:p>
+            <a:pPr algn="ctr"/>
+          </a:p>
+        </p:txBody>
+      </p:sp>
+      <p:sp>
+        <p:nvSpPr>
+          <p:cNvPr id="26" name="Right Arrow 25"/>
+          <p:cNvSpPr/>
+          <p:nvPr/>
+        </p:nvSpPr>
+        <p:spPr>
+          <a:xfrm>
+            <a:off x="7863840" y="4160520"/>
+            <a:ext cx="274320" cy="411480"/>
+          </a:xfrm>
+          <a:prstGeom prst="rightArrow">
+            <a:avLst/>
+          </a:prstGeom>
+          <a:solidFill>
+            <a:srgbClr val="9CA3AF"/>
+          </a:solidFill>
+          <a:ln>
+            <a:noFill/>
+          </a:ln>
+          <a:effectLst/>
+        </p:spPr>
+        <p:style>
+          <a:lnRef idx="1">
+            <a:schemeClr val="accent1"/>
+          </a:lnRef>
+          <a:fillRef idx="3">
+            <a:schemeClr val="accent1"/>
+          </a:fillRef>
+          <a:effectRef idx="2">
+            <a:schemeClr val="accent1"/>
+          </a:effectRef>
+          <a:fontRef idx="minor">
+            <a:schemeClr val="lt1"/>
+          </a:fontRef>
+        </p:style>
+        <p:txBody>
+          <a:bodyPr rtlCol="0" anchor="ctr"/>
+          <a:lstStyle/>
+          <a:p>
+            <a:pPr algn="ctr"/>
+          </a:p>
+        </p:txBody>
+      </p:sp>
+      <p:sp>
+        <p:nvSpPr>
+          <p:cNvPr id="27" name="TextBox 26"/>
+          <p:cNvSpPr txBox="1"/>
+          <p:nvPr/>
+        </p:nvSpPr>
+        <p:spPr>
+          <a:xfrm>
+            <a:off x="457200" y="6537960"/>
+            <a:ext cx="7315200" cy="274320"/>
+          </a:xfrm>
+          <a:prstGeom prst="rect">
+            <a:avLst/>
+          </a:prstGeom>
+          <a:noFill/>
+        </p:spPr>
+        <p:txBody>
+          <a:bodyPr wrap="square" lIns="0" rIns="0" tIns="0" bIns="0" anchor="t">
+            <a:spAutoFit/>
+          </a:bodyPr>
+          <a:lstStyle/>
+          <a:p>
+            <a:pPr algn="l"/>
+            <a:r>
+              <a:rPr sz="900" b="0">
+                <a:solidFill>
+                  <a:srgbClr val="9CA3AF"/>
+                </a:solidFill>
+                <a:latin typeface="Calibri"/>
+              </a:rPr>
+              <a:t>Choolwe  •  The Case For Fossil Fuels</a:t>
+            </a:r>
+          </a:p>
+        </p:txBody>
+      </p:sp>
+      <p:sp>
+        <p:nvSpPr>
+          <p:cNvPr id="28" name="TextBox 27"/>
+          <p:cNvSpPr txBox="1"/>
+          <p:nvPr/>
+        </p:nvSpPr>
+        <p:spPr>
+          <a:xfrm>
+            <a:off x="10789920" y="6537960"/>
+            <a:ext cx="1097280" cy="274320"/>
+          </a:xfrm>
+          <a:prstGeom prst="rect">
+            <a:avLst/>
+          </a:prstGeom>
+          <a:noFill/>
+        </p:spPr>
+        <p:txBody>
+          <a:bodyPr wrap="square" lIns="0" rIns="0" tIns="0" bIns="0" anchor="t">
+            <a:spAutoFit/>
+          </a:bodyPr>
+          <a:lstStyle/>
+          <a:p>
+            <a:pPr algn="r"/>
+            <a:r>
+              <a:rPr sz="900" b="0">
+                <a:solidFill>
+                  <a:srgbClr val="9CA3AF"/>
+                </a:solidFill>
+                <a:latin typeface="Calibri"/>
+              </a:rPr>
+              <a:t>8 / 9</a:t>
+            </a:r>
+          </a:p>
+        </p:txBody>
+      </p:sp>
+    </p:spTree>
+  </p:cSld>
+  <p:clrMapOvr>
+    <a:masterClrMapping/>
+  </p:clrMapOvr>
+</p:sld>
+</file>
+
+<file path=ppt/slides/slide9.xml><?xml version="1.0" encoding="utf-8"?>
+<p:sld xmlns:a="http://schemas.openxmlformats.org/drawingml/2006/main" xmlns:p="http://schemas.openxmlformats.org/presentationml/2006/main" xmlns:r="http://schemas.openxmlformats.org/officeDocument/2006/relationships">
+  <p:cSld>
+    <p:spTree>
+      <p:nvGrpSpPr>
+        <p:cNvPr id="1" name=""/>
+        <p:cNvGrpSpPr/>
+        <p:nvPr/>
+      </p:nvGrpSpPr>
+      <p:grpSpPr/>
+      <p:sp>
+        <p:nvSpPr>
+          <p:cNvPr id="2" name="Rectangle 1"/>
+          <p:cNvSpPr/>
+          <p:nvPr/>
+        </p:nvSpPr>
+        <p:spPr>
+          <a:xfrm>
+            <a:off x="0" y="0"/>
+            <a:ext cx="12191695" cy="146304"/>
+          </a:xfrm>
+          <a:prstGeom prst="rect">
+            <a:avLst/>
+          </a:prstGeom>
+          <a:solidFill>
+            <a:srgbClr val="1F4E79"/>
+          </a:solidFill>
+          <a:ln>
+            <a:noFill/>
+          </a:ln>
+          <a:effectLst/>
+        </p:spPr>
+        <p:style>
+          <a:lnRef idx="1">
+            <a:schemeClr val="accent1"/>
+          </a:lnRef>
+          <a:fillRef idx="3">
+            <a:schemeClr val="accent1"/>
+          </a:fillRef>
+          <a:effectRef idx="2">
+            <a:schemeClr val="accent1"/>
+          </a:effectRef>
+          <a:fontRef idx="minor">
+            <a:schemeClr val="lt1"/>
+          </a:fontRef>
+        </p:style>
+        <p:txBody>
+          <a:bodyPr rtlCol="0" anchor="ctr"/>
+          <a:lstStyle/>
+          <a:p>
+            <a:pPr algn="ctr"/>
+          </a:p>
+        </p:txBody>
+      </p:sp>
+      <p:sp>
+        <p:nvSpPr>
+          <p:cNvPr id="3" name="Oval 2"/>
+          <p:cNvSpPr/>
+          <p:nvPr/>
+        </p:nvSpPr>
+        <p:spPr>
+          <a:xfrm>
+            <a:off x="576072" y="539496"/>
+            <a:ext cx="128016" cy="128016"/>
+          </a:xfrm>
+          <a:prstGeom prst="ellipse">
+            <a:avLst/>
+          </a:prstGeom>
+          <a:solidFill>
+            <a:srgbClr val="1F4E79"/>
+          </a:solidFill>
+          <a:ln>
+            <a:noFill/>
+          </a:ln>
+          <a:effectLst/>
+        </p:spPr>
+        <p:style>
+          <a:lnRef idx="1">
+            <a:schemeClr val="accent1"/>
+          </a:lnRef>
+          <a:fillRef idx="3">
+            <a:schemeClr val="accent1"/>
+          </a:fillRef>
+          <a:effectRef idx="2">
+            <a:schemeClr val="accent1"/>
+          </a:effectRef>
+          <a:fontRef idx="minor">
+            <a:schemeClr val="lt1"/>
+          </a:fontRef>
+        </p:style>
+        <p:txBody>
+          <a:bodyPr rtlCol="0" anchor="ctr"/>
+          <a:lstStyle/>
+          <a:p>
+            <a:pPr algn="ctr"/>
+          </a:p>
+        </p:txBody>
+      </p:sp>
+      <p:sp>
+        <p:nvSpPr>
+          <p:cNvPr id="4" name="TextBox 3"/>
+          <p:cNvSpPr txBox="1"/>
+          <p:nvPr/>
+        </p:nvSpPr>
+        <p:spPr>
+          <a:xfrm>
+            <a:off x="822960" y="457200"/>
+            <a:ext cx="4572000" cy="365760"/>
+          </a:xfrm>
+          <a:prstGeom prst="rect">
+            <a:avLst/>
+          </a:prstGeom>
+          <a:noFill/>
+        </p:spPr>
+        <p:txBody>
+          <a:bodyPr wrap="square" lIns="0" rIns="0" tIns="0" bIns="0" anchor="t">
+            <a:spAutoFit/>
+          </a:bodyPr>
+          <a:lstStyle/>
+          <a:p>
+            <a:pPr algn="l"/>
+            <a:r>
+              <a:rPr sz="1100" b="1">
+                <a:solidFill>
+                  <a:srgbClr val="1F4E79"/>
+                </a:solidFill>
+                <a:latin typeface="Calibri"/>
+              </a:rPr>
+              <a:t>APPENDIX  •  SOURCES</a:t>
+            </a:r>
+          </a:p>
+        </p:txBody>
+      </p:sp>
+      <p:sp>
+        <p:nvSpPr>
+          <p:cNvPr id="5" name="TextBox 4"/>
+          <p:cNvSpPr txBox="1"/>
+          <p:nvPr/>
+        </p:nvSpPr>
+        <p:spPr>
+          <a:xfrm>
+            <a:off x="548640" y="1005840"/>
+            <a:ext cx="10972800" cy="731520"/>
+          </a:xfrm>
+          <a:prstGeom prst="rect">
+            <a:avLst/>
+          </a:prstGeom>
+          <a:noFill/>
+        </p:spPr>
+        <p:txBody>
+          <a:bodyPr wrap="square" lIns="0" rIns="0" tIns="0" bIns="0" anchor="t">
+            <a:spAutoFit/>
+          </a:bodyPr>
+          <a:lstStyle/>
+          <a:p>
+            <a:pPr algn="l"/>
+            <a:r>
+              <a:rPr sz="2200" b="1">
+                <a:solidFill>
+                  <a:srgbClr val="1F2937"/>
+                </a:solidFill>
+                <a:latin typeface="Calibri"/>
+              </a:rPr>
+              <a:t>Every statistic on every slide, with a citation.</a:t>
+            </a:r>
+          </a:p>
+        </p:txBody>
+      </p:sp>
+      <p:sp>
+        <p:nvSpPr>
+          <p:cNvPr id="6" name="TextBox 5"/>
+          <p:cNvSpPr txBox="1"/>
+          <p:nvPr/>
+        </p:nvSpPr>
+        <p:spPr>
+          <a:xfrm>
+            <a:off x="548640" y="1554480"/>
+            <a:ext cx="10972800" cy="365760"/>
+          </a:xfrm>
+          <a:prstGeom prst="rect">
+            <a:avLst/>
+          </a:prstGeom>
+          <a:noFill/>
+        </p:spPr>
+        <p:txBody>
+          <a:bodyPr wrap="square" lIns="0" rIns="0" tIns="0" bIns="0" anchor="t">
+            <a:spAutoFit/>
+          </a:bodyPr>
+          <a:lstStyle/>
+          <a:p>
+            <a:pPr algn="l"/>
+            <a:r>
+              <a:rPr sz="1200" b="0">
+                <a:solidFill>
+                  <a:srgbClr val="4B5563"/>
+                </a:solidFill>
+                <a:latin typeface="Calibri"/>
+              </a:rPr>
+              <a:t>Full notes preserved in the repo at  research/notes.md.</a:t>
+            </a:r>
+          </a:p>
+        </p:txBody>
+      </p:sp>
+      <p:sp>
+        <p:nvSpPr>
+          <p:cNvPr id="7" name="Oval 6"/>
+          <p:cNvSpPr/>
+          <p:nvPr/>
+        </p:nvSpPr>
+        <p:spPr>
+          <a:xfrm>
+            <a:off x="594360" y="2286000"/>
+            <a:ext cx="91440" cy="91440"/>
+          </a:xfrm>
+          <a:prstGeom prst="ellipse">
+            <a:avLst/>
+          </a:prstGeom>
+          <a:solidFill>
+            <a:srgbClr val="D97706"/>
+          </a:solidFill>
+          <a:ln>
+            <a:noFill/>
+          </a:ln>
+          <a:effectLst/>
+        </p:spPr>
+        <p:style>
+          <a:lnRef idx="1">
+            <a:schemeClr val="accent1"/>
+          </a:lnRef>
+          <a:fillRef idx="3">
+            <a:schemeClr val="accent1"/>
+          </a:fillRef>
+          <a:effectRef idx="2">
+            <a:schemeClr val="accent1"/>
+          </a:effectRef>
+          <a:fontRef idx="minor">
+            <a:schemeClr val="lt1"/>
+          </a:fontRef>
+        </p:style>
+        <p:txBody>
+          <a:bodyPr rtlCol="0" anchor="ctr"/>
+          <a:lstStyle/>
+          <a:p>
+            <a:pPr algn="ctr"/>
+          </a:p>
+        </p:txBody>
+      </p:sp>
+      <p:sp>
+        <p:nvSpPr>
+          <p:cNvPr id="8" name="TextBox 7"/>
+          <p:cNvSpPr txBox="1"/>
+          <p:nvPr/>
+        </p:nvSpPr>
+        <p:spPr>
+          <a:xfrm>
+            <a:off x="777240" y="2194560"/>
+            <a:ext cx="5257800" cy="228600"/>
+          </a:xfrm>
+          <a:prstGeom prst="rect">
+            <a:avLst/>
+          </a:prstGeom>
+          <a:noFill/>
+        </p:spPr>
+        <p:txBody>
+          <a:bodyPr wrap="square" lIns="0" rIns="0" tIns="0" bIns="0" anchor="t">
+            <a:spAutoFit/>
+          </a:bodyPr>
+          <a:lstStyle/>
+          <a:p>
+            <a:pPr algn="l"/>
+            <a:r>
+              <a:rPr sz="1100" b="1">
+                <a:solidFill>
+                  <a:srgbClr val="1F2937"/>
+                </a:solidFill>
+                <a:latin typeface="Calibri"/>
+              </a:rPr>
+              <a:t>Cooking-smoke deaths (~3.2M/yr global)</a:t>
+            </a:r>
+          </a:p>
+        </p:txBody>
+      </p:sp>
+      <p:sp>
+        <p:nvSpPr>
+          <p:cNvPr id="9" name="TextBox 8"/>
+          <p:cNvSpPr txBox="1"/>
+          <p:nvPr/>
+        </p:nvSpPr>
+        <p:spPr>
+          <a:xfrm>
+            <a:off x="777240" y="2395728"/>
+            <a:ext cx="5257800" cy="228600"/>
+          </a:xfrm>
+          <a:prstGeom prst="rect">
+            <a:avLst/>
+          </a:prstGeom>
+          <a:noFill/>
+        </p:spPr>
+        <p:txBody>
+          <a:bodyPr wrap="square" lIns="0" rIns="0" tIns="0" bIns="0" anchor="t">
+            <a:spAutoFit/>
+          </a:bodyPr>
+          <a:lstStyle/>
+          <a:p>
+            <a:pPr algn="l"/>
+            <a:r>
+              <a:rPr sz="1000" b="0">
+                <a:solidFill>
+                  <a:srgbClr val="4B5563"/>
+                </a:solidFill>
+                <a:latin typeface="Calibri"/>
+              </a:rPr>
+              <a:t>WHO Household Air Pollution Fact Sheet</a:t>
+            </a:r>
+          </a:p>
+        </p:txBody>
+      </p:sp>
+      <p:sp>
+        <p:nvSpPr>
+          <p:cNvPr id="10" name="Oval 9"/>
+          <p:cNvSpPr/>
+          <p:nvPr/>
+        </p:nvSpPr>
+        <p:spPr>
+          <a:xfrm>
+            <a:off x="6400800" y="2286000"/>
+            <a:ext cx="91440" cy="91440"/>
+          </a:xfrm>
+          <a:prstGeom prst="ellipse">
+            <a:avLst/>
+          </a:prstGeom>
+          <a:solidFill>
+            <a:srgbClr val="D97706"/>
+          </a:solidFill>
+          <a:ln>
+            <a:noFill/>
+          </a:ln>
+          <a:effectLst/>
+        </p:spPr>
+        <p:style>
+          <a:lnRef idx="1">
+            <a:schemeClr val="accent1"/>
+          </a:lnRef>
+          <a:fillRef idx="3">
+            <a:schemeClr val="accent1"/>
+          </a:fillRef>
+          <a:effectRef idx="2">
+            <a:schemeClr val="accent1"/>
+          </a:effectRef>
+          <a:fontRef idx="minor">
+            <a:schemeClr val="lt1"/>
+          </a:fontRef>
+        </p:style>
+        <p:txBody>
+          <a:bodyPr rtlCol="0" anchor="ctr"/>
+          <a:lstStyle/>
+          <a:p>
+            <a:pPr algn="ctr"/>
+          </a:p>
+        </p:txBody>
+      </p:sp>
+      <p:sp>
+        <p:nvSpPr>
+          <p:cNvPr id="11" name="TextBox 10"/>
+          <p:cNvSpPr txBox="1"/>
+          <p:nvPr/>
+        </p:nvSpPr>
+        <p:spPr>
+          <a:xfrm>
+            <a:off x="6583680" y="2194560"/>
+            <a:ext cx="5257800" cy="228600"/>
+          </a:xfrm>
+          <a:prstGeom prst="rect">
+            <a:avLst/>
+          </a:prstGeom>
+          <a:noFill/>
+        </p:spPr>
+        <p:txBody>
+          <a:bodyPr wrap="square" lIns="0" rIns="0" tIns="0" bIns="0" anchor="t">
+            <a:spAutoFit/>
+          </a:bodyPr>
+          <a:lstStyle/>
+          <a:p>
+            <a:pPr algn="l"/>
+            <a:r>
+              <a:rPr sz="1100" b="1">
+                <a:solidFill>
+                  <a:srgbClr val="1F2937"/>
+                </a:solidFill>
+                <a:latin typeface="Calibri"/>
+              </a:rPr>
+              <a:t>Sub-Saharan Africa household air pollution deaths (~815k/yr)</a:t>
+            </a:r>
+          </a:p>
+        </p:txBody>
+      </p:sp>
+      <p:sp>
+        <p:nvSpPr>
+          <p:cNvPr id="12" name="TextBox 11"/>
+          <p:cNvSpPr txBox="1"/>
+          <p:nvPr/>
+        </p:nvSpPr>
+        <p:spPr>
+          <a:xfrm>
+            <a:off x="6583680" y="2395728"/>
+            <a:ext cx="5257800" cy="228600"/>
+          </a:xfrm>
+          <a:prstGeom prst="rect">
+            <a:avLst/>
+          </a:prstGeom>
+          <a:noFill/>
+        </p:spPr>
+        <p:txBody>
+          <a:bodyPr wrap="square" lIns="0" rIns="0" tIns="0" bIns="0" anchor="t">
+            <a:spAutoFit/>
+          </a:bodyPr>
+          <a:lstStyle/>
+          <a:p>
+            <a:pPr algn="l"/>
+            <a:r>
+              <a:rPr sz="1000" b="0">
+                <a:solidFill>
+                  <a:srgbClr val="4B5563"/>
+                </a:solidFill>
+                <a:latin typeface="Calibri"/>
+              </a:rPr>
+              <a:t>IEA, Universal Access to Clean Cooking in Africa (2024)</a:t>
+            </a:r>
+          </a:p>
+        </p:txBody>
+      </p:sp>
+      <p:sp>
+        <p:nvSpPr>
+          <p:cNvPr id="13" name="Oval 12"/>
+          <p:cNvSpPr/>
+          <p:nvPr/>
+        </p:nvSpPr>
+        <p:spPr>
+          <a:xfrm>
+            <a:off x="594360" y="2834640"/>
+            <a:ext cx="91440" cy="91440"/>
+          </a:xfrm>
+          <a:prstGeom prst="ellipse">
+            <a:avLst/>
+          </a:prstGeom>
+          <a:solidFill>
+            <a:srgbClr val="D97706"/>
+          </a:solidFill>
+          <a:ln>
+            <a:noFill/>
+          </a:ln>
+          <a:effectLst/>
+        </p:spPr>
+        <p:style>
+          <a:lnRef idx="1">
+            <a:schemeClr val="accent1"/>
+          </a:lnRef>
+          <a:fillRef idx="3">
+            <a:schemeClr val="accent1"/>
+          </a:fillRef>
+          <a:effectRef idx="2">
+            <a:schemeClr val="accent1"/>
+          </a:effectRef>
+          <a:fontRef idx="minor">
+            <a:schemeClr val="lt1"/>
+          </a:fontRef>
+        </p:style>
+        <p:txBody>
+          <a:bodyPr rtlCol="0" anchor="ctr"/>
+          <a:lstStyle/>
+          <a:p>
+            <a:pPr algn="ctr"/>
+          </a:p>
+        </p:txBody>
+      </p:sp>
+      <p:sp>
+        <p:nvSpPr>
+          <p:cNvPr id="14" name="TextBox 13"/>
+          <p:cNvSpPr txBox="1"/>
+          <p:nvPr/>
+        </p:nvSpPr>
+        <p:spPr>
+          <a:xfrm>
+            <a:off x="777240" y="2743200"/>
+            <a:ext cx="5257800" cy="228600"/>
+          </a:xfrm>
+          <a:prstGeom prst="rect">
+            <a:avLst/>
+          </a:prstGeom>
+          <a:noFill/>
+        </p:spPr>
+        <p:txBody>
+          <a:bodyPr wrap="square" lIns="0" rIns="0" tIns="0" bIns="0" anchor="t">
+            <a:spAutoFit/>
+          </a:bodyPr>
+          <a:lstStyle/>
+          <a:p>
+            <a:pPr algn="l"/>
+            <a:r>
+              <a:rPr sz="1100" b="1">
+                <a:solidFill>
+                  <a:srgbClr val="1F2937"/>
+                </a:solidFill>
+                <a:latin typeface="Calibri"/>
+              </a:rPr>
+              <a:t>Outdoor air pollution deaths (~4.2M/yr)</a:t>
+            </a:r>
+          </a:p>
+        </p:txBody>
+      </p:sp>
+      <p:sp>
+        <p:nvSpPr>
+          <p:cNvPr id="15" name="TextBox 14"/>
+          <p:cNvSpPr txBox="1"/>
+          <p:nvPr/>
+        </p:nvSpPr>
+        <p:spPr>
+          <a:xfrm>
+            <a:off x="777240" y="2944368"/>
+            <a:ext cx="5257800" cy="228600"/>
+          </a:xfrm>
+          <a:prstGeom prst="rect">
+            <a:avLst/>
+          </a:prstGeom>
+          <a:noFill/>
+        </p:spPr>
+        <p:txBody>
+          <a:bodyPr wrap="square" lIns="0" rIns="0" tIns="0" bIns="0" anchor="t">
+            <a:spAutoFit/>
+          </a:bodyPr>
+          <a:lstStyle/>
+          <a:p>
+            <a:pPr algn="l"/>
+            <a:r>
+              <a:rPr sz="1000" b="0">
+                <a:solidFill>
+                  <a:srgbClr val="4B5563"/>
+                </a:solidFill>
+                <a:latin typeface="Calibri"/>
+              </a:rPr>
+              <a:t>WHO Ambient Air Pollution</a:t>
+            </a:r>
+          </a:p>
+        </p:txBody>
+      </p:sp>
+      <p:sp>
+        <p:nvSpPr>
+          <p:cNvPr id="16" name="Oval 15"/>
+          <p:cNvSpPr/>
+          <p:nvPr/>
+        </p:nvSpPr>
+        <p:spPr>
+          <a:xfrm>
+            <a:off x="6400800" y="2834640"/>
+            <a:ext cx="91440" cy="91440"/>
+          </a:xfrm>
+          <a:prstGeom prst="ellipse">
+            <a:avLst/>
+          </a:prstGeom>
+          <a:solidFill>
+            <a:srgbClr val="D97706"/>
+          </a:solidFill>
+          <a:ln>
+            <a:noFill/>
+          </a:ln>
+          <a:effectLst/>
+        </p:spPr>
+        <p:style>
+          <a:lnRef idx="1">
+            <a:schemeClr val="accent1"/>
+          </a:lnRef>
+          <a:fillRef idx="3">
+            <a:schemeClr val="accent1"/>
+          </a:fillRef>
+          <a:effectRef idx="2">
+            <a:schemeClr val="accent1"/>
+          </a:effectRef>
+          <a:fontRef idx="minor">
+            <a:schemeClr val="lt1"/>
+          </a:fontRef>
+        </p:style>
+        <p:txBody>
+          <a:bodyPr rtlCol="0" anchor="ctr"/>
+          <a:lstStyle/>
+          <a:p>
+            <a:pPr algn="ctr"/>
+          </a:p>
+        </p:txBody>
+      </p:sp>
+      <p:sp>
+        <p:nvSpPr>
+          <p:cNvPr id="17" name="TextBox 16"/>
+          <p:cNvSpPr txBox="1"/>
+          <p:nvPr/>
+        </p:nvSpPr>
+        <p:spPr>
+          <a:xfrm>
+            <a:off x="6583680" y="2743200"/>
+            <a:ext cx="5257800" cy="228600"/>
+          </a:xfrm>
+          <a:prstGeom prst="rect">
+            <a:avLst/>
+          </a:prstGeom>
+          <a:noFill/>
+        </p:spPr>
+        <p:txBody>
+          <a:bodyPr wrap="square" lIns="0" rIns="0" tIns="0" bIns="0" anchor="t">
+            <a:spAutoFit/>
+          </a:bodyPr>
+          <a:lstStyle/>
+          <a:p>
+            <a:pPr algn="l"/>
+            <a:r>
+              <a:rPr sz="1100" b="1">
+                <a:solidFill>
+                  <a:srgbClr val="1F2937"/>
+                </a:solidFill>
+                <a:latin typeface="Calibri"/>
+              </a:rPr>
+              <a:t>Africa electricity access (~600M without; ~730M globally)</a:t>
+            </a:r>
+          </a:p>
+        </p:txBody>
+      </p:sp>
+      <p:sp>
+        <p:nvSpPr>
+          <p:cNvPr id="18" name="TextBox 17"/>
+          <p:cNvSpPr txBox="1"/>
+          <p:nvPr/>
+        </p:nvSpPr>
+        <p:spPr>
+          <a:xfrm>
+            <a:off x="6583680" y="2944368"/>
+            <a:ext cx="5257800" cy="228600"/>
+          </a:xfrm>
+          <a:prstGeom prst="rect">
+            <a:avLst/>
+          </a:prstGeom>
+          <a:noFill/>
+        </p:spPr>
+        <p:txBody>
+          <a:bodyPr wrap="square" lIns="0" rIns="0" tIns="0" bIns="0" anchor="t">
+            <a:spAutoFit/>
+          </a:bodyPr>
+          <a:lstStyle/>
+          <a:p>
+            <a:pPr algn="l"/>
+            <a:r>
+              <a:rPr sz="1000" b="0">
+                <a:solidFill>
+                  <a:srgbClr val="4B5563"/>
+                </a:solidFill>
+                <a:latin typeface="Calibri"/>
+              </a:rPr>
+              <a:t>IEA, Financing Electricity Access in Africa (2025)</a:t>
+            </a:r>
+          </a:p>
+        </p:txBody>
+      </p:sp>
+      <p:sp>
+        <p:nvSpPr>
+          <p:cNvPr id="19" name="Oval 18"/>
+          <p:cNvSpPr/>
+          <p:nvPr/>
+        </p:nvSpPr>
+        <p:spPr>
+          <a:xfrm>
+            <a:off x="594360" y="3383280"/>
+            <a:ext cx="91440" cy="91440"/>
+          </a:xfrm>
+          <a:prstGeom prst="ellipse">
+            <a:avLst/>
+          </a:prstGeom>
+          <a:solidFill>
+            <a:srgbClr val="D97706"/>
+          </a:solidFill>
+          <a:ln>
+            <a:noFill/>
+          </a:ln>
+          <a:effectLst/>
+        </p:spPr>
+        <p:style>
+          <a:lnRef idx="1">
+            <a:schemeClr val="accent1"/>
+          </a:lnRef>
+          <a:fillRef idx="3">
+            <a:schemeClr val="accent1"/>
+          </a:fillRef>
+          <a:effectRef idx="2">
+            <a:schemeClr val="accent1"/>
+          </a:effectRef>
+          <a:fontRef idx="minor">
+            <a:schemeClr val="lt1"/>
+          </a:fontRef>
+        </p:style>
+        <p:txBody>
+          <a:bodyPr rtlCol="0" anchor="ctr"/>
+          <a:lstStyle/>
+          <a:p>
+            <a:pPr algn="ctr"/>
+          </a:p>
+        </p:txBody>
+      </p:sp>
+      <p:sp>
+        <p:nvSpPr>
+          <p:cNvPr id="20" name="TextBox 19"/>
+          <p:cNvSpPr txBox="1"/>
+          <p:nvPr/>
+        </p:nvSpPr>
+        <p:spPr>
+          <a:xfrm>
+            <a:off x="777240" y="3291840"/>
+            <a:ext cx="5257800" cy="228600"/>
+          </a:xfrm>
+          <a:prstGeom prst="rect">
+            <a:avLst/>
+          </a:prstGeom>
+          <a:noFill/>
+        </p:spPr>
+        <p:txBody>
+          <a:bodyPr wrap="square" lIns="0" rIns="0" tIns="0" bIns="0" anchor="t">
+            <a:spAutoFit/>
+          </a:bodyPr>
+          <a:lstStyle/>
+          <a:p>
+            <a:pPr algn="l"/>
+            <a:r>
+              <a:rPr sz="1100" b="1">
+                <a:solidFill>
+                  <a:srgbClr val="1F2937"/>
+                </a:solidFill>
+                <a:latin typeface="Calibri"/>
+              </a:rPr>
+              <a:t>Africa cumulative CO₂ emissions (&lt;3%; sub-Saharan ~0.55%)</a:t>
+            </a:r>
+          </a:p>
+        </p:txBody>
+      </p:sp>
+      <p:sp>
+        <p:nvSpPr>
+          <p:cNvPr id="21" name="TextBox 20"/>
+          <p:cNvSpPr txBox="1"/>
+          <p:nvPr/>
+        </p:nvSpPr>
+        <p:spPr>
+          <a:xfrm>
+            <a:off x="777240" y="3493008"/>
+            <a:ext cx="5257800" cy="228600"/>
+          </a:xfrm>
+          <a:prstGeom prst="rect">
+            <a:avLst/>
+          </a:prstGeom>
+          <a:noFill/>
+        </p:spPr>
+        <p:txBody>
+          <a:bodyPr wrap="square" lIns="0" rIns="0" tIns="0" bIns="0" anchor="t">
+            <a:spAutoFit/>
+          </a:bodyPr>
+          <a:lstStyle/>
+          <a:p>
+            <a:pPr algn="l"/>
+            <a:r>
+              <a:rPr sz="1000" b="0">
+                <a:solidFill>
+                  <a:srgbClr val="4B5563"/>
+                </a:solidFill>
+                <a:latin typeface="Calibri"/>
+              </a:rPr>
+              <a:t>Energy for Growth Hub (citing Our World in Data)</a:t>
+            </a:r>
+          </a:p>
+        </p:txBody>
+      </p:sp>
+      <p:sp>
+        <p:nvSpPr>
+          <p:cNvPr id="22" name="Oval 21"/>
+          <p:cNvSpPr/>
+          <p:nvPr/>
+        </p:nvSpPr>
+        <p:spPr>
+          <a:xfrm>
+            <a:off x="6400800" y="3383280"/>
+            <a:ext cx="91440" cy="91440"/>
+          </a:xfrm>
+          <a:prstGeom prst="ellipse">
+            <a:avLst/>
+          </a:prstGeom>
+          <a:solidFill>
+            <a:srgbClr val="D97706"/>
+          </a:solidFill>
+          <a:ln>
+            <a:noFill/>
+          </a:ln>
+          <a:effectLst/>
+        </p:spPr>
+        <p:style>
+          <a:lnRef idx="1">
+            <a:schemeClr val="accent1"/>
+          </a:lnRef>
+          <a:fillRef idx="3">
+            <a:schemeClr val="accent1"/>
+          </a:fillRef>
+          <a:effectRef idx="2">
+            <a:schemeClr val="accent1"/>
+          </a:effectRef>
+          <a:fontRef idx="minor">
+            <a:schemeClr val="lt1"/>
+          </a:fontRef>
+        </p:style>
+        <p:txBody>
+          <a:bodyPr rtlCol="0" anchor="ctr"/>
+          <a:lstStyle/>
+          <a:p>
+            <a:pPr algn="ctr"/>
+          </a:p>
+        </p:txBody>
+      </p:sp>
+      <p:sp>
+        <p:nvSpPr>
+          <p:cNvPr id="23" name="TextBox 22"/>
+          <p:cNvSpPr txBox="1"/>
+          <p:nvPr/>
+        </p:nvSpPr>
+        <p:spPr>
+          <a:xfrm>
+            <a:off x="6583680" y="3291840"/>
+            <a:ext cx="5257800" cy="228600"/>
+          </a:xfrm>
+          <a:prstGeom prst="rect">
+            <a:avLst/>
+          </a:prstGeom>
+          <a:noFill/>
+        </p:spPr>
+        <p:txBody>
+          <a:bodyPr wrap="square" lIns="0" rIns="0" tIns="0" bIns="0" anchor="t">
+            <a:spAutoFit/>
+          </a:bodyPr>
+          <a:lstStyle/>
+          <a:p>
+            <a:pPr algn="l"/>
+            <a:r>
+              <a:rPr sz="1100" b="1">
+                <a:solidFill>
+                  <a:srgbClr val="1F2937"/>
+                </a:solidFill>
+                <a:latin typeface="Calibri"/>
+              </a:rPr>
+              <a:t>Africa population share (~17% global)</a:t>
+            </a:r>
+          </a:p>
+        </p:txBody>
+      </p:sp>
+      <p:sp>
+        <p:nvSpPr>
+          <p:cNvPr id="24" name="TextBox 23"/>
+          <p:cNvSpPr txBox="1"/>
+          <p:nvPr/>
+        </p:nvSpPr>
+        <p:spPr>
+          <a:xfrm>
+            <a:off x="6583680" y="3493008"/>
+            <a:ext cx="5257800" cy="228600"/>
+          </a:xfrm>
+          <a:prstGeom prst="rect">
+            <a:avLst/>
+          </a:prstGeom>
+          <a:noFill/>
+        </p:spPr>
+        <p:txBody>
+          <a:bodyPr wrap="square" lIns="0" rIns="0" tIns="0" bIns="0" anchor="t">
+            <a:spAutoFit/>
+          </a:bodyPr>
+          <a:lstStyle/>
+          <a:p>
+            <a:pPr algn="l"/>
+            <a:r>
+              <a:rPr sz="1000" b="0">
+                <a:solidFill>
+                  <a:srgbClr val="4B5563"/>
+                </a:solidFill>
+                <a:latin typeface="Calibri"/>
+              </a:rPr>
+              <a:t>UN World Population Prospects</a:t>
+            </a:r>
+          </a:p>
+        </p:txBody>
+      </p:sp>
+      <p:sp>
+        <p:nvSpPr>
+          <p:cNvPr id="25" name="Oval 24"/>
+          <p:cNvSpPr/>
+          <p:nvPr/>
+        </p:nvSpPr>
+        <p:spPr>
+          <a:xfrm>
+            <a:off x="594360" y="3931920"/>
+            <a:ext cx="91440" cy="91440"/>
+          </a:xfrm>
+          <a:prstGeom prst="ellipse">
+            <a:avLst/>
+          </a:prstGeom>
+          <a:solidFill>
+            <a:srgbClr val="D97706"/>
+          </a:solidFill>
+          <a:ln>
+            <a:noFill/>
+          </a:ln>
+          <a:effectLst/>
+        </p:spPr>
+        <p:style>
+          <a:lnRef idx="1">
+            <a:schemeClr val="accent1"/>
+          </a:lnRef>
+          <a:fillRef idx="3">
+            <a:schemeClr val="accent1"/>
+          </a:fillRef>
+          <a:effectRef idx="2">
+            <a:schemeClr val="accent1"/>
+          </a:effectRef>
+          <a:fontRef idx="minor">
+            <a:schemeClr val="lt1"/>
+          </a:fontRef>
+        </p:style>
+        <p:txBody>
+          <a:bodyPr rtlCol="0" anchor="ctr"/>
+          <a:lstStyle/>
+          <a:p>
+            <a:pPr algn="ctr"/>
+          </a:p>
+        </p:txBody>
+      </p:sp>
+      <p:sp>
+        <p:nvSpPr>
+          <p:cNvPr id="26" name="TextBox 25"/>
+          <p:cNvSpPr txBox="1"/>
+          <p:nvPr/>
+        </p:nvSpPr>
+        <p:spPr>
+          <a:xfrm>
+            <a:off x="777240" y="3840480"/>
+            <a:ext cx="5257800" cy="228600"/>
+          </a:xfrm>
+          <a:prstGeom prst="rect">
+            <a:avLst/>
+          </a:prstGeom>
+          <a:noFill/>
+        </p:spPr>
+        <p:txBody>
+          <a:bodyPr wrap="square" lIns="0" rIns="0" tIns="0" bIns="0" anchor="t">
+            <a:spAutoFit/>
+          </a:bodyPr>
+          <a:lstStyle/>
+          <a:p>
+            <a:pPr algn="l"/>
+            <a:r>
+              <a:rPr sz="1100" b="1">
+                <a:solidFill>
+                  <a:srgbClr val="1F2937"/>
+                </a:solidFill>
+                <a:latin typeface="Calibri"/>
+              </a:rPr>
+              <a:t>Zambia capacity mix (85% hydropower; ~3,986 MW)</a:t>
+            </a:r>
+          </a:p>
+        </p:txBody>
+      </p:sp>
+      <p:sp>
+        <p:nvSpPr>
+          <p:cNvPr id="27" name="TextBox 26"/>
+          <p:cNvSpPr txBox="1"/>
+          <p:nvPr/>
+        </p:nvSpPr>
+        <p:spPr>
+          <a:xfrm>
+            <a:off x="777240" y="4041648"/>
+            <a:ext cx="5257800" cy="228600"/>
+          </a:xfrm>
+          <a:prstGeom prst="rect">
+            <a:avLst/>
+          </a:prstGeom>
+          <a:noFill/>
+        </p:spPr>
+        <p:txBody>
+          <a:bodyPr wrap="square" lIns="0" rIns="0" tIns="0" bIns="0" anchor="t">
+            <a:spAutoFit/>
+          </a:bodyPr>
+          <a:lstStyle/>
+          <a:p>
+            <a:pPr algn="l"/>
+            <a:r>
+              <a:rPr sz="1000" b="0">
+                <a:solidFill>
+                  <a:srgbClr val="4B5563"/>
+                </a:solidFill>
+                <a:latin typeface="Calibri"/>
+              </a:rPr>
+              <a:t>Global Legal Insights, Energy Laws and Regulations 2025: Zambia</a:t>
+            </a:r>
+          </a:p>
+        </p:txBody>
+      </p:sp>
+      <p:sp>
+        <p:nvSpPr>
+          <p:cNvPr id="28" name="Oval 27"/>
+          <p:cNvSpPr/>
+          <p:nvPr/>
+        </p:nvSpPr>
+        <p:spPr>
+          <a:xfrm>
+            <a:off x="6400800" y="3931920"/>
+            <a:ext cx="91440" cy="91440"/>
+          </a:xfrm>
+          <a:prstGeom prst="ellipse">
+            <a:avLst/>
+          </a:prstGeom>
+          <a:solidFill>
+            <a:srgbClr val="D97706"/>
+          </a:solidFill>
+          <a:ln>
+            <a:noFill/>
+          </a:ln>
+          <a:effectLst/>
+        </p:spPr>
+        <p:style>
+          <a:lnRef idx="1">
+            <a:schemeClr val="accent1"/>
+          </a:lnRef>
+          <a:fillRef idx="3">
+            <a:schemeClr val="accent1"/>
+          </a:fillRef>
+          <a:effectRef idx="2">
+            <a:schemeClr val="accent1"/>
+          </a:effectRef>
+          <a:fontRef idx="minor">
+            <a:schemeClr val="lt1"/>
+          </a:fontRef>
+        </p:style>
+        <p:txBody>
+          <a:bodyPr rtlCol="0" anchor="ctr"/>
+          <a:lstStyle/>
+          <a:p>
+            <a:pPr algn="ctr"/>
+          </a:p>
+        </p:txBody>
+      </p:sp>
+      <p:sp>
+        <p:nvSpPr>
+          <p:cNvPr id="29" name="TextBox 28"/>
+          <p:cNvSpPr txBox="1"/>
+          <p:nvPr/>
+        </p:nvSpPr>
+        <p:spPr>
+          <a:xfrm>
+            <a:off x="6583680" y="3840480"/>
+            <a:ext cx="5257800" cy="228600"/>
+          </a:xfrm>
+          <a:prstGeom prst="rect">
+            <a:avLst/>
+          </a:prstGeom>
+          <a:noFill/>
+        </p:spPr>
+        <p:txBody>
+          <a:bodyPr wrap="square" lIns="0" rIns="0" tIns="0" bIns="0" anchor="t">
+            <a:spAutoFit/>
+          </a:bodyPr>
+          <a:lstStyle/>
+          <a:p>
+            <a:pPr algn="l"/>
+            <a:r>
+              <a:rPr sz="1100" b="1">
+                <a:solidFill>
+                  <a:srgbClr val="1F2937"/>
+                </a:solidFill>
+                <a:latin typeface="Calibri"/>
+              </a:rPr>
+              <a:t>Zambia 2024 load shedding (up to 21 hrs/day)</a:t>
+            </a:r>
+          </a:p>
+        </p:txBody>
+      </p:sp>
+      <p:sp>
+        <p:nvSpPr>
+          <p:cNvPr id="30" name="TextBox 29"/>
+          <p:cNvSpPr txBox="1"/>
+          <p:nvPr/>
+        </p:nvSpPr>
+        <p:spPr>
+          <a:xfrm>
+            <a:off x="6583680" y="4041648"/>
+            <a:ext cx="5257800" cy="228600"/>
+          </a:xfrm>
+          <a:prstGeom prst="rect">
+            <a:avLst/>
+          </a:prstGeom>
+          <a:noFill/>
+        </p:spPr>
+        <p:txBody>
+          <a:bodyPr wrap="square" lIns="0" rIns="0" tIns="0" bIns="0" anchor="t">
+            <a:spAutoFit/>
+          </a:bodyPr>
+          <a:lstStyle/>
+          <a:p>
+            <a:pPr algn="l"/>
+            <a:r>
+              <a:rPr sz="1000" b="0">
+                <a:solidFill>
+                  <a:srgbClr val="4B5563"/>
+                </a:solidFill>
+                <a:latin typeface="Calibri"/>
+              </a:rPr>
+              <a:t>Pulitzer Center; Afrobarometer AD1178 (2025)</a:t>
+            </a:r>
+          </a:p>
+        </p:txBody>
+      </p:sp>
+      <p:sp>
+        <p:nvSpPr>
+          <p:cNvPr id="31" name="Oval 30"/>
+          <p:cNvSpPr/>
+          <p:nvPr/>
+        </p:nvSpPr>
+        <p:spPr>
+          <a:xfrm>
+            <a:off x="594360" y="4480560"/>
+            <a:ext cx="91440" cy="91440"/>
+          </a:xfrm>
+          <a:prstGeom prst="ellipse">
+            <a:avLst/>
+          </a:prstGeom>
+          <a:solidFill>
+            <a:srgbClr val="D97706"/>
+          </a:solidFill>
+          <a:ln>
+            <a:noFill/>
+          </a:ln>
+          <a:effectLst/>
+        </p:spPr>
+        <p:style>
+          <a:lnRef idx="1">
+            <a:schemeClr val="accent1"/>
+          </a:lnRef>
+          <a:fillRef idx="3">
+            <a:schemeClr val="accent1"/>
+          </a:fillRef>
+          <a:effectRef idx="2">
+            <a:schemeClr val="accent1"/>
+          </a:effectRef>
+          <a:fontRef idx="minor">
+            <a:schemeClr val="lt1"/>
+          </a:fontRef>
+        </p:style>
+        <p:txBody>
+          <a:bodyPr rtlCol="0" anchor="ctr"/>
+          <a:lstStyle/>
+          <a:p>
+            <a:pPr algn="ctr"/>
+          </a:p>
+        </p:txBody>
+      </p:sp>
+      <p:sp>
+        <p:nvSpPr>
+          <p:cNvPr id="32" name="TextBox 31"/>
+          <p:cNvSpPr txBox="1"/>
+          <p:nvPr/>
+        </p:nvSpPr>
+        <p:spPr>
+          <a:xfrm>
+            <a:off x="777240" y="4389120"/>
+            <a:ext cx="5257800" cy="228600"/>
+          </a:xfrm>
+          <a:prstGeom prst="rect">
+            <a:avLst/>
+          </a:prstGeom>
+          <a:noFill/>
+        </p:spPr>
+        <p:txBody>
+          <a:bodyPr wrap="square" lIns="0" rIns="0" tIns="0" bIns="0" anchor="t">
+            <a:spAutoFit/>
+          </a:bodyPr>
+          <a:lstStyle/>
+          <a:p>
+            <a:pPr algn="l"/>
+            <a:r>
+              <a:rPr sz="1100" b="1">
+                <a:solidFill>
+                  <a:srgbClr val="1F2937"/>
+                </a:solidFill>
+                <a:latin typeface="Calibri"/>
+              </a:rPr>
+              <a:t>Natural gas vs coal CO₂ (50–60% less); Africa gas reserves (~13%)</a:t>
+            </a:r>
+          </a:p>
+        </p:txBody>
+      </p:sp>
+      <p:sp>
+        <p:nvSpPr>
+          <p:cNvPr id="33" name="TextBox 32"/>
+          <p:cNvSpPr txBox="1"/>
+          <p:nvPr/>
+        </p:nvSpPr>
+        <p:spPr>
+          <a:xfrm>
+            <a:off x="777240" y="4590288"/>
+            <a:ext cx="5257800" cy="228600"/>
+          </a:xfrm>
+          <a:prstGeom prst="rect">
+            <a:avLst/>
+          </a:prstGeom>
+          <a:noFill/>
+        </p:spPr>
+        <p:txBody>
+          <a:bodyPr wrap="square" lIns="0" rIns="0" tIns="0" bIns="0" anchor="t">
+            <a:spAutoFit/>
+          </a:bodyPr>
+          <a:lstStyle/>
+          <a:p>
+            <a:pPr algn="l"/>
+            <a:r>
+              <a:rPr sz="1000" b="0">
+                <a:solidFill>
+                  <a:srgbClr val="4B5563"/>
+                </a:solidFill>
+                <a:latin typeface="Calibri"/>
+              </a:rPr>
+              <a:t>Atlantic Council, Natural gas in Africa's energy transition</a:t>
+            </a:r>
+          </a:p>
+        </p:txBody>
+      </p:sp>
+      <p:sp>
+        <p:nvSpPr>
+          <p:cNvPr id="34" name="Oval 33"/>
+          <p:cNvSpPr/>
+          <p:nvPr/>
+        </p:nvSpPr>
+        <p:spPr>
+          <a:xfrm>
+            <a:off x="6400800" y="4480560"/>
+            <a:ext cx="91440" cy="91440"/>
+          </a:xfrm>
+          <a:prstGeom prst="ellipse">
+            <a:avLst/>
+          </a:prstGeom>
+          <a:solidFill>
+            <a:srgbClr val="D97706"/>
+          </a:solidFill>
+          <a:ln>
+            <a:noFill/>
+          </a:ln>
+          <a:effectLst/>
+        </p:spPr>
+        <p:style>
+          <a:lnRef idx="1">
+            <a:schemeClr val="accent1"/>
+          </a:lnRef>
+          <a:fillRef idx="3">
+            <a:schemeClr val="accent1"/>
+          </a:fillRef>
+          <a:effectRef idx="2">
+            <a:schemeClr val="accent1"/>
+          </a:effectRef>
+          <a:fontRef idx="minor">
+            <a:schemeClr val="lt1"/>
+          </a:fontRef>
+        </p:style>
+        <p:txBody>
+          <a:bodyPr rtlCol="0" anchor="ctr"/>
+          <a:lstStyle/>
+          <a:p>
+            <a:pPr algn="ctr"/>
+          </a:p>
+        </p:txBody>
+      </p:sp>
+      <p:sp>
+        <p:nvSpPr>
+          <p:cNvPr id="35" name="TextBox 34"/>
+          <p:cNvSpPr txBox="1"/>
+          <p:nvPr/>
+        </p:nvSpPr>
+        <p:spPr>
+          <a:xfrm>
+            <a:off x="6583680" y="4389120"/>
+            <a:ext cx="5257800" cy="228600"/>
+          </a:xfrm>
+          <a:prstGeom prst="rect">
+            <a:avLst/>
+          </a:prstGeom>
+          <a:noFill/>
+        </p:spPr>
+        <p:txBody>
+          <a:bodyPr wrap="square" lIns="0" rIns="0" tIns="0" bIns="0" anchor="t">
+            <a:spAutoFit/>
+          </a:bodyPr>
+          <a:lstStyle/>
+          <a:p>
+            <a:pPr algn="l"/>
+            <a:r>
+              <a:rPr sz="1100" b="1">
+                <a:solidFill>
+                  <a:srgbClr val="1F2937"/>
+                </a:solidFill>
+                <a:latin typeface="Calibri"/>
+              </a:rPr>
+              <a:t>Steel &amp; cement embodied emissions in renewables</a:t>
+            </a:r>
+          </a:p>
+        </p:txBody>
+      </p:sp>
+      <p:sp>
+        <p:nvSpPr>
+          <p:cNvPr id="36" name="TextBox 35"/>
+          <p:cNvSpPr txBox="1"/>
+          <p:nvPr/>
+        </p:nvSpPr>
+        <p:spPr>
+          <a:xfrm>
+            <a:off x="6583680" y="4590288"/>
+            <a:ext cx="5257800" cy="228600"/>
+          </a:xfrm>
+          <a:prstGeom prst="rect">
+            <a:avLst/>
+          </a:prstGeom>
+          <a:noFill/>
+        </p:spPr>
+        <p:txBody>
+          <a:bodyPr wrap="square" lIns="0" rIns="0" tIns="0" bIns="0" anchor="t">
+            <a:spAutoFit/>
+          </a:bodyPr>
+          <a:lstStyle/>
+          <a:p>
+            <a:pPr algn="l"/>
+            <a:r>
+              <a:rPr sz="1000" b="0">
+                <a:solidFill>
+                  <a:srgbClr val="4B5563"/>
+                </a:solidFill>
+                <a:latin typeface="Calibri"/>
+              </a:rPr>
+              <a:t>MIT Climate Portal</a:t>
+            </a:r>
+          </a:p>
+        </p:txBody>
+      </p:sp>
+      <p:sp>
+        <p:nvSpPr>
+          <p:cNvPr id="37" name="Oval 36"/>
+          <p:cNvSpPr/>
+          <p:nvPr/>
+        </p:nvSpPr>
+        <p:spPr>
+          <a:xfrm>
+            <a:off x="594360" y="5029200"/>
+            <a:ext cx="91440" cy="91440"/>
+          </a:xfrm>
+          <a:prstGeom prst="ellipse">
+            <a:avLst/>
+          </a:prstGeom>
+          <a:solidFill>
+            <a:srgbClr val="D97706"/>
+          </a:solidFill>
+          <a:ln>
+            <a:noFill/>
+          </a:ln>
+          <a:effectLst/>
+        </p:spPr>
+        <p:style>
+          <a:lnRef idx="1">
+            <a:schemeClr val="accent1"/>
+          </a:lnRef>
+          <a:fillRef idx="3">
+            <a:schemeClr val="accent1"/>
+          </a:fillRef>
+          <a:effectRef idx="2">
+            <a:schemeClr val="accent1"/>
+          </a:effectRef>
+          <a:fontRef idx="minor">
+            <a:schemeClr val="lt1"/>
+          </a:fontRef>
+        </p:style>
+        <p:txBody>
+          <a:bodyPr rtlCol="0" anchor="ctr"/>
+          <a:lstStyle/>
+          <a:p>
+            <a:pPr algn="ctr"/>
+          </a:p>
+        </p:txBody>
+      </p:sp>
+      <p:sp>
+        <p:nvSpPr>
+          <p:cNvPr id="38" name="TextBox 37"/>
+          <p:cNvSpPr txBox="1"/>
+          <p:nvPr/>
+        </p:nvSpPr>
+        <p:spPr>
+          <a:xfrm>
+            <a:off x="777240" y="4937760"/>
+            <a:ext cx="5257800" cy="228600"/>
+          </a:xfrm>
+          <a:prstGeom prst="rect">
+            <a:avLst/>
+          </a:prstGeom>
+          <a:noFill/>
+        </p:spPr>
+        <p:txBody>
+          <a:bodyPr wrap="square" lIns="0" rIns="0" tIns="0" bIns="0" anchor="t">
+            <a:spAutoFit/>
+          </a:bodyPr>
+          <a:lstStyle/>
+          <a:p>
+            <a:pPr algn="l"/>
+            <a:r>
+              <a:rPr sz="1100" b="1">
+                <a:solidFill>
+                  <a:srgbClr val="1F2937"/>
+                </a:solidFill>
+                <a:latin typeface="Calibri"/>
+              </a:rPr>
+              <a:t>Life expectancy vs electricity per capita (illustrative)</a:t>
+            </a:r>
+          </a:p>
+        </p:txBody>
+      </p:sp>
+      <p:sp>
+        <p:nvSpPr>
+          <p:cNvPr id="39" name="TextBox 38"/>
+          <p:cNvSpPr txBox="1"/>
+          <p:nvPr/>
+        </p:nvSpPr>
+        <p:spPr>
+          <a:xfrm>
+            <a:off x="777240" y="5138928"/>
+            <a:ext cx="5257800" cy="228600"/>
+          </a:xfrm>
+          <a:prstGeom prst="rect">
+            <a:avLst/>
+          </a:prstGeom>
+          <a:noFill/>
+        </p:spPr>
+        <p:txBody>
+          <a:bodyPr wrap="square" lIns="0" rIns="0" tIns="0" bIns="0" anchor="t">
+            <a:spAutoFit/>
+          </a:bodyPr>
+          <a:lstStyle/>
+          <a:p>
+            <a:pPr algn="l"/>
+            <a:r>
+              <a:rPr sz="1000" b="0">
+                <a:solidFill>
+                  <a:srgbClr val="4B5563"/>
+                </a:solidFill>
+                <a:latin typeface="Calibri"/>
+              </a:rPr>
+              <a:t>World Bank Indicators (kWh/capita; life expectancy at birth)</a:t>
+            </a:r>
+          </a:p>
+        </p:txBody>
+      </p:sp>
+      <p:sp>
+        <p:nvSpPr>
+          <p:cNvPr id="40" name="TextBox 39"/>
+          <p:cNvSpPr txBox="1"/>
+          <p:nvPr/>
+        </p:nvSpPr>
+        <p:spPr>
+          <a:xfrm>
+            <a:off x="457200" y="6537960"/>
+            <a:ext cx="7315200" cy="274320"/>
+          </a:xfrm>
+          <a:prstGeom prst="rect">
+            <a:avLst/>
+          </a:prstGeom>
+          <a:noFill/>
+        </p:spPr>
+        <p:txBody>
+          <a:bodyPr wrap="square" lIns="0" rIns="0" tIns="0" bIns="0" anchor="t">
+            <a:spAutoFit/>
+          </a:bodyPr>
+          <a:lstStyle/>
+          <a:p>
+            <a:pPr algn="l"/>
+            <a:r>
+              <a:rPr sz="900" b="0">
+                <a:solidFill>
+                  <a:srgbClr val="9CA3AF"/>
+                </a:solidFill>
+                <a:latin typeface="Calibri"/>
+              </a:rPr>
+              <a:t>Choolwe  •  The Case For Fossil Fuels</a:t>
+            </a:r>
+          </a:p>
+        </p:txBody>
+      </p:sp>
+      <p:sp>
+        <p:nvSpPr>
+          <p:cNvPr id="41" name="TextBox 40"/>
+          <p:cNvSpPr txBox="1"/>
+          <p:nvPr/>
+        </p:nvSpPr>
+        <p:spPr>
+          <a:xfrm>
+            <a:off x="10789920" y="6537960"/>
+            <a:ext cx="1097280" cy="274320"/>
+          </a:xfrm>
+          <a:prstGeom prst="rect">
+            <a:avLst/>
+          </a:prstGeom>
+          <a:noFill/>
+        </p:spPr>
+        <p:txBody>
+          <a:bodyPr wrap="square" lIns="0" rIns="0" tIns="0" bIns="0" anchor="t">
+            <a:spAutoFit/>
+          </a:bodyPr>
+          <a:lstStyle/>
+          <a:p>
+            <a:pPr algn="r"/>
+            <a:r>
+              <a:rPr sz="900" b="0">
+                <a:solidFill>
+                  <a:srgbClr val="9CA3AF"/>
+                </a:solidFill>
+                <a:latin typeface="Calibri"/>
+              </a:rPr>
+              <a:t>9 / 9</a:t>
             </a:r>
           </a:p>
         </p:txBody>

--- a/deliverable/case-for-fossil-fuels.pptx
+++ b/deliverable/case-for-fossil-fuels.pptx
@@ -4,18 +4,21 @@
   <p:sldMasterIdLst>
     <p:sldMasterId id="2147483648" r:id="rId1"/>
   </p:sldMasterIdLst>
+  <p:notesMasterIdLst>
+    <p:notesMasterId r:id="rId11"/>
+  </p:notesMasterIdLst>
   <p:sldIdLst>
-    <p:sldId id="256" r:id="rId7"/>
-    <p:sldId id="257" r:id="rId9"/>
-    <p:sldId id="258" r:id="rId10"/>
-    <p:sldId id="259" r:id="rId11"/>
-    <p:sldId id="260" r:id="rId12"/>
-    <p:sldId id="261" r:id="rId13"/>
-    <p:sldId id="262" r:id="rId14"/>
-    <p:sldId id="263" r:id="rId15"/>
-    <p:sldId id="264" r:id="rId16"/>
+    <p:sldId id="256" r:id="rId2"/>
+    <p:sldId id="257" r:id="rId3"/>
+    <p:sldId id="258" r:id="rId4"/>
+    <p:sldId id="259" r:id="rId5"/>
+    <p:sldId id="260" r:id="rId6"/>
+    <p:sldId id="261" r:id="rId7"/>
+    <p:sldId id="262" r:id="rId8"/>
+    <p:sldId id="263" r:id="rId9"/>
+    <p:sldId id="264" r:id="rId10"/>
   </p:sldIdLst>
-  <p:sldSz cx="12191695" cy="6858000" type="screen4x3"/>
+  <p:sldSz cx="12192000" cy="6858000"/>
   <p:notesSz cx="6858000" cy="9144000"/>
   <p:defaultTextStyle>
     <a:defPPr>
@@ -112,11 +115,27 @@
       </a:defRPr>
     </a:lvl9pPr>
   </p:defaultTextStyle>
+  <p:extLst>
+    <p:ext uri="{EFAFB233-063F-42B5-8137-9DF3F51BA10A}">
+      <p15:sldGuideLst xmlns:p15="http://schemas.microsoft.com/office/powerpoint/2012/main">
+        <p15:guide id="1" orient="horz" pos="2160">
+          <p15:clr>
+            <a:srgbClr val="A4A3A4"/>
+          </p15:clr>
+        </p15:guide>
+        <p15:guide id="2" pos="2880">
+          <p15:clr>
+            <a:srgbClr val="A4A3A4"/>
+          </p15:clr>
+        </p15:guide>
+      </p15:sldGuideLst>
+    </p:ext>
+  </p:extLst>
 </p:presentation>
 </file>
 
 <file path=ppt/notesMasters/notesMaster1.xml><?xml version="1.0" encoding="utf-8"?>
-<p:notesMaster xmlns:a="http://schemas.openxmlformats.org/drawingml/2006/main" xmlns:p="http://schemas.openxmlformats.org/presentationml/2006/main" xmlns:r="http://schemas.openxmlformats.org/officeDocument/2006/relationships">
+<p:notesMaster xmlns:a="http://schemas.openxmlformats.org/drawingml/2006/main" xmlns:r="http://schemas.openxmlformats.org/officeDocument/2006/relationships" xmlns:p="http://schemas.openxmlformats.org/presentationml/2006/main">
   <p:cSld>
     <p:bg>
       <p:bgRef idx="1001">
@@ -137,241 +156,16 @@
           <a:chExt cx="0" cy="0"/>
         </a:xfrm>
       </p:grpSpPr>
-      <p:sp>
-        <p:nvSpPr>
-          <p:cNvPr id="2" name="Header Placeholder 1"/>
-          <p:cNvSpPr>
-            <a:spLocks noGrp="1"/>
-          </p:cNvSpPr>
-          <p:nvPr>
-            <p:ph type="hdr" sz="quarter"/>
-          </p:nvPr>
-        </p:nvSpPr>
-        <p:spPr>
-          <a:xfrm>
-            <a:off x="0" y="0"/>
-            <a:ext cx="2971800" cy="457200"/>
-          </a:xfrm>
-          <a:prstGeom prst="rect">
-            <a:avLst/>
-          </a:prstGeom>
-        </p:spPr>
-        <p:txBody>
-          <a:bodyPr vert="horz" lIns="91440" tIns="45720" rIns="91440" bIns="45720" rtlCol="0"/>
-          <a:lstStyle>
-            <a:lvl1pPr algn="l">
-              <a:defRPr sz="1200"/>
-            </a:lvl1pPr>
-          </a:lstStyle>
-          <a:p>
-            <a:endParaRPr lang="en-US"/>
-          </a:p>
-        </p:txBody>
-      </p:sp>
-      <p:sp>
-        <p:nvSpPr>
-          <p:cNvPr id="3" name="Date Placeholder 2"/>
-          <p:cNvSpPr>
-            <a:spLocks noGrp="1"/>
-          </p:cNvSpPr>
-          <p:nvPr>
-            <p:ph type="dt" idx="1"/>
-          </p:nvPr>
-        </p:nvSpPr>
-        <p:spPr>
-          <a:xfrm>
-            <a:off x="3884613" y="0"/>
-            <a:ext cx="2971800" cy="457200"/>
-          </a:xfrm>
-          <a:prstGeom prst="rect">
-            <a:avLst/>
-          </a:prstGeom>
-        </p:spPr>
-        <p:txBody>
-          <a:bodyPr vert="horz" lIns="91440" tIns="45720" rIns="91440" bIns="45720" rtlCol="0"/>
-          <a:lstStyle>
-            <a:lvl1pPr algn="r">
-              <a:defRPr sz="1200"/>
-            </a:lvl1pPr>
-          </a:lstStyle>
-          <a:p>
-            <a:fld id="{0F89C1C7-3DCD-1040-A9CF-14679D8B5DDD}" type="datetimeFigureOut">
-              <a:rPr lang="en-US" smtClean="0"/>
-              <a:t>10/17/16</a:t>
-            </a:fld>
-            <a:endParaRPr lang="en-US"/>
-          </a:p>
-        </p:txBody>
-      </p:sp>
-      <p:sp>
-        <p:nvSpPr>
-          <p:cNvPr id="4" name="Slide Image Placeholder 3"/>
-          <p:cNvSpPr>
-            <a:spLocks noGrp="1" noRot="1" noChangeAspect="1"/>
-          </p:cNvSpPr>
-          <p:nvPr>
-            <p:ph type="sldImg" idx="2"/>
-          </p:nvPr>
-        </p:nvSpPr>
-        <p:spPr>
-          <a:xfrm>
-            <a:off x="1143000" y="685800"/>
-            <a:ext cx="4572000" cy="3429000"/>
-          </a:xfrm>
-          <a:prstGeom prst="rect">
-            <a:avLst/>
-          </a:prstGeom>
-          <a:noFill/>
-          <a:ln w="12700">
-            <a:solidFill>
-              <a:prstClr val="black"/>
-            </a:solidFill>
-          </a:ln>
-        </p:spPr>
-        <p:txBody>
-          <a:bodyPr vert="horz" lIns="91440" tIns="45720" rIns="91440" bIns="45720" rtlCol="0" anchor="ctr"/>
-          <a:lstStyle/>
-          <a:p>
-            <a:endParaRPr lang="en-US"/>
-          </a:p>
-        </p:txBody>
-      </p:sp>
-      <p:sp>
-        <p:nvSpPr>
-          <p:cNvPr id="5" name="Notes Placeholder 4"/>
-          <p:cNvSpPr>
-            <a:spLocks noGrp="1"/>
-          </p:cNvSpPr>
-          <p:nvPr>
-            <p:ph type="body" sz="quarter" idx="3"/>
-          </p:nvPr>
-        </p:nvSpPr>
-        <p:spPr>
-          <a:xfrm>
-            <a:off x="685800" y="4343400"/>
-            <a:ext cx="5486400" cy="4114800"/>
-          </a:xfrm>
-          <a:prstGeom prst="rect">
-            <a:avLst/>
-          </a:prstGeom>
-        </p:spPr>
-        <p:txBody>
-          <a:bodyPr vert="horz" lIns="91440" tIns="45720" rIns="91440" bIns="45720" rtlCol="0"/>
-          <a:lstStyle/>
-          <a:p>
-            <a:pPr lvl="0"/>
-            <a:r>
-              <a:rPr lang="en-US" smtClean="0"/>
-              <a:t>Click to edit Master text styles</a:t>
-            </a:r>
-          </a:p>
-          <a:p>
-            <a:pPr lvl="1"/>
-            <a:r>
-              <a:rPr lang="en-US" smtClean="0"/>
-              <a:t>Second level</a:t>
-            </a:r>
-          </a:p>
-          <a:p>
-            <a:pPr lvl="2"/>
-            <a:r>
-              <a:rPr lang="en-US" smtClean="0"/>
-              <a:t>Third level</a:t>
-            </a:r>
-          </a:p>
-          <a:p>
-            <a:pPr lvl="3"/>
-            <a:r>
-              <a:rPr lang="en-US" smtClean="0"/>
-              <a:t>Fourth level</a:t>
-            </a:r>
-          </a:p>
-          <a:p>
-            <a:pPr lvl="4"/>
-            <a:r>
-              <a:rPr lang="en-US" smtClean="0"/>
-              <a:t>Fifth level</a:t>
-            </a:r>
-            <a:endParaRPr lang="en-US"/>
-          </a:p>
-        </p:txBody>
-      </p:sp>
-      <p:sp>
-        <p:nvSpPr>
-          <p:cNvPr id="6" name="Footer Placeholder 5"/>
-          <p:cNvSpPr>
-            <a:spLocks noGrp="1"/>
-          </p:cNvSpPr>
-          <p:nvPr>
-            <p:ph type="ftr" sz="quarter" idx="4"/>
-          </p:nvPr>
-        </p:nvSpPr>
-        <p:spPr>
-          <a:xfrm>
-            <a:off x="0" y="8685213"/>
-            <a:ext cx="2971800" cy="457200"/>
-          </a:xfrm>
-          <a:prstGeom prst="rect">
-            <a:avLst/>
-          </a:prstGeom>
-        </p:spPr>
-        <p:txBody>
-          <a:bodyPr vert="horz" lIns="91440" tIns="45720" rIns="91440" bIns="45720" rtlCol="0" anchor="b"/>
-          <a:lstStyle>
-            <a:lvl1pPr algn="l">
-              <a:defRPr sz="1200"/>
-            </a:lvl1pPr>
-          </a:lstStyle>
-          <a:p>
-            <a:endParaRPr lang="en-US"/>
-          </a:p>
-        </p:txBody>
-      </p:sp>
-      <p:sp>
-        <p:nvSpPr>
-          <p:cNvPr id="7" name="Slide Number Placeholder 6"/>
-          <p:cNvSpPr>
-            <a:spLocks noGrp="1"/>
-          </p:cNvSpPr>
-          <p:nvPr>
-            <p:ph type="sldNum" sz="quarter" idx="5"/>
-          </p:nvPr>
-        </p:nvSpPr>
-        <p:spPr>
-          <a:xfrm>
-            <a:off x="3884613" y="8685213"/>
-            <a:ext cx="2971800" cy="457200"/>
-          </a:xfrm>
-          <a:prstGeom prst="rect">
-            <a:avLst/>
-          </a:prstGeom>
-        </p:spPr>
-        <p:txBody>
-          <a:bodyPr vert="horz" lIns="91440" tIns="45720" rIns="91440" bIns="45720" rtlCol="0" anchor="b"/>
-          <a:lstStyle>
-            <a:lvl1pPr algn="r">
-              <a:defRPr sz="1200"/>
-            </a:lvl1pPr>
-          </a:lstStyle>
-          <a:p>
-            <a:fld id="{BB5E49A5-4136-284D-997B-48E1D791AD67}" type="slidenum">
-              <a:rPr lang="en-US" smtClean="0"/>
-              <a:t>‹#›</a:t>
-            </a:fld>
-            <a:endParaRPr lang="en-US"/>
-          </a:p>
-        </p:txBody>
-      </p:sp>
     </p:spTree>
     <p:extLst>
       <p:ext uri="{BB962C8B-B14F-4D97-AF65-F5344CB8AC3E}">
-        <p14:creationId xmlns:p14="http://schemas.microsoft.com/office/powerpoint/2010/main" val="2623252185"/>
+        <p14:creationId xmlns:p14="http://schemas.microsoft.com/office/powerpoint/2010/main" val="2717872264"/>
       </p:ext>
     </p:extLst>
   </p:cSld>
   <p:clrMap bg1="lt1" tx1="dk1" bg2="lt2" tx2="dk2" accent1="accent1" accent2="accent2" accent3="accent3" accent4="accent4" accent5="accent5" accent6="accent6" hlink="hlink" folHlink="folHlink"/>
   <p:notesStyle>
-    <a:lvl1pPr marL="0" algn="l" defTabSz="457200" rtl="0" eaLnBrk="1" latinLnBrk="0" hangingPunct="1">
+    <a:lvl1pPr marL="0" algn="l" defTabSz="914400" rtl="0" eaLnBrk="1" latinLnBrk="0" hangingPunct="1">
       <a:defRPr sz="1200" kern="1200">
         <a:solidFill>
           <a:schemeClr val="tx1"/>
@@ -381,7 +175,7 @@
         <a:cs typeface="+mn-cs"/>
       </a:defRPr>
     </a:lvl1pPr>
-    <a:lvl2pPr marL="457200" algn="l" defTabSz="457200" rtl="0" eaLnBrk="1" latinLnBrk="0" hangingPunct="1">
+    <a:lvl2pPr marL="457200" algn="l" defTabSz="914400" rtl="0" eaLnBrk="1" latinLnBrk="0" hangingPunct="1">
       <a:defRPr sz="1200" kern="1200">
         <a:solidFill>
           <a:schemeClr val="tx1"/>
@@ -391,7 +185,7 @@
         <a:cs typeface="+mn-cs"/>
       </a:defRPr>
     </a:lvl2pPr>
-    <a:lvl3pPr marL="914400" algn="l" defTabSz="457200" rtl="0" eaLnBrk="1" latinLnBrk="0" hangingPunct="1">
+    <a:lvl3pPr marL="914400" algn="l" defTabSz="914400" rtl="0" eaLnBrk="1" latinLnBrk="0" hangingPunct="1">
       <a:defRPr sz="1200" kern="1200">
         <a:solidFill>
           <a:schemeClr val="tx1"/>
@@ -401,7 +195,7 @@
         <a:cs typeface="+mn-cs"/>
       </a:defRPr>
     </a:lvl3pPr>
-    <a:lvl4pPr marL="1371600" algn="l" defTabSz="457200" rtl="0" eaLnBrk="1" latinLnBrk="0" hangingPunct="1">
+    <a:lvl4pPr marL="1371600" algn="l" defTabSz="914400" rtl="0" eaLnBrk="1" latinLnBrk="0" hangingPunct="1">
       <a:defRPr sz="1200" kern="1200">
         <a:solidFill>
           <a:schemeClr val="tx1"/>
@@ -411,7 +205,7 @@
         <a:cs typeface="+mn-cs"/>
       </a:defRPr>
     </a:lvl4pPr>
-    <a:lvl5pPr marL="1828800" algn="l" defTabSz="457200" rtl="0" eaLnBrk="1" latinLnBrk="0" hangingPunct="1">
+    <a:lvl5pPr marL="1828800" algn="l" defTabSz="914400" rtl="0" eaLnBrk="1" latinLnBrk="0" hangingPunct="1">
       <a:defRPr sz="1200" kern="1200">
         <a:solidFill>
           <a:schemeClr val="tx1"/>
@@ -421,7 +215,7 @@
         <a:cs typeface="+mn-cs"/>
       </a:defRPr>
     </a:lvl5pPr>
-    <a:lvl6pPr marL="2286000" algn="l" defTabSz="457200" rtl="0" eaLnBrk="1" latinLnBrk="0" hangingPunct="1">
+    <a:lvl6pPr marL="2286000" algn="l" defTabSz="914400" rtl="0" eaLnBrk="1" latinLnBrk="0" hangingPunct="1">
       <a:defRPr sz="1200" kern="1200">
         <a:solidFill>
           <a:schemeClr val="tx1"/>
@@ -431,7 +225,7 @@
         <a:cs typeface="+mn-cs"/>
       </a:defRPr>
     </a:lvl6pPr>
-    <a:lvl7pPr marL="2743200" algn="l" defTabSz="457200" rtl="0" eaLnBrk="1" latinLnBrk="0" hangingPunct="1">
+    <a:lvl7pPr marL="2743200" algn="l" defTabSz="914400" rtl="0" eaLnBrk="1" latinLnBrk="0" hangingPunct="1">
       <a:defRPr sz="1200" kern="1200">
         <a:solidFill>
           <a:schemeClr val="tx1"/>
@@ -441,7 +235,7 @@
         <a:cs typeface="+mn-cs"/>
       </a:defRPr>
     </a:lvl7pPr>
-    <a:lvl8pPr marL="3200400" algn="l" defTabSz="457200" rtl="0" eaLnBrk="1" latinLnBrk="0" hangingPunct="1">
+    <a:lvl8pPr marL="3200400" algn="l" defTabSz="914400" rtl="0" eaLnBrk="1" latinLnBrk="0" hangingPunct="1">
       <a:defRPr sz="1200" kern="1200">
         <a:solidFill>
           <a:schemeClr val="tx1"/>
@@ -451,7 +245,7 @@
         <a:cs typeface="+mn-cs"/>
       </a:defRPr>
     </a:lvl8pPr>
-    <a:lvl9pPr marL="3657600" algn="l" defTabSz="457200" rtl="0" eaLnBrk="1" latinLnBrk="0" hangingPunct="1">
+    <a:lvl9pPr marL="3657600" algn="l" defTabSz="914400" rtl="0" eaLnBrk="1" latinLnBrk="0" hangingPunct="1">
       <a:defRPr sz="1200" kern="1200">
         <a:solidFill>
           <a:schemeClr val="tx1"/>
@@ -466,7 +260,7 @@
 </file>
 
 <file path=ppt/notesSlides/notesSlide1.xml><?xml version="1.0" encoding="utf-8"?>
-<p:notes xmlns:a="http://schemas.openxmlformats.org/drawingml/2006/main" xmlns:p="http://schemas.openxmlformats.org/presentationml/2006/main" xmlns:r="http://schemas.openxmlformats.org/officeDocument/2006/relationships">
+<p:notes xmlns:a="http://schemas.openxmlformats.org/drawingml/2006/main" xmlns:r="http://schemas.openxmlformats.org/officeDocument/2006/relationships" xmlns:p="http://schemas.openxmlformats.org/presentationml/2006/main">
   <p:cSld>
     <p:spTree>
       <p:nvGrpSpPr>
@@ -486,7 +280,7 @@
         <p:nvSpPr>
           <p:cNvPr id="2" name="Slide Image Placeholder 1"/>
           <p:cNvSpPr>
-            <a:spLocks noGrp="1"/>
+            <a:spLocks noGrp="1" noRot="1" noChangeAspect="1"/>
           </p:cNvSpPr>
           <p:nvPr>
             <p:ph type="sldImg" idx="2"/>
@@ -501,7 +295,7 @@
             <a:spLocks noGrp="1"/>
           </p:cNvSpPr>
           <p:nvPr>
-            <p:ph type="body" idx="3" sz="quarter"/>
+            <p:ph type="body" sz="quarter" idx="3"/>
           </p:nvPr>
         </p:nvSpPr>
         <p:spPr/>
@@ -522,7 +316,7 @@
             <a:spLocks noGrp="1"/>
           </p:cNvSpPr>
           <p:nvPr>
-            <p:ph type="sldNum" idx="5" sz="quarter"/>
+            <p:ph type="sldNum" sz="quarter" idx="5"/>
           </p:nvPr>
         </p:nvSpPr>
         <p:spPr/>
@@ -536,7 +330,7 @@
 </file>
 
 <file path=ppt/notesSlides/notesSlide2.xml><?xml version="1.0" encoding="utf-8"?>
-<p:notes xmlns:a="http://schemas.openxmlformats.org/drawingml/2006/main" xmlns:p="http://schemas.openxmlformats.org/presentationml/2006/main" xmlns:r="http://schemas.openxmlformats.org/officeDocument/2006/relationships">
+<p:notes xmlns:a="http://schemas.openxmlformats.org/drawingml/2006/main" xmlns:r="http://schemas.openxmlformats.org/officeDocument/2006/relationships" xmlns:p="http://schemas.openxmlformats.org/presentationml/2006/main">
   <p:cSld>
     <p:spTree>
       <p:nvGrpSpPr>
@@ -556,7 +350,7 @@
         <p:nvSpPr>
           <p:cNvPr id="2" name="Slide Image Placeholder 1"/>
           <p:cNvSpPr>
-            <a:spLocks noGrp="1"/>
+            <a:spLocks noGrp="1" noRot="1" noChangeAspect="1"/>
           </p:cNvSpPr>
           <p:nvPr>
             <p:ph type="sldImg" idx="2"/>
@@ -571,7 +365,7 @@
             <a:spLocks noGrp="1"/>
           </p:cNvSpPr>
           <p:nvPr>
-            <p:ph type="body" idx="3" sz="quarter"/>
+            <p:ph type="body" sz="quarter" idx="3"/>
           </p:nvPr>
         </p:nvSpPr>
         <p:spPr/>
@@ -592,7 +386,7 @@
             <a:spLocks noGrp="1"/>
           </p:cNvSpPr>
           <p:nvPr>
-            <p:ph type="sldNum" idx="5" sz="quarter"/>
+            <p:ph type="sldNum" sz="quarter" idx="5"/>
           </p:nvPr>
         </p:nvSpPr>
         <p:spPr/>
@@ -606,7 +400,7 @@
 </file>
 
 <file path=ppt/notesSlides/notesSlide3.xml><?xml version="1.0" encoding="utf-8"?>
-<p:notes xmlns:a="http://schemas.openxmlformats.org/drawingml/2006/main" xmlns:p="http://schemas.openxmlformats.org/presentationml/2006/main" xmlns:r="http://schemas.openxmlformats.org/officeDocument/2006/relationships">
+<p:notes xmlns:a="http://schemas.openxmlformats.org/drawingml/2006/main" xmlns:r="http://schemas.openxmlformats.org/officeDocument/2006/relationships" xmlns:p="http://schemas.openxmlformats.org/presentationml/2006/main">
   <p:cSld>
     <p:spTree>
       <p:nvGrpSpPr>
@@ -626,7 +420,7 @@
         <p:nvSpPr>
           <p:cNvPr id="2" name="Slide Image Placeholder 1"/>
           <p:cNvSpPr>
-            <a:spLocks noGrp="1"/>
+            <a:spLocks noGrp="1" noRot="1" noChangeAspect="1"/>
           </p:cNvSpPr>
           <p:nvPr>
             <p:ph type="sldImg" idx="2"/>
@@ -641,7 +435,7 @@
             <a:spLocks noGrp="1"/>
           </p:cNvSpPr>
           <p:nvPr>
-            <p:ph type="body" idx="3" sz="quarter"/>
+            <p:ph type="body" sz="quarter" idx="3"/>
           </p:nvPr>
         </p:nvSpPr>
         <p:spPr/>
@@ -662,7 +456,7 @@
             <a:spLocks noGrp="1"/>
           </p:cNvSpPr>
           <p:nvPr>
-            <p:ph type="sldNum" idx="5" sz="quarter"/>
+            <p:ph type="sldNum" sz="quarter" idx="5"/>
           </p:nvPr>
         </p:nvSpPr>
         <p:spPr/>
@@ -676,7 +470,7 @@
 </file>
 
 <file path=ppt/notesSlides/notesSlide4.xml><?xml version="1.0" encoding="utf-8"?>
-<p:notes xmlns:a="http://schemas.openxmlformats.org/drawingml/2006/main" xmlns:p="http://schemas.openxmlformats.org/presentationml/2006/main" xmlns:r="http://schemas.openxmlformats.org/officeDocument/2006/relationships">
+<p:notes xmlns:a="http://schemas.openxmlformats.org/drawingml/2006/main" xmlns:r="http://schemas.openxmlformats.org/officeDocument/2006/relationships" xmlns:p="http://schemas.openxmlformats.org/presentationml/2006/main">
   <p:cSld>
     <p:spTree>
       <p:nvGrpSpPr>
@@ -696,7 +490,7 @@
         <p:nvSpPr>
           <p:cNvPr id="2" name="Slide Image Placeholder 1"/>
           <p:cNvSpPr>
-            <a:spLocks noGrp="1"/>
+            <a:spLocks noGrp="1" noRot="1" noChangeAspect="1"/>
           </p:cNvSpPr>
           <p:nvPr>
             <p:ph type="sldImg" idx="2"/>
@@ -711,7 +505,7 @@
             <a:spLocks noGrp="1"/>
           </p:cNvSpPr>
           <p:nvPr>
-            <p:ph type="body" idx="3" sz="quarter"/>
+            <p:ph type="body" sz="quarter" idx="3"/>
           </p:nvPr>
         </p:nvSpPr>
         <p:spPr/>
@@ -732,7 +526,7 @@
             <a:spLocks noGrp="1"/>
           </p:cNvSpPr>
           <p:nvPr>
-            <p:ph type="sldNum" idx="5" sz="quarter"/>
+            <p:ph type="sldNum" sz="quarter" idx="5"/>
           </p:nvPr>
         </p:nvSpPr>
         <p:spPr/>
@@ -746,7 +540,7 @@
 </file>
 
 <file path=ppt/notesSlides/notesSlide5.xml><?xml version="1.0" encoding="utf-8"?>
-<p:notes xmlns:a="http://schemas.openxmlformats.org/drawingml/2006/main" xmlns:p="http://schemas.openxmlformats.org/presentationml/2006/main" xmlns:r="http://schemas.openxmlformats.org/officeDocument/2006/relationships">
+<p:notes xmlns:a="http://schemas.openxmlformats.org/drawingml/2006/main" xmlns:r="http://schemas.openxmlformats.org/officeDocument/2006/relationships" xmlns:p="http://schemas.openxmlformats.org/presentationml/2006/main">
   <p:cSld>
     <p:spTree>
       <p:nvGrpSpPr>
@@ -766,7 +560,7 @@
         <p:nvSpPr>
           <p:cNvPr id="2" name="Slide Image Placeholder 1"/>
           <p:cNvSpPr>
-            <a:spLocks noGrp="1"/>
+            <a:spLocks noGrp="1" noRot="1" noChangeAspect="1"/>
           </p:cNvSpPr>
           <p:nvPr>
             <p:ph type="sldImg" idx="2"/>
@@ -781,7 +575,7 @@
             <a:spLocks noGrp="1"/>
           </p:cNvSpPr>
           <p:nvPr>
-            <p:ph type="body" idx="3" sz="quarter"/>
+            <p:ph type="body" sz="quarter" idx="3"/>
           </p:nvPr>
         </p:nvSpPr>
         <p:spPr/>
@@ -802,7 +596,7 @@
             <a:spLocks noGrp="1"/>
           </p:cNvSpPr>
           <p:nvPr>
-            <p:ph type="sldNum" idx="5" sz="quarter"/>
+            <p:ph type="sldNum" sz="quarter" idx="5"/>
           </p:nvPr>
         </p:nvSpPr>
         <p:spPr/>
@@ -816,7 +610,7 @@
 </file>
 
 <file path=ppt/notesSlides/notesSlide6.xml><?xml version="1.0" encoding="utf-8"?>
-<p:notes xmlns:a="http://schemas.openxmlformats.org/drawingml/2006/main" xmlns:p="http://schemas.openxmlformats.org/presentationml/2006/main" xmlns:r="http://schemas.openxmlformats.org/officeDocument/2006/relationships">
+<p:notes xmlns:a="http://schemas.openxmlformats.org/drawingml/2006/main" xmlns:r="http://schemas.openxmlformats.org/officeDocument/2006/relationships" xmlns:p="http://schemas.openxmlformats.org/presentationml/2006/main">
   <p:cSld>
     <p:spTree>
       <p:nvGrpSpPr>
@@ -836,7 +630,7 @@
         <p:nvSpPr>
           <p:cNvPr id="2" name="Slide Image Placeholder 1"/>
           <p:cNvSpPr>
-            <a:spLocks noGrp="1"/>
+            <a:spLocks noGrp="1" noRot="1" noChangeAspect="1"/>
           </p:cNvSpPr>
           <p:nvPr>
             <p:ph type="sldImg" idx="2"/>
@@ -851,7 +645,7 @@
             <a:spLocks noGrp="1"/>
           </p:cNvSpPr>
           <p:nvPr>
-            <p:ph type="body" idx="3" sz="quarter"/>
+            <p:ph type="body" sz="quarter" idx="3"/>
           </p:nvPr>
         </p:nvSpPr>
         <p:spPr/>
@@ -872,7 +666,7 @@
             <a:spLocks noGrp="1"/>
           </p:cNvSpPr>
           <p:nvPr>
-            <p:ph type="sldNum" idx="5" sz="quarter"/>
+            <p:ph type="sldNum" sz="quarter" idx="5"/>
           </p:nvPr>
         </p:nvSpPr>
         <p:spPr/>
@@ -886,7 +680,7 @@
 </file>
 
 <file path=ppt/notesSlides/notesSlide7.xml><?xml version="1.0" encoding="utf-8"?>
-<p:notes xmlns:a="http://schemas.openxmlformats.org/drawingml/2006/main" xmlns:p="http://schemas.openxmlformats.org/presentationml/2006/main" xmlns:r="http://schemas.openxmlformats.org/officeDocument/2006/relationships">
+<p:notes xmlns:a="http://schemas.openxmlformats.org/drawingml/2006/main" xmlns:r="http://schemas.openxmlformats.org/officeDocument/2006/relationships" xmlns:p="http://schemas.openxmlformats.org/presentationml/2006/main">
   <p:cSld>
     <p:spTree>
       <p:nvGrpSpPr>
@@ -906,7 +700,7 @@
         <p:nvSpPr>
           <p:cNvPr id="2" name="Slide Image Placeholder 1"/>
           <p:cNvSpPr>
-            <a:spLocks noGrp="1"/>
+            <a:spLocks noGrp="1" noRot="1" noChangeAspect="1"/>
           </p:cNvSpPr>
           <p:nvPr>
             <p:ph type="sldImg" idx="2"/>
@@ -921,7 +715,7 @@
             <a:spLocks noGrp="1"/>
           </p:cNvSpPr>
           <p:nvPr>
-            <p:ph type="body" idx="3" sz="quarter"/>
+            <p:ph type="body" sz="quarter" idx="3"/>
           </p:nvPr>
         </p:nvSpPr>
         <p:spPr/>
@@ -942,7 +736,7 @@
             <a:spLocks noGrp="1"/>
           </p:cNvSpPr>
           <p:nvPr>
-            <p:ph type="sldNum" idx="5" sz="quarter"/>
+            <p:ph type="sldNum" sz="quarter" idx="5"/>
           </p:nvPr>
         </p:nvSpPr>
         <p:spPr/>
@@ -956,7 +750,7 @@
 </file>
 
 <file path=ppt/notesSlides/notesSlide8.xml><?xml version="1.0" encoding="utf-8"?>
-<p:notes xmlns:a="http://schemas.openxmlformats.org/drawingml/2006/main" xmlns:p="http://schemas.openxmlformats.org/presentationml/2006/main" xmlns:r="http://schemas.openxmlformats.org/officeDocument/2006/relationships">
+<p:notes xmlns:a="http://schemas.openxmlformats.org/drawingml/2006/main" xmlns:r="http://schemas.openxmlformats.org/officeDocument/2006/relationships" xmlns:p="http://schemas.openxmlformats.org/presentationml/2006/main">
   <p:cSld>
     <p:spTree>
       <p:nvGrpSpPr>
@@ -976,7 +770,7 @@
         <p:nvSpPr>
           <p:cNvPr id="2" name="Slide Image Placeholder 1"/>
           <p:cNvSpPr>
-            <a:spLocks noGrp="1"/>
+            <a:spLocks noGrp="1" noRot="1" noChangeAspect="1"/>
           </p:cNvSpPr>
           <p:nvPr>
             <p:ph type="sldImg" idx="2"/>
@@ -991,7 +785,7 @@
             <a:spLocks noGrp="1"/>
           </p:cNvSpPr>
           <p:nvPr>
-            <p:ph type="body" idx="3" sz="quarter"/>
+            <p:ph type="body" sz="quarter" idx="3"/>
           </p:nvPr>
         </p:nvSpPr>
         <p:spPr/>
@@ -1012,7 +806,7 @@
             <a:spLocks noGrp="1"/>
           </p:cNvSpPr>
           <p:nvPr>
-            <p:ph type="sldNum" idx="5" sz="quarter"/>
+            <p:ph type="sldNum" sz="quarter" idx="5"/>
           </p:nvPr>
         </p:nvSpPr>
         <p:spPr/>
@@ -1026,7 +820,7 @@
 </file>
 
 <file path=ppt/notesSlides/notesSlide9.xml><?xml version="1.0" encoding="utf-8"?>
-<p:notes xmlns:a="http://schemas.openxmlformats.org/drawingml/2006/main" xmlns:p="http://schemas.openxmlformats.org/presentationml/2006/main" xmlns:r="http://schemas.openxmlformats.org/officeDocument/2006/relationships">
+<p:notes xmlns:a="http://schemas.openxmlformats.org/drawingml/2006/main" xmlns:r="http://schemas.openxmlformats.org/officeDocument/2006/relationships" xmlns:p="http://schemas.openxmlformats.org/presentationml/2006/main">
   <p:cSld>
     <p:spTree>
       <p:nvGrpSpPr>
@@ -1046,7 +840,7 @@
         <p:nvSpPr>
           <p:cNvPr id="2" name="Slide Image Placeholder 1"/>
           <p:cNvSpPr>
-            <a:spLocks noGrp="1"/>
+            <a:spLocks noGrp="1" noRot="1" noChangeAspect="1"/>
           </p:cNvSpPr>
           <p:nvPr>
             <p:ph type="sldImg" idx="2"/>
@@ -1061,7 +855,7 @@
             <a:spLocks noGrp="1"/>
           </p:cNvSpPr>
           <p:nvPr>
-            <p:ph type="body" idx="3" sz="quarter"/>
+            <p:ph type="body" sz="quarter" idx="3"/>
           </p:nvPr>
         </p:nvSpPr>
         <p:spPr/>
@@ -1082,7 +876,7 @@
             <a:spLocks noGrp="1"/>
           </p:cNvSpPr>
           <p:nvPr>
-            <p:ph type="sldNum" idx="5" sz="quarter"/>
+            <p:ph type="sldNum" sz="quarter" idx="5"/>
           </p:nvPr>
         </p:nvSpPr>
         <p:spPr/>
@@ -1133,10 +927,9 @@
           <a:lstStyle/>
           <a:p>
             <a:r>
-              <a:rPr lang="en-US" smtClean="0"/>
+              <a:rPr lang="en-US"/>
               <a:t>Click to edit Master title style</a:t>
             </a:r>
-            <a:endParaRPr lang="en-US"/>
           </a:p>
         </p:txBody>
       </p:sp>
@@ -1252,10 +1045,9 @@
           </a:lstStyle>
           <a:p>
             <a:r>
-              <a:rPr lang="en-US" smtClean="0"/>
+              <a:rPr lang="en-US"/>
               <a:t>Click to edit Master subtitle style</a:t>
             </a:r>
-            <a:endParaRPr lang="en-US"/>
           </a:p>
         </p:txBody>
       </p:sp>
@@ -1276,7 +1068,7 @@
           <a:p>
             <a:fld id="{5BCAD085-E8A6-8845-BD4E-CB4CCA059FC4}" type="datetimeFigureOut">
               <a:rPr lang="en-US" smtClean="0"/>
-              <a:t>1/27/13</a:t>
+              <a:t>5/28/2026</a:t>
             </a:fld>
             <a:endParaRPr lang="en-US"/>
           </a:p>
@@ -1370,10 +1162,9 @@
           <a:lstStyle/>
           <a:p>
             <a:r>
-              <a:rPr lang="en-US" smtClean="0"/>
+              <a:rPr lang="en-US"/>
               <a:t>Click to edit Master title style</a:t>
             </a:r>
-            <a:endParaRPr lang="en-US"/>
           </a:p>
         </p:txBody>
       </p:sp>
@@ -1394,38 +1185,37 @@
           <a:p>
             <a:pPr lvl="0"/>
             <a:r>
-              <a:rPr lang="en-US" smtClean="0"/>
+              <a:rPr lang="en-US"/>
               <a:t>Click to edit Master text styles</a:t>
             </a:r>
           </a:p>
           <a:p>
             <a:pPr lvl="1"/>
             <a:r>
-              <a:rPr lang="en-US" smtClean="0"/>
+              <a:rPr lang="en-US"/>
               <a:t>Second level</a:t>
             </a:r>
           </a:p>
           <a:p>
             <a:pPr lvl="2"/>
             <a:r>
-              <a:rPr lang="en-US" smtClean="0"/>
+              <a:rPr lang="en-US"/>
               <a:t>Third level</a:t>
             </a:r>
           </a:p>
           <a:p>
             <a:pPr lvl="3"/>
             <a:r>
-              <a:rPr lang="en-US" smtClean="0"/>
+              <a:rPr lang="en-US"/>
               <a:t>Fourth level</a:t>
             </a:r>
           </a:p>
           <a:p>
             <a:pPr lvl="4"/>
             <a:r>
-              <a:rPr lang="en-US" smtClean="0"/>
+              <a:rPr lang="en-US"/>
               <a:t>Fifth level</a:t>
             </a:r>
-            <a:endParaRPr lang="en-US"/>
           </a:p>
         </p:txBody>
       </p:sp>
@@ -1446,7 +1236,7 @@
           <a:p>
             <a:fld id="{5BCAD085-E8A6-8845-BD4E-CB4CCA059FC4}" type="datetimeFigureOut">
               <a:rPr lang="en-US" smtClean="0"/>
-              <a:t>1/27/13</a:t>
+              <a:t>5/28/2026</a:t>
             </a:fld>
             <a:endParaRPr lang="en-US"/>
           </a:p>
@@ -1545,10 +1335,9 @@
           <a:lstStyle/>
           <a:p>
             <a:r>
-              <a:rPr lang="en-US" smtClean="0"/>
+              <a:rPr lang="en-US"/>
               <a:t>Click to edit Master title style</a:t>
             </a:r>
-            <a:endParaRPr lang="en-US"/>
           </a:p>
         </p:txBody>
       </p:sp>
@@ -1574,38 +1363,37 @@
           <a:p>
             <a:pPr lvl="0"/>
             <a:r>
-              <a:rPr lang="en-US" smtClean="0"/>
+              <a:rPr lang="en-US"/>
               <a:t>Click to edit Master text styles</a:t>
             </a:r>
           </a:p>
           <a:p>
             <a:pPr lvl="1"/>
             <a:r>
-              <a:rPr lang="en-US" smtClean="0"/>
+              <a:rPr lang="en-US"/>
               <a:t>Second level</a:t>
             </a:r>
           </a:p>
           <a:p>
             <a:pPr lvl="2"/>
             <a:r>
-              <a:rPr lang="en-US" smtClean="0"/>
+              <a:rPr lang="en-US"/>
               <a:t>Third level</a:t>
             </a:r>
           </a:p>
           <a:p>
             <a:pPr lvl="3"/>
             <a:r>
-              <a:rPr lang="en-US" smtClean="0"/>
+              <a:rPr lang="en-US"/>
               <a:t>Fourth level</a:t>
             </a:r>
           </a:p>
           <a:p>
             <a:pPr lvl="4"/>
             <a:r>
-              <a:rPr lang="en-US" smtClean="0"/>
+              <a:rPr lang="en-US"/>
               <a:t>Fifth level</a:t>
             </a:r>
-            <a:endParaRPr lang="en-US"/>
           </a:p>
         </p:txBody>
       </p:sp>
@@ -1626,7 +1414,7 @@
           <a:p>
             <a:fld id="{5BCAD085-E8A6-8845-BD4E-CB4CCA059FC4}" type="datetimeFigureOut">
               <a:rPr lang="en-US" smtClean="0"/>
-              <a:t>1/27/13</a:t>
+              <a:t>5/28/2026</a:t>
             </a:fld>
             <a:endParaRPr lang="en-US"/>
           </a:p>
@@ -1720,10 +1508,9 @@
           <a:lstStyle/>
           <a:p>
             <a:r>
-              <a:rPr lang="en-US" smtClean="0"/>
+              <a:rPr lang="en-US"/>
               <a:t>Click to edit Master title style</a:t>
             </a:r>
-            <a:endParaRPr lang="en-US"/>
           </a:p>
         </p:txBody>
       </p:sp>
@@ -1744,38 +1531,37 @@
           <a:p>
             <a:pPr lvl="0"/>
             <a:r>
-              <a:rPr lang="en-US" smtClean="0"/>
+              <a:rPr lang="en-US"/>
               <a:t>Click to edit Master text styles</a:t>
             </a:r>
           </a:p>
           <a:p>
             <a:pPr lvl="1"/>
             <a:r>
-              <a:rPr lang="en-US" smtClean="0"/>
+              <a:rPr lang="en-US"/>
               <a:t>Second level</a:t>
             </a:r>
           </a:p>
           <a:p>
             <a:pPr lvl="2"/>
             <a:r>
-              <a:rPr lang="en-US" smtClean="0"/>
+              <a:rPr lang="en-US"/>
               <a:t>Third level</a:t>
             </a:r>
           </a:p>
           <a:p>
             <a:pPr lvl="3"/>
             <a:r>
-              <a:rPr lang="en-US" smtClean="0"/>
+              <a:rPr lang="en-US"/>
               <a:t>Fourth level</a:t>
             </a:r>
           </a:p>
           <a:p>
             <a:pPr lvl="4"/>
             <a:r>
-              <a:rPr lang="en-US" smtClean="0"/>
+              <a:rPr lang="en-US"/>
               <a:t>Fifth level</a:t>
             </a:r>
-            <a:endParaRPr lang="en-US"/>
           </a:p>
         </p:txBody>
       </p:sp>
@@ -1796,7 +1582,7 @@
           <a:p>
             <a:fld id="{5BCAD085-E8A6-8845-BD4E-CB4CCA059FC4}" type="datetimeFigureOut">
               <a:rPr lang="en-US" smtClean="0"/>
-              <a:t>1/27/13</a:t>
+              <a:t>5/28/2026</a:t>
             </a:fld>
             <a:endParaRPr lang="en-US"/>
           </a:p>
@@ -1899,10 +1685,9 @@
           </a:lstStyle>
           <a:p>
             <a:r>
-              <a:rPr lang="en-US" smtClean="0"/>
+              <a:rPr lang="en-US"/>
               <a:t>Click to edit Master title style</a:t>
             </a:r>
-            <a:endParaRPr lang="en-US"/>
           </a:p>
         </p:txBody>
       </p:sp>
@@ -2019,7 +1804,7 @@
           <a:p>
             <a:pPr lvl="0"/>
             <a:r>
-              <a:rPr lang="en-US" smtClean="0"/>
+              <a:rPr lang="en-US"/>
               <a:t>Click to edit Master text styles</a:t>
             </a:r>
           </a:p>
@@ -2042,7 +1827,7 @@
           <a:p>
             <a:fld id="{5BCAD085-E8A6-8845-BD4E-CB4CCA059FC4}" type="datetimeFigureOut">
               <a:rPr lang="en-US" smtClean="0"/>
-              <a:t>1/27/13</a:t>
+              <a:t>5/28/2026</a:t>
             </a:fld>
             <a:endParaRPr lang="en-US"/>
           </a:p>
@@ -2136,10 +1921,9 @@
           <a:lstStyle/>
           <a:p>
             <a:r>
-              <a:rPr lang="en-US" smtClean="0"/>
+              <a:rPr lang="en-US"/>
               <a:t>Click to edit Master title style</a:t>
             </a:r>
-            <a:endParaRPr lang="en-US"/>
           </a:p>
         </p:txBody>
       </p:sp>
@@ -2193,38 +1977,37 @@
           <a:p>
             <a:pPr lvl="0"/>
             <a:r>
-              <a:rPr lang="en-US" smtClean="0"/>
+              <a:rPr lang="en-US"/>
               <a:t>Click to edit Master text styles</a:t>
             </a:r>
           </a:p>
           <a:p>
             <a:pPr lvl="1"/>
             <a:r>
-              <a:rPr lang="en-US" smtClean="0"/>
+              <a:rPr lang="en-US"/>
               <a:t>Second level</a:t>
             </a:r>
           </a:p>
           <a:p>
             <a:pPr lvl="2"/>
             <a:r>
-              <a:rPr lang="en-US" smtClean="0"/>
+              <a:rPr lang="en-US"/>
               <a:t>Third level</a:t>
             </a:r>
           </a:p>
           <a:p>
             <a:pPr lvl="3"/>
             <a:r>
-              <a:rPr lang="en-US" smtClean="0"/>
+              <a:rPr lang="en-US"/>
               <a:t>Fourth level</a:t>
             </a:r>
           </a:p>
           <a:p>
             <a:pPr lvl="4"/>
             <a:r>
-              <a:rPr lang="en-US" smtClean="0"/>
+              <a:rPr lang="en-US"/>
               <a:t>Fifth level</a:t>
             </a:r>
-            <a:endParaRPr lang="en-US"/>
           </a:p>
         </p:txBody>
       </p:sp>
@@ -2278,38 +2061,37 @@
           <a:p>
             <a:pPr lvl="0"/>
             <a:r>
-              <a:rPr lang="en-US" smtClean="0"/>
+              <a:rPr lang="en-US"/>
               <a:t>Click to edit Master text styles</a:t>
             </a:r>
           </a:p>
           <a:p>
             <a:pPr lvl="1"/>
             <a:r>
-              <a:rPr lang="en-US" smtClean="0"/>
+              <a:rPr lang="en-US"/>
               <a:t>Second level</a:t>
             </a:r>
           </a:p>
           <a:p>
             <a:pPr lvl="2"/>
             <a:r>
-              <a:rPr lang="en-US" smtClean="0"/>
+              <a:rPr lang="en-US"/>
               <a:t>Third level</a:t>
             </a:r>
           </a:p>
           <a:p>
             <a:pPr lvl="3"/>
             <a:r>
-              <a:rPr lang="en-US" smtClean="0"/>
+              <a:rPr lang="en-US"/>
               <a:t>Fourth level</a:t>
             </a:r>
           </a:p>
           <a:p>
             <a:pPr lvl="4"/>
             <a:r>
-              <a:rPr lang="en-US" smtClean="0"/>
+              <a:rPr lang="en-US"/>
               <a:t>Fifth level</a:t>
             </a:r>
-            <a:endParaRPr lang="en-US"/>
           </a:p>
         </p:txBody>
       </p:sp>
@@ -2330,7 +2112,7 @@
           <a:p>
             <a:fld id="{5BCAD085-E8A6-8845-BD4E-CB4CCA059FC4}" type="datetimeFigureOut">
               <a:rPr lang="en-US" smtClean="0"/>
-              <a:t>1/27/13</a:t>
+              <a:t>5/28/2026</a:t>
             </a:fld>
             <a:endParaRPr lang="en-US"/>
           </a:p>
@@ -2428,10 +2210,9 @@
           </a:lstStyle>
           <a:p>
             <a:r>
-              <a:rPr lang="en-US" smtClean="0"/>
+              <a:rPr lang="en-US"/>
               <a:t>Click to edit Master title style</a:t>
             </a:r>
-            <a:endParaRPr lang="en-US"/>
           </a:p>
         </p:txBody>
       </p:sp>
@@ -2494,7 +2275,7 @@
           <a:p>
             <a:pPr lvl="0"/>
             <a:r>
-              <a:rPr lang="en-US" smtClean="0"/>
+              <a:rPr lang="en-US"/>
               <a:t>Click to edit Master text styles</a:t>
             </a:r>
           </a:p>
@@ -2550,38 +2331,37 @@
           <a:p>
             <a:pPr lvl="0"/>
             <a:r>
-              <a:rPr lang="en-US" smtClean="0"/>
+              <a:rPr lang="en-US"/>
               <a:t>Click to edit Master text styles</a:t>
             </a:r>
           </a:p>
           <a:p>
             <a:pPr lvl="1"/>
             <a:r>
-              <a:rPr lang="en-US" smtClean="0"/>
+              <a:rPr lang="en-US"/>
               <a:t>Second level</a:t>
             </a:r>
           </a:p>
           <a:p>
             <a:pPr lvl="2"/>
             <a:r>
-              <a:rPr lang="en-US" smtClean="0"/>
+              <a:rPr lang="en-US"/>
               <a:t>Third level</a:t>
             </a:r>
           </a:p>
           <a:p>
             <a:pPr lvl="3"/>
             <a:r>
-              <a:rPr lang="en-US" smtClean="0"/>
+              <a:rPr lang="en-US"/>
               <a:t>Fourth level</a:t>
             </a:r>
           </a:p>
           <a:p>
             <a:pPr lvl="4"/>
             <a:r>
-              <a:rPr lang="en-US" smtClean="0"/>
+              <a:rPr lang="en-US"/>
               <a:t>Fifth level</a:t>
             </a:r>
-            <a:endParaRPr lang="en-US"/>
           </a:p>
         </p:txBody>
       </p:sp>
@@ -2644,7 +2424,7 @@
           <a:p>
             <a:pPr lvl="0"/>
             <a:r>
-              <a:rPr lang="en-US" smtClean="0"/>
+              <a:rPr lang="en-US"/>
               <a:t>Click to edit Master text styles</a:t>
             </a:r>
           </a:p>
@@ -2700,38 +2480,37 @@
           <a:p>
             <a:pPr lvl="0"/>
             <a:r>
-              <a:rPr lang="en-US" smtClean="0"/>
+              <a:rPr lang="en-US"/>
               <a:t>Click to edit Master text styles</a:t>
             </a:r>
           </a:p>
           <a:p>
             <a:pPr lvl="1"/>
             <a:r>
-              <a:rPr lang="en-US" smtClean="0"/>
+              <a:rPr lang="en-US"/>
               <a:t>Second level</a:t>
             </a:r>
           </a:p>
           <a:p>
             <a:pPr lvl="2"/>
             <a:r>
-              <a:rPr lang="en-US" smtClean="0"/>
+              <a:rPr lang="en-US"/>
               <a:t>Third level</a:t>
             </a:r>
           </a:p>
           <a:p>
             <a:pPr lvl="3"/>
             <a:r>
-              <a:rPr lang="en-US" smtClean="0"/>
+              <a:rPr lang="en-US"/>
               <a:t>Fourth level</a:t>
             </a:r>
           </a:p>
           <a:p>
             <a:pPr lvl="4"/>
             <a:r>
-              <a:rPr lang="en-US" smtClean="0"/>
+              <a:rPr lang="en-US"/>
               <a:t>Fifth level</a:t>
             </a:r>
-            <a:endParaRPr lang="en-US"/>
           </a:p>
         </p:txBody>
       </p:sp>
@@ -2752,7 +2531,7 @@
           <a:p>
             <a:fld id="{5BCAD085-E8A6-8845-BD4E-CB4CCA059FC4}" type="datetimeFigureOut">
               <a:rPr lang="en-US" smtClean="0"/>
-              <a:t>1/27/13</a:t>
+              <a:t>5/28/2026</a:t>
             </a:fld>
             <a:endParaRPr lang="en-US"/>
           </a:p>
@@ -2846,10 +2625,9 @@
           <a:lstStyle/>
           <a:p>
             <a:r>
-              <a:rPr lang="en-US" smtClean="0"/>
+              <a:rPr lang="en-US"/>
               <a:t>Click to edit Master title style</a:t>
             </a:r>
-            <a:endParaRPr lang="en-US"/>
           </a:p>
         </p:txBody>
       </p:sp>
@@ -2870,7 +2648,7 @@
           <a:p>
             <a:fld id="{5BCAD085-E8A6-8845-BD4E-CB4CCA059FC4}" type="datetimeFigureOut">
               <a:rPr lang="en-US" smtClean="0"/>
-              <a:t>1/27/13</a:t>
+              <a:t>5/28/2026</a:t>
             </a:fld>
             <a:endParaRPr lang="en-US"/>
           </a:p>
@@ -2965,7 +2743,7 @@
           <a:p>
             <a:fld id="{5BCAD085-E8A6-8845-BD4E-CB4CCA059FC4}" type="datetimeFigureOut">
               <a:rPr lang="en-US" smtClean="0"/>
-              <a:t>1/27/13</a:t>
+              <a:t>5/28/2026</a:t>
             </a:fld>
             <a:endParaRPr lang="en-US"/>
           </a:p>
@@ -3068,10 +2846,9 @@
           </a:lstStyle>
           <a:p>
             <a:r>
-              <a:rPr lang="en-US" smtClean="0"/>
+              <a:rPr lang="en-US"/>
               <a:t>Click to edit Master title style</a:t>
             </a:r>
-            <a:endParaRPr lang="en-US"/>
           </a:p>
         </p:txBody>
       </p:sp>
@@ -3125,38 +2902,37 @@
           <a:p>
             <a:pPr lvl="0"/>
             <a:r>
-              <a:rPr lang="en-US" smtClean="0"/>
+              <a:rPr lang="en-US"/>
               <a:t>Click to edit Master text styles</a:t>
             </a:r>
           </a:p>
           <a:p>
             <a:pPr lvl="1"/>
             <a:r>
-              <a:rPr lang="en-US" smtClean="0"/>
+              <a:rPr lang="en-US"/>
               <a:t>Second level</a:t>
             </a:r>
           </a:p>
           <a:p>
             <a:pPr lvl="2"/>
             <a:r>
-              <a:rPr lang="en-US" smtClean="0"/>
+              <a:rPr lang="en-US"/>
               <a:t>Third level</a:t>
             </a:r>
           </a:p>
           <a:p>
             <a:pPr lvl="3"/>
             <a:r>
-              <a:rPr lang="en-US" smtClean="0"/>
+              <a:rPr lang="en-US"/>
               <a:t>Fourth level</a:t>
             </a:r>
           </a:p>
           <a:p>
             <a:pPr lvl="4"/>
             <a:r>
-              <a:rPr lang="en-US" smtClean="0"/>
+              <a:rPr lang="en-US"/>
               <a:t>Fifth level</a:t>
             </a:r>
-            <a:endParaRPr lang="en-US"/>
           </a:p>
         </p:txBody>
       </p:sp>
@@ -3219,7 +2995,7 @@
           <a:p>
             <a:pPr lvl="0"/>
             <a:r>
-              <a:rPr lang="en-US" smtClean="0"/>
+              <a:rPr lang="en-US"/>
               <a:t>Click to edit Master text styles</a:t>
             </a:r>
           </a:p>
@@ -3242,7 +3018,7 @@
           <a:p>
             <a:fld id="{5BCAD085-E8A6-8845-BD4E-CB4CCA059FC4}" type="datetimeFigureOut">
               <a:rPr lang="en-US" smtClean="0"/>
-              <a:t>1/27/13</a:t>
+              <a:t>5/28/2026</a:t>
             </a:fld>
             <a:endParaRPr lang="en-US"/>
           </a:p>
@@ -3345,10 +3121,9 @@
           </a:lstStyle>
           <a:p>
             <a:r>
-              <a:rPr lang="en-US" smtClean="0"/>
+              <a:rPr lang="en-US"/>
               <a:t>Click to edit Master title style</a:t>
             </a:r>
-            <a:endParaRPr lang="en-US"/>
           </a:p>
         </p:txBody>
       </p:sp>
@@ -3472,7 +3247,7 @@
           <a:p>
             <a:pPr lvl="0"/>
             <a:r>
-              <a:rPr lang="en-US" smtClean="0"/>
+              <a:rPr lang="en-US"/>
               <a:t>Click to edit Master text styles</a:t>
             </a:r>
           </a:p>
@@ -3495,7 +3270,7 @@
           <a:p>
             <a:fld id="{5BCAD085-E8A6-8845-BD4E-CB4CCA059FC4}" type="datetimeFigureOut">
               <a:rPr lang="en-US" smtClean="0"/>
-              <a:t>1/27/13</a:t>
+              <a:t>5/28/2026</a:t>
             </a:fld>
             <a:endParaRPr lang="en-US"/>
           </a:p>
@@ -3604,10 +3379,9 @@
           <a:lstStyle/>
           <a:p>
             <a:r>
-              <a:rPr lang="en-US" smtClean="0"/>
+              <a:rPr lang="en-US"/>
               <a:t>Click to edit Master title style</a:t>
             </a:r>
-            <a:endParaRPr lang="en-US"/>
           </a:p>
         </p:txBody>
       </p:sp>
@@ -3638,38 +3412,37 @@
           <a:p>
             <a:pPr lvl="0"/>
             <a:r>
-              <a:rPr lang="en-US" smtClean="0"/>
+              <a:rPr lang="en-US"/>
               <a:t>Click to edit Master text styles</a:t>
             </a:r>
           </a:p>
           <a:p>
             <a:pPr lvl="1"/>
             <a:r>
-              <a:rPr lang="en-US" smtClean="0"/>
+              <a:rPr lang="en-US"/>
               <a:t>Second level</a:t>
             </a:r>
           </a:p>
           <a:p>
             <a:pPr lvl="2"/>
             <a:r>
-              <a:rPr lang="en-US" smtClean="0"/>
+              <a:rPr lang="en-US"/>
               <a:t>Third level</a:t>
             </a:r>
           </a:p>
           <a:p>
             <a:pPr lvl="3"/>
             <a:r>
-              <a:rPr lang="en-US" smtClean="0"/>
+              <a:rPr lang="en-US"/>
               <a:t>Fourth level</a:t>
             </a:r>
           </a:p>
           <a:p>
             <a:pPr lvl="4"/>
             <a:r>
-              <a:rPr lang="en-US" smtClean="0"/>
+              <a:rPr lang="en-US"/>
               <a:t>Fifth level</a:t>
             </a:r>
-            <a:endParaRPr lang="en-US"/>
           </a:p>
         </p:txBody>
       </p:sp>
@@ -3708,7 +3481,7 @@
           <a:p>
             <a:fld id="{5BCAD085-E8A6-8845-BD4E-CB4CCA059FC4}" type="datetimeFigureOut">
               <a:rPr lang="en-US" smtClean="0"/>
-              <a:t>1/27/13</a:t>
+              <a:t>5/28/2026</a:t>
             </a:fld>
             <a:endParaRPr lang="en-US"/>
           </a:p>
@@ -4067,7 +3840,7 @@
 </file>
 
 <file path=ppt/slides/slide1.xml><?xml version="1.0" encoding="utf-8"?>
-<p:sld xmlns:a="http://schemas.openxmlformats.org/drawingml/2006/main" xmlns:p="http://schemas.openxmlformats.org/presentationml/2006/main" xmlns:r="http://schemas.openxmlformats.org/officeDocument/2006/relationships">
+<p:sld xmlns:a="http://schemas.openxmlformats.org/drawingml/2006/main" xmlns:r="http://schemas.openxmlformats.org/officeDocument/2006/relationships" xmlns:p="http://schemas.openxmlformats.org/presentationml/2006/main">
   <p:cSld>
     <p:spTree>
       <p:nvGrpSpPr>
@@ -4075,7 +3848,14 @@
         <p:cNvGrpSpPr/>
         <p:nvPr/>
       </p:nvGrpSpPr>
-      <p:grpSpPr/>
+      <p:grpSpPr>
+        <a:xfrm>
+          <a:off x="0" y="0"/>
+          <a:ext cx="0" cy="0"/>
+          <a:chOff x="0" y="0"/>
+          <a:chExt cx="0" cy="0"/>
+        </a:xfrm>
+      </p:grpSpPr>
       <p:sp>
         <p:nvSpPr>
           <p:cNvPr id="2" name="Rectangle 1"/>
@@ -4117,6 +3897,7 @@
           <a:lstStyle/>
           <a:p>
             <a:pPr algn="ctr"/>
+            <a:endParaRPr/>
           </a:p>
         </p:txBody>
       </p:sp>
@@ -4161,6 +3942,7 @@
           <a:lstStyle/>
           <a:p>
             <a:pPr algn="ctr"/>
+            <a:endParaRPr/>
           </a:p>
         </p:txBody>
       </p:sp>
@@ -4181,7 +3963,7 @@
           <a:noFill/>
         </p:spPr>
         <p:txBody>
-          <a:bodyPr wrap="square" lIns="0" rIns="0" tIns="0" bIns="0" anchor="t">
+          <a:bodyPr wrap="square" lIns="0" tIns="0" rIns="0" bIns="0" anchor="t">
             <a:spAutoFit/>
           </a:bodyPr>
           <a:lstStyle/>
@@ -4216,7 +3998,7 @@
           <a:noFill/>
         </p:spPr>
         <p:txBody>
-          <a:bodyPr wrap="square" lIns="0" rIns="0" tIns="0" bIns="0" anchor="t">
+          <a:bodyPr wrap="square" lIns="0" tIns="0" rIns="0" bIns="0" anchor="t">
             <a:spAutoFit/>
           </a:bodyPr>
           <a:lstStyle/>
@@ -4251,7 +4033,7 @@
           <a:noFill/>
         </p:spPr>
         <p:txBody>
-          <a:bodyPr wrap="square" lIns="0" rIns="0" tIns="0" bIns="0" anchor="t">
+          <a:bodyPr wrap="square" lIns="0" tIns="0" rIns="0" bIns="0" anchor="t">
             <a:spAutoFit/>
           </a:bodyPr>
           <a:lstStyle/>
@@ -4286,7 +4068,7 @@
           <a:noFill/>
         </p:spPr>
         <p:txBody>
-          <a:bodyPr wrap="square" lIns="0" rIns="0" tIns="0" bIns="0" anchor="t">
+          <a:bodyPr wrap="square" lIns="0" tIns="0" rIns="0" bIns="0" anchor="t">
             <a:spAutoFit/>
           </a:bodyPr>
           <a:lstStyle/>
@@ -4321,7 +4103,7 @@
           <a:noFill/>
         </p:spPr>
         <p:txBody>
-          <a:bodyPr wrap="square" lIns="0" rIns="0" tIns="0" bIns="0" anchor="t">
+          <a:bodyPr wrap="square" lIns="0" tIns="0" rIns="0" bIns="0" anchor="t">
             <a:spAutoFit/>
           </a:bodyPr>
           <a:lstStyle/>
@@ -4356,7 +4138,7 @@
           <a:noFill/>
         </p:spPr>
         <p:txBody>
-          <a:bodyPr wrap="square" lIns="0" rIns="0" tIns="0" bIns="0" anchor="t">
+          <a:bodyPr wrap="square" lIns="0" tIns="0" rIns="0" bIns="0" anchor="t">
             <a:spAutoFit/>
           </a:bodyPr>
           <a:lstStyle/>
@@ -4391,7 +4173,7 @@
           <a:noFill/>
         </p:spPr>
         <p:txBody>
-          <a:bodyPr wrap="square" lIns="0" rIns="0" tIns="0" bIns="0" anchor="t">
+          <a:bodyPr wrap="square" lIns="0" tIns="0" rIns="0" bIns="0" anchor="t">
             <a:spAutoFit/>
           </a:bodyPr>
           <a:lstStyle/>
@@ -4420,7 +4202,7 @@
         <p:spPr>
           <a:xfrm>
             <a:off x="4937760" y="4389120"/>
-            <a:ext cx="6858000" cy="457200"/>
+            <a:ext cx="6858000" cy="338554"/>
           </a:xfrm>
           <a:prstGeom prst="rect">
             <a:avLst/>
@@ -4428,14 +4210,14 @@
           <a:noFill/>
         </p:spPr>
         <p:txBody>
-          <a:bodyPr wrap="square" lIns="0" rIns="0" tIns="0" bIns="0" anchor="t">
+          <a:bodyPr wrap="square" lIns="0" tIns="0" rIns="0" bIns="0" anchor="t">
             <a:spAutoFit/>
           </a:bodyPr>
           <a:lstStyle/>
           <a:p>
             <a:pPr algn="l"/>
             <a:r>
-              <a:rPr sz="2200" b="1">
+              <a:rPr sz="2200" b="1" dirty="0">
                 <a:solidFill>
                   <a:srgbClr val="1F4E79"/>
                 </a:solidFill>
@@ -4443,41 +4225,21 @@
               </a:rPr>
               <a:t>Choolwe</a:t>
             </a:r>
-          </a:p>
-        </p:txBody>
-      </p:sp>
-      <p:sp>
-        <p:nvSpPr>
-          <p:cNvPr id="12" name="TextBox 11"/>
-          <p:cNvSpPr txBox="1"/>
-          <p:nvPr/>
-        </p:nvSpPr>
-        <p:spPr>
-          <a:xfrm>
-            <a:off x="4937760" y="4892040"/>
-            <a:ext cx="6858000" cy="365760"/>
-          </a:xfrm>
-          <a:prstGeom prst="rect">
-            <a:avLst/>
-          </a:prstGeom>
-          <a:noFill/>
-        </p:spPr>
-        <p:txBody>
-          <a:bodyPr wrap="square" lIns="0" rIns="0" tIns="0" bIns="0" anchor="t">
-            <a:spAutoFit/>
-          </a:bodyPr>
-          <a:lstStyle/>
-          <a:p>
-            <a:pPr algn="l"/>
-            <a:r>
-              <a:rPr sz="1300" b="0">
-                <a:solidFill>
-                  <a:srgbClr val="4B5563"/>
+            <a:r>
+              <a:rPr lang="en-US" sz="2200" b="1" dirty="0">
+                <a:solidFill>
+                  <a:srgbClr val="1F4E79"/>
                 </a:solidFill>
                 <a:latin typeface="Calibri"/>
               </a:rPr>
-              <a:t>Analytics in Training  •  May 2026</a:t>
-            </a:r>
+              <a:t> Cheelo</a:t>
+            </a:r>
+            <a:endParaRPr sz="2200" b="1" dirty="0">
+              <a:solidFill>
+                <a:srgbClr val="1F4E79"/>
+              </a:solidFill>
+              <a:latin typeface="Calibri"/>
+            </a:endParaRPr>
           </a:p>
         </p:txBody>
       </p:sp>
@@ -4522,6 +4284,7 @@
           <a:lstStyle/>
           <a:p>
             <a:pPr algn="ctr"/>
+            <a:endParaRPr/>
           </a:p>
         </p:txBody>
       </p:sp>
@@ -4566,6 +4329,7 @@
           <a:lstStyle/>
           <a:p>
             <a:pPr algn="ctr"/>
+            <a:endParaRPr/>
           </a:p>
         </p:txBody>
       </p:sp>
@@ -4610,6 +4374,7 @@
           <a:lstStyle/>
           <a:p>
             <a:pPr algn="ctr"/>
+            <a:endParaRPr/>
           </a:p>
         </p:txBody>
       </p:sp>
@@ -4654,6 +4419,7 @@
           <a:lstStyle/>
           <a:p>
             <a:pPr algn="ctr"/>
+            <a:endParaRPr/>
           </a:p>
         </p:txBody>
       </p:sp>
@@ -4666,7 +4432,7 @@
 </file>
 
 <file path=ppt/slides/slide2.xml><?xml version="1.0" encoding="utf-8"?>
-<p:sld xmlns:a="http://schemas.openxmlformats.org/drawingml/2006/main" xmlns:p="http://schemas.openxmlformats.org/presentationml/2006/main" xmlns:r="http://schemas.openxmlformats.org/officeDocument/2006/relationships">
+<p:sld xmlns:a="http://schemas.openxmlformats.org/drawingml/2006/main" xmlns:r="http://schemas.openxmlformats.org/officeDocument/2006/relationships" xmlns:p="http://schemas.openxmlformats.org/presentationml/2006/main">
   <p:cSld>
     <p:spTree>
       <p:nvGrpSpPr>
@@ -4674,7 +4440,14 @@
         <p:cNvGrpSpPr/>
         <p:nvPr/>
       </p:nvGrpSpPr>
-      <p:grpSpPr/>
+      <p:grpSpPr>
+        <a:xfrm>
+          <a:off x="0" y="0"/>
+          <a:ext cx="0" cy="0"/>
+          <a:chOff x="0" y="0"/>
+          <a:chExt cx="0" cy="0"/>
+        </a:xfrm>
+      </p:grpSpPr>
       <p:sp>
         <p:nvSpPr>
           <p:cNvPr id="2" name="Rectangle 1"/>
@@ -4716,6 +4489,7 @@
           <a:lstStyle/>
           <a:p>
             <a:pPr algn="ctr"/>
+            <a:endParaRPr/>
           </a:p>
         </p:txBody>
       </p:sp>
@@ -4760,6 +4534,7 @@
           <a:lstStyle/>
           <a:p>
             <a:pPr algn="ctr"/>
+            <a:endParaRPr/>
           </a:p>
         </p:txBody>
       </p:sp>
@@ -4804,6 +4579,7 @@
           <a:lstStyle/>
           <a:p>
             <a:pPr algn="ctr"/>
+            <a:endParaRPr/>
           </a:p>
         </p:txBody>
       </p:sp>
@@ -4824,7 +4600,7 @@
           <a:noFill/>
         </p:spPr>
         <p:txBody>
-          <a:bodyPr wrap="square" lIns="0" rIns="0" tIns="0" bIns="0" anchor="t">
+          <a:bodyPr wrap="square" lIns="0" tIns="0" rIns="0" bIns="0" anchor="t">
             <a:spAutoFit/>
           </a:bodyPr>
           <a:lstStyle/>
@@ -4929,7 +4705,7 @@
           <a:noFill/>
         </p:spPr>
         <p:txBody>
-          <a:bodyPr wrap="square" lIns="0" rIns="0" tIns="0" bIns="0" anchor="t">
+          <a:bodyPr wrap="square" lIns="0" tIns="0" rIns="0" bIns="0" anchor="t">
             <a:spAutoFit/>
           </a:bodyPr>
           <a:lstStyle/>
@@ -4989,6 +4765,7 @@
           <a:lstStyle/>
           <a:p>
             <a:pPr algn="ctr"/>
+            <a:endParaRPr/>
           </a:p>
         </p:txBody>
       </p:sp>
@@ -5033,6 +4810,7 @@
           <a:lstStyle/>
           <a:p>
             <a:pPr algn="ctr"/>
+            <a:endParaRPr/>
           </a:p>
         </p:txBody>
       </p:sp>
@@ -5077,6 +4855,7 @@
           <a:lstStyle/>
           <a:p>
             <a:pPr algn="ctr"/>
+            <a:endParaRPr/>
           </a:p>
         </p:txBody>
       </p:sp>
@@ -5097,7 +4876,7 @@
           <a:noFill/>
         </p:spPr>
         <p:txBody>
-          <a:bodyPr wrap="square" lIns="0" rIns="0" tIns="0" bIns="0" anchor="t">
+          <a:bodyPr wrap="square" lIns="0" tIns="0" rIns="0" bIns="0" anchor="t">
             <a:spAutoFit/>
           </a:bodyPr>
           <a:lstStyle/>
@@ -5132,7 +4911,7 @@
           <a:noFill/>
         </p:spPr>
         <p:txBody>
-          <a:bodyPr wrap="square" lIns="0" rIns="0" tIns="0" bIns="0" anchor="t">
+          <a:bodyPr wrap="square" lIns="0" tIns="0" rIns="0" bIns="0" anchor="t">
             <a:spAutoFit/>
           </a:bodyPr>
           <a:lstStyle/>
@@ -5159,7 +4938,7 @@
 </file>
 
 <file path=ppt/slides/slide3.xml><?xml version="1.0" encoding="utf-8"?>
-<p:sld xmlns:a="http://schemas.openxmlformats.org/drawingml/2006/main" xmlns:p="http://schemas.openxmlformats.org/presentationml/2006/main" xmlns:r="http://schemas.openxmlformats.org/officeDocument/2006/relationships">
+<p:sld xmlns:a="http://schemas.openxmlformats.org/drawingml/2006/main" xmlns:r="http://schemas.openxmlformats.org/officeDocument/2006/relationships" xmlns:p="http://schemas.openxmlformats.org/presentationml/2006/main">
   <p:cSld>
     <p:spTree>
       <p:nvGrpSpPr>
@@ -5167,7 +4946,14 @@
         <p:cNvGrpSpPr/>
         <p:nvPr/>
       </p:nvGrpSpPr>
-      <p:grpSpPr/>
+      <p:grpSpPr>
+        <a:xfrm>
+          <a:off x="0" y="0"/>
+          <a:ext cx="0" cy="0"/>
+          <a:chOff x="0" y="0"/>
+          <a:chExt cx="0" cy="0"/>
+        </a:xfrm>
+      </p:grpSpPr>
       <p:sp>
         <p:nvSpPr>
           <p:cNvPr id="2" name="Rectangle 1"/>
@@ -5209,6 +4995,7 @@
           <a:lstStyle/>
           <a:p>
             <a:pPr algn="ctr"/>
+            <a:endParaRPr/>
           </a:p>
         </p:txBody>
       </p:sp>
@@ -5253,6 +5040,7 @@
           <a:lstStyle/>
           <a:p>
             <a:pPr algn="ctr"/>
+            <a:endParaRPr/>
           </a:p>
         </p:txBody>
       </p:sp>
@@ -5273,7 +5061,7 @@
           <a:noFill/>
         </p:spPr>
         <p:txBody>
-          <a:bodyPr wrap="square" lIns="0" rIns="0" tIns="0" bIns="0" anchor="t">
+          <a:bodyPr wrap="square" lIns="0" tIns="0" rIns="0" bIns="0" anchor="t">
             <a:spAutoFit/>
           </a:bodyPr>
           <a:lstStyle/>
@@ -5308,7 +5096,7 @@
           <a:noFill/>
         </p:spPr>
         <p:txBody>
-          <a:bodyPr wrap="square" lIns="0" rIns="0" tIns="0" bIns="0" anchor="t">
+          <a:bodyPr wrap="square" lIns="0" tIns="0" rIns="0" bIns="0" anchor="t">
             <a:spAutoFit/>
           </a:bodyPr>
           <a:lstStyle/>
@@ -5370,6 +5158,7 @@
           <a:lstStyle/>
           <a:p>
             <a:pPr algn="ctr"/>
+            <a:endParaRPr/>
           </a:p>
         </p:txBody>
       </p:sp>
@@ -5414,6 +5203,7 @@
           <a:lstStyle/>
           <a:p>
             <a:pPr algn="ctr"/>
+            <a:endParaRPr/>
           </a:p>
         </p:txBody>
       </p:sp>
@@ -5458,6 +5248,7 @@
           <a:lstStyle/>
           <a:p>
             <a:pPr algn="ctr"/>
+            <a:endParaRPr/>
           </a:p>
         </p:txBody>
       </p:sp>
@@ -5502,6 +5293,7 @@
           <a:lstStyle/>
           <a:p>
             <a:pPr algn="ctr"/>
+            <a:endParaRPr/>
           </a:p>
         </p:txBody>
       </p:sp>
@@ -5546,6 +5338,7 @@
           <a:lstStyle/>
           <a:p>
             <a:pPr algn="ctr"/>
+            <a:endParaRPr/>
           </a:p>
         </p:txBody>
       </p:sp>
@@ -5566,7 +5359,7 @@
           <a:noFill/>
         </p:spPr>
         <p:txBody>
-          <a:bodyPr wrap="square" lIns="0" rIns="0" tIns="0" bIns="0" anchor="t">
+          <a:bodyPr wrap="square" lIns="0" tIns="0" rIns="0" bIns="0" anchor="t">
             <a:spAutoFit/>
           </a:bodyPr>
           <a:lstStyle/>
@@ -5601,7 +5394,7 @@
           <a:noFill/>
         </p:spPr>
         <p:txBody>
-          <a:bodyPr wrap="square" lIns="0" rIns="0" tIns="0" bIns="0" anchor="t">
+          <a:bodyPr wrap="square" lIns="0" tIns="0" rIns="0" bIns="0" anchor="t">
             <a:spAutoFit/>
           </a:bodyPr>
           <a:lstStyle/>
@@ -5662,6 +5455,7 @@
           <a:lstStyle/>
           <a:p>
             <a:pPr algn="ctr"/>
+            <a:endParaRPr/>
           </a:p>
         </p:txBody>
       </p:sp>
@@ -5706,6 +5500,7 @@
           <a:lstStyle/>
           <a:p>
             <a:pPr algn="ctr"/>
+            <a:endParaRPr/>
           </a:p>
         </p:txBody>
       </p:sp>
@@ -5750,6 +5545,7 @@
           <a:lstStyle/>
           <a:p>
             <a:pPr algn="ctr"/>
+            <a:endParaRPr/>
           </a:p>
         </p:txBody>
       </p:sp>
@@ -5794,6 +5590,7 @@
           <a:lstStyle/>
           <a:p>
             <a:pPr algn="ctr"/>
+            <a:endParaRPr/>
           </a:p>
         </p:txBody>
       </p:sp>
@@ -5814,7 +5611,7 @@
           <a:noFill/>
         </p:spPr>
         <p:txBody>
-          <a:bodyPr wrap="square" lIns="0" rIns="0" tIns="0" bIns="0" anchor="t">
+          <a:bodyPr wrap="square" lIns="0" tIns="0" rIns="0" bIns="0" anchor="t">
             <a:spAutoFit/>
           </a:bodyPr>
           <a:lstStyle/>
@@ -5850,7 +5647,7 @@
           <a:noFill/>
         </p:spPr>
         <p:txBody>
-          <a:bodyPr wrap="square" lIns="0" rIns="0" tIns="0" bIns="0" anchor="t">
+          <a:bodyPr wrap="square" lIns="0" tIns="0" rIns="0" bIns="0" anchor="t">
             <a:spAutoFit/>
           </a:bodyPr>
           <a:lstStyle/>
@@ -5912,6 +5709,7 @@
           <a:lstStyle/>
           <a:p>
             <a:pPr algn="ctr"/>
+            <a:endParaRPr/>
           </a:p>
         </p:txBody>
       </p:sp>
@@ -5956,6 +5754,7 @@
           <a:lstStyle/>
           <a:p>
             <a:pPr algn="ctr"/>
+            <a:endParaRPr/>
           </a:p>
         </p:txBody>
       </p:sp>
@@ -6000,6 +5799,7 @@
           <a:lstStyle/>
           <a:p>
             <a:pPr algn="ctr"/>
+            <a:endParaRPr/>
           </a:p>
         </p:txBody>
       </p:sp>
@@ -6044,6 +5844,7 @@
           <a:lstStyle/>
           <a:p>
             <a:pPr algn="ctr"/>
+            <a:endParaRPr/>
           </a:p>
         </p:txBody>
       </p:sp>
@@ -6064,7 +5865,7 @@
           <a:noFill/>
         </p:spPr>
         <p:txBody>
-          <a:bodyPr wrap="square" lIns="0" rIns="0" tIns="0" bIns="0" anchor="t">
+          <a:bodyPr wrap="square" lIns="0" tIns="0" rIns="0" bIns="0" anchor="t">
             <a:spAutoFit/>
           </a:bodyPr>
           <a:lstStyle/>
@@ -6099,7 +5900,7 @@
           <a:noFill/>
         </p:spPr>
         <p:txBody>
-          <a:bodyPr wrap="square" lIns="0" rIns="0" tIns="0" bIns="0" anchor="t">
+          <a:bodyPr wrap="square" lIns="0" tIns="0" rIns="0" bIns="0" anchor="t">
             <a:spAutoFit/>
           </a:bodyPr>
           <a:lstStyle/>
@@ -6134,7 +5935,7 @@
           <a:noFill/>
         </p:spPr>
         <p:txBody>
-          <a:bodyPr wrap="square" lIns="0" rIns="0" tIns="0" bIns="0" anchor="t">
+          <a:bodyPr wrap="square" lIns="0" tIns="0" rIns="0" bIns="0" anchor="t">
             <a:spAutoFit/>
           </a:bodyPr>
           <a:lstStyle/>
@@ -6169,7 +5970,7 @@
           <a:noFill/>
         </p:spPr>
         <p:txBody>
-          <a:bodyPr wrap="square" lIns="0" rIns="0" tIns="0" bIns="0" anchor="t">
+          <a:bodyPr wrap="square" lIns="0" tIns="0" rIns="0" bIns="0" anchor="t">
             <a:spAutoFit/>
           </a:bodyPr>
           <a:lstStyle/>
@@ -6204,7 +6005,7 @@
           <a:noFill/>
         </p:spPr>
         <p:txBody>
-          <a:bodyPr wrap="square" lIns="0" rIns="0" tIns="0" bIns="0" anchor="t">
+          <a:bodyPr wrap="square" lIns="0" tIns="0" rIns="0" bIns="0" anchor="t">
             <a:spAutoFit/>
           </a:bodyPr>
           <a:lstStyle/>
@@ -6231,7 +6032,7 @@
 </file>
 
 <file path=ppt/slides/slide4.xml><?xml version="1.0" encoding="utf-8"?>
-<p:sld xmlns:a="http://schemas.openxmlformats.org/drawingml/2006/main" xmlns:p="http://schemas.openxmlformats.org/presentationml/2006/main" xmlns:r="http://schemas.openxmlformats.org/officeDocument/2006/relationships">
+<p:sld xmlns:a="http://schemas.openxmlformats.org/drawingml/2006/main" xmlns:r="http://schemas.openxmlformats.org/officeDocument/2006/relationships" xmlns:p="http://schemas.openxmlformats.org/presentationml/2006/main">
   <p:cSld>
     <p:spTree>
       <p:nvGrpSpPr>
@@ -6239,7 +6040,14 @@
         <p:cNvGrpSpPr/>
         <p:nvPr/>
       </p:nvGrpSpPr>
-      <p:grpSpPr/>
+      <p:grpSpPr>
+        <a:xfrm>
+          <a:off x="0" y="0"/>
+          <a:ext cx="0" cy="0"/>
+          <a:chOff x="0" y="0"/>
+          <a:chExt cx="0" cy="0"/>
+        </a:xfrm>
+      </p:grpSpPr>
       <p:sp>
         <p:nvSpPr>
           <p:cNvPr id="2" name="Rectangle 1"/>
@@ -6281,6 +6089,7 @@
           <a:lstStyle/>
           <a:p>
             <a:pPr algn="ctr"/>
+            <a:endParaRPr/>
           </a:p>
         </p:txBody>
       </p:sp>
@@ -6325,6 +6134,7 @@
           <a:lstStyle/>
           <a:p>
             <a:pPr algn="ctr"/>
+            <a:endParaRPr/>
           </a:p>
         </p:txBody>
       </p:sp>
@@ -6345,7 +6155,7 @@
           <a:noFill/>
         </p:spPr>
         <p:txBody>
-          <a:bodyPr wrap="square" lIns="0" rIns="0" tIns="0" bIns="0" anchor="t">
+          <a:bodyPr wrap="square" lIns="0" tIns="0" rIns="0" bIns="0" anchor="t">
             <a:spAutoFit/>
           </a:bodyPr>
           <a:lstStyle/>
@@ -6380,7 +6190,7 @@
           <a:noFill/>
         </p:spPr>
         <p:txBody>
-          <a:bodyPr wrap="square" lIns="0" rIns="0" tIns="0" bIns="0" anchor="t">
+          <a:bodyPr wrap="square" lIns="0" tIns="0" rIns="0" bIns="0" anchor="t">
             <a:spAutoFit/>
           </a:bodyPr>
           <a:lstStyle/>
@@ -6408,7 +6218,7 @@
           <p:nvPr/>
         </p:nvPicPr>
         <p:blipFill>
-          <a:blip r:embed="rId2"/>
+          <a:blip r:embed="rId3"/>
           <a:stretch>
             <a:fillRect/>
           </a:stretch>
@@ -6466,6 +6276,7 @@
           <a:lstStyle/>
           <a:p>
             <a:pPr algn="ctr"/>
+            <a:endParaRPr/>
           </a:p>
         </p:txBody>
       </p:sp>
@@ -6486,7 +6297,7 @@
           <a:noFill/>
         </p:spPr>
         <p:txBody>
-          <a:bodyPr wrap="square" lIns="0" rIns="0" tIns="0" bIns="0" anchor="t">
+          <a:bodyPr wrap="square" lIns="0" tIns="0" rIns="0" bIns="0" anchor="t">
             <a:spAutoFit/>
           </a:bodyPr>
           <a:lstStyle/>
@@ -6521,7 +6332,7 @@
           <a:noFill/>
         </p:spPr>
         <p:txBody>
-          <a:bodyPr wrap="square" lIns="0" rIns="0" tIns="0" bIns="0" anchor="t">
+          <a:bodyPr wrap="square" lIns="0" tIns="0" rIns="0" bIns="0" anchor="t">
             <a:spAutoFit/>
           </a:bodyPr>
           <a:lstStyle/>
@@ -6556,7 +6367,7 @@
           <a:noFill/>
         </p:spPr>
         <p:txBody>
-          <a:bodyPr wrap="square" lIns="0" rIns="0" tIns="0" bIns="0" anchor="t">
+          <a:bodyPr wrap="square" lIns="0" tIns="0" rIns="0" bIns="0" anchor="t">
             <a:spAutoFit/>
           </a:bodyPr>
           <a:lstStyle/>
@@ -6591,7 +6402,7 @@
           <a:noFill/>
         </p:spPr>
         <p:txBody>
-          <a:bodyPr wrap="square" lIns="0" rIns="0" tIns="0" bIns="0" anchor="t">
+          <a:bodyPr wrap="square" lIns="0" tIns="0" rIns="0" bIns="0" anchor="t">
             <a:spAutoFit/>
           </a:bodyPr>
           <a:lstStyle/>
@@ -6626,7 +6437,7 @@
           <a:noFill/>
         </p:spPr>
         <p:txBody>
-          <a:bodyPr wrap="square" lIns="0" rIns="0" tIns="0" bIns="0" anchor="t">
+          <a:bodyPr wrap="square" lIns="0" tIns="0" rIns="0" bIns="0" anchor="t">
             <a:spAutoFit/>
           </a:bodyPr>
           <a:lstStyle/>
@@ -6661,7 +6472,7 @@
           <a:noFill/>
         </p:spPr>
         <p:txBody>
-          <a:bodyPr wrap="square" lIns="0" rIns="0" tIns="0" bIns="0" anchor="t">
+          <a:bodyPr wrap="square" lIns="0" tIns="0" rIns="0" bIns="0" anchor="t">
             <a:spAutoFit/>
           </a:bodyPr>
           <a:lstStyle/>
@@ -6697,7 +6508,7 @@
           <a:noFill/>
         </p:spPr>
         <p:txBody>
-          <a:bodyPr wrap="square" lIns="0" rIns="0" tIns="0" bIns="0" anchor="t">
+          <a:bodyPr wrap="square" lIns="0" tIns="0" rIns="0" bIns="0" anchor="t">
             <a:spAutoFit/>
           </a:bodyPr>
           <a:lstStyle/>
@@ -6732,7 +6543,7 @@
           <a:noFill/>
         </p:spPr>
         <p:txBody>
-          <a:bodyPr wrap="square" lIns="0" rIns="0" tIns="0" bIns="0" anchor="t">
+          <a:bodyPr wrap="square" lIns="0" tIns="0" rIns="0" bIns="0" anchor="t">
             <a:spAutoFit/>
           </a:bodyPr>
           <a:lstStyle/>
@@ -6759,7 +6570,7 @@
 </file>
 
 <file path=ppt/slides/slide5.xml><?xml version="1.0" encoding="utf-8"?>
-<p:sld xmlns:a="http://schemas.openxmlformats.org/drawingml/2006/main" xmlns:p="http://schemas.openxmlformats.org/presentationml/2006/main" xmlns:r="http://schemas.openxmlformats.org/officeDocument/2006/relationships">
+<p:sld xmlns:a="http://schemas.openxmlformats.org/drawingml/2006/main" xmlns:r="http://schemas.openxmlformats.org/officeDocument/2006/relationships" xmlns:p="http://schemas.openxmlformats.org/presentationml/2006/main">
   <p:cSld>
     <p:spTree>
       <p:nvGrpSpPr>
@@ -6767,7 +6578,14 @@
         <p:cNvGrpSpPr/>
         <p:nvPr/>
       </p:nvGrpSpPr>
-      <p:grpSpPr/>
+      <p:grpSpPr>
+        <a:xfrm>
+          <a:off x="0" y="0"/>
+          <a:ext cx="0" cy="0"/>
+          <a:chOff x="0" y="0"/>
+          <a:chExt cx="0" cy="0"/>
+        </a:xfrm>
+      </p:grpSpPr>
       <p:sp>
         <p:nvSpPr>
           <p:cNvPr id="2" name="Rectangle 1"/>
@@ -6809,6 +6627,7 @@
           <a:lstStyle/>
           <a:p>
             <a:pPr algn="ctr"/>
+            <a:endParaRPr/>
           </a:p>
         </p:txBody>
       </p:sp>
@@ -6853,6 +6672,7 @@
           <a:lstStyle/>
           <a:p>
             <a:pPr algn="ctr"/>
+            <a:endParaRPr/>
           </a:p>
         </p:txBody>
       </p:sp>
@@ -6873,7 +6693,7 @@
           <a:noFill/>
         </p:spPr>
         <p:txBody>
-          <a:bodyPr wrap="square" lIns="0" rIns="0" tIns="0" bIns="0" anchor="t">
+          <a:bodyPr wrap="square" lIns="0" tIns="0" rIns="0" bIns="0" anchor="t">
             <a:spAutoFit/>
           </a:bodyPr>
           <a:lstStyle/>
@@ -6908,7 +6728,7 @@
           <a:noFill/>
         </p:spPr>
         <p:txBody>
-          <a:bodyPr wrap="square" lIns="0" rIns="0" tIns="0" bIns="0" anchor="t">
+          <a:bodyPr wrap="square" lIns="0" tIns="0" rIns="0" bIns="0" anchor="t">
             <a:spAutoFit/>
           </a:bodyPr>
           <a:lstStyle/>
@@ -6936,7 +6756,7 @@
           <p:nvPr/>
         </p:nvPicPr>
         <p:blipFill>
-          <a:blip r:embed="rId2"/>
+          <a:blip r:embed="rId3"/>
           <a:stretch>
             <a:fillRect/>
           </a:stretch>
@@ -6994,6 +6814,7 @@
           <a:lstStyle/>
           <a:p>
             <a:pPr algn="ctr"/>
+            <a:endParaRPr/>
           </a:p>
         </p:txBody>
       </p:sp>
@@ -7014,7 +6835,7 @@
           <a:noFill/>
         </p:spPr>
         <p:txBody>
-          <a:bodyPr wrap="square" lIns="0" rIns="0" tIns="0" bIns="0" anchor="t">
+          <a:bodyPr wrap="square" lIns="0" tIns="0" rIns="0" bIns="0" anchor="t">
             <a:spAutoFit/>
           </a:bodyPr>
           <a:lstStyle/>
@@ -7049,7 +6870,7 @@
           <a:noFill/>
         </p:spPr>
         <p:txBody>
-          <a:bodyPr wrap="square" lIns="0" rIns="0" tIns="0" bIns="0" anchor="t">
+          <a:bodyPr wrap="square" lIns="0" tIns="0" rIns="0" bIns="0" anchor="t">
             <a:spAutoFit/>
           </a:bodyPr>
           <a:lstStyle/>
@@ -7084,7 +6905,7 @@
           <a:noFill/>
         </p:spPr>
         <p:txBody>
-          <a:bodyPr wrap="square" lIns="0" rIns="0" tIns="0" bIns="0" anchor="t">
+          <a:bodyPr wrap="square" lIns="0" tIns="0" rIns="0" bIns="0" anchor="t">
             <a:spAutoFit/>
           </a:bodyPr>
           <a:lstStyle/>
@@ -7119,7 +6940,7 @@
           <a:noFill/>
         </p:spPr>
         <p:txBody>
-          <a:bodyPr wrap="square" lIns="0" rIns="0" tIns="0" bIns="0" anchor="t">
+          <a:bodyPr wrap="square" lIns="0" tIns="0" rIns="0" bIns="0" anchor="t">
             <a:spAutoFit/>
           </a:bodyPr>
           <a:lstStyle/>
@@ -7146,7 +6967,7 @@
 </file>
 
 <file path=ppt/slides/slide6.xml><?xml version="1.0" encoding="utf-8"?>
-<p:sld xmlns:a="http://schemas.openxmlformats.org/drawingml/2006/main" xmlns:p="http://schemas.openxmlformats.org/presentationml/2006/main" xmlns:r="http://schemas.openxmlformats.org/officeDocument/2006/relationships">
+<p:sld xmlns:a="http://schemas.openxmlformats.org/drawingml/2006/main" xmlns:r="http://schemas.openxmlformats.org/officeDocument/2006/relationships" xmlns:p="http://schemas.openxmlformats.org/presentationml/2006/main">
   <p:cSld>
     <p:spTree>
       <p:nvGrpSpPr>
@@ -7154,7 +6975,14 @@
         <p:cNvGrpSpPr/>
         <p:nvPr/>
       </p:nvGrpSpPr>
-      <p:grpSpPr/>
+      <p:grpSpPr>
+        <a:xfrm>
+          <a:off x="0" y="0"/>
+          <a:ext cx="0" cy="0"/>
+          <a:chOff x="0" y="0"/>
+          <a:chExt cx="0" cy="0"/>
+        </a:xfrm>
+      </p:grpSpPr>
       <p:sp>
         <p:nvSpPr>
           <p:cNvPr id="2" name="Rectangle 1"/>
@@ -7196,6 +7024,7 @@
           <a:lstStyle/>
           <a:p>
             <a:pPr algn="ctr"/>
+            <a:endParaRPr/>
           </a:p>
         </p:txBody>
       </p:sp>
@@ -7240,6 +7069,7 @@
           <a:lstStyle/>
           <a:p>
             <a:pPr algn="ctr"/>
+            <a:endParaRPr/>
           </a:p>
         </p:txBody>
       </p:sp>
@@ -7260,7 +7090,7 @@
           <a:noFill/>
         </p:spPr>
         <p:txBody>
-          <a:bodyPr wrap="square" lIns="0" rIns="0" tIns="0" bIns="0" anchor="t">
+          <a:bodyPr wrap="square" lIns="0" tIns="0" rIns="0" bIns="0" anchor="t">
             <a:spAutoFit/>
           </a:bodyPr>
           <a:lstStyle/>
@@ -7295,7 +7125,7 @@
           <a:noFill/>
         </p:spPr>
         <p:txBody>
-          <a:bodyPr wrap="square" lIns="0" rIns="0" tIns="0" bIns="0" anchor="t">
+          <a:bodyPr wrap="square" lIns="0" tIns="0" rIns="0" bIns="0" anchor="t">
             <a:spAutoFit/>
           </a:bodyPr>
           <a:lstStyle/>
@@ -7323,7 +7153,7 @@
           <p:nvPr/>
         </p:nvPicPr>
         <p:blipFill>
-          <a:blip r:embed="rId2"/>
+          <a:blip r:embed="rId3"/>
           <a:stretch>
             <a:fillRect/>
           </a:stretch>
@@ -7381,6 +7211,7 @@
           <a:lstStyle/>
           <a:p>
             <a:pPr algn="ctr"/>
+            <a:endParaRPr/>
           </a:p>
         </p:txBody>
       </p:sp>
@@ -7401,7 +7232,7 @@
           <a:noFill/>
         </p:spPr>
         <p:txBody>
-          <a:bodyPr wrap="square" lIns="0" rIns="0" tIns="0" bIns="0" anchor="t">
+          <a:bodyPr wrap="square" lIns="0" tIns="0" rIns="0" bIns="0" anchor="t">
             <a:spAutoFit/>
           </a:bodyPr>
           <a:lstStyle/>
@@ -7436,7 +7267,7 @@
           <a:noFill/>
         </p:spPr>
         <p:txBody>
-          <a:bodyPr wrap="square" lIns="0" rIns="0" tIns="0" bIns="0" anchor="t">
+          <a:bodyPr wrap="square" lIns="0" tIns="0" rIns="0" bIns="0" anchor="t">
             <a:spAutoFit/>
           </a:bodyPr>
           <a:lstStyle/>
@@ -7498,6 +7329,7 @@
           <a:lstStyle/>
           <a:p>
             <a:pPr algn="ctr"/>
+            <a:endParaRPr/>
           </a:p>
         </p:txBody>
       </p:sp>
@@ -7518,7 +7350,7 @@
           <a:noFill/>
         </p:spPr>
         <p:txBody>
-          <a:bodyPr wrap="square" lIns="0" rIns="0" tIns="0" bIns="0" anchor="t">
+          <a:bodyPr wrap="square" lIns="0" tIns="0" rIns="0" bIns="0" anchor="t">
             <a:spAutoFit/>
           </a:bodyPr>
           <a:lstStyle/>
@@ -7553,7 +7385,7 @@
           <a:noFill/>
         </p:spPr>
         <p:txBody>
-          <a:bodyPr wrap="square" lIns="0" rIns="0" tIns="0" bIns="0" anchor="t">
+          <a:bodyPr wrap="square" lIns="0" tIns="0" rIns="0" bIns="0" anchor="t">
             <a:spAutoFit/>
           </a:bodyPr>
           <a:lstStyle/>
@@ -7589,7 +7421,7 @@
           <a:noFill/>
         </p:spPr>
         <p:txBody>
-          <a:bodyPr wrap="square" lIns="0" rIns="0" tIns="0" bIns="0" anchor="t">
+          <a:bodyPr wrap="square" lIns="0" tIns="0" rIns="0" bIns="0" anchor="t">
             <a:spAutoFit/>
           </a:bodyPr>
           <a:lstStyle/>
@@ -7624,7 +7456,7 @@
           <a:noFill/>
         </p:spPr>
         <p:txBody>
-          <a:bodyPr wrap="square" lIns="0" rIns="0" tIns="0" bIns="0" anchor="t">
+          <a:bodyPr wrap="square" lIns="0" tIns="0" rIns="0" bIns="0" anchor="t">
             <a:spAutoFit/>
           </a:bodyPr>
           <a:lstStyle/>
@@ -7659,7 +7491,7 @@
           <a:noFill/>
         </p:spPr>
         <p:txBody>
-          <a:bodyPr wrap="square" lIns="0" rIns="0" tIns="0" bIns="0" anchor="t">
+          <a:bodyPr wrap="square" lIns="0" tIns="0" rIns="0" bIns="0" anchor="t">
             <a:spAutoFit/>
           </a:bodyPr>
           <a:lstStyle/>
@@ -7686,7 +7518,7 @@
 </file>
 
 <file path=ppt/slides/slide7.xml><?xml version="1.0" encoding="utf-8"?>
-<p:sld xmlns:a="http://schemas.openxmlformats.org/drawingml/2006/main" xmlns:p="http://schemas.openxmlformats.org/presentationml/2006/main" xmlns:r="http://schemas.openxmlformats.org/officeDocument/2006/relationships">
+<p:sld xmlns:a="http://schemas.openxmlformats.org/drawingml/2006/main" xmlns:r="http://schemas.openxmlformats.org/officeDocument/2006/relationships" xmlns:p="http://schemas.openxmlformats.org/presentationml/2006/main">
   <p:cSld>
     <p:spTree>
       <p:nvGrpSpPr>
@@ -7694,7 +7526,14 @@
         <p:cNvGrpSpPr/>
         <p:nvPr/>
       </p:nvGrpSpPr>
-      <p:grpSpPr/>
+      <p:grpSpPr>
+        <a:xfrm>
+          <a:off x="0" y="0"/>
+          <a:ext cx="0" cy="0"/>
+          <a:chOff x="0" y="0"/>
+          <a:chExt cx="0" cy="0"/>
+        </a:xfrm>
+      </p:grpSpPr>
       <p:sp>
         <p:nvSpPr>
           <p:cNvPr id="2" name="Rectangle 1"/>
@@ -7736,6 +7575,7 @@
           <a:lstStyle/>
           <a:p>
             <a:pPr algn="ctr"/>
+            <a:endParaRPr/>
           </a:p>
         </p:txBody>
       </p:sp>
@@ -7780,6 +7620,7 @@
           <a:lstStyle/>
           <a:p>
             <a:pPr algn="ctr"/>
+            <a:endParaRPr/>
           </a:p>
         </p:txBody>
       </p:sp>
@@ -7800,7 +7641,7 @@
           <a:noFill/>
         </p:spPr>
         <p:txBody>
-          <a:bodyPr wrap="square" lIns="0" rIns="0" tIns="0" bIns="0" anchor="t">
+          <a:bodyPr wrap="square" lIns="0" tIns="0" rIns="0" bIns="0" anchor="t">
             <a:spAutoFit/>
           </a:bodyPr>
           <a:lstStyle/>
@@ -7835,7 +7676,7 @@
           <a:noFill/>
         </p:spPr>
         <p:txBody>
-          <a:bodyPr wrap="square" lIns="0" rIns="0" tIns="0" bIns="0" anchor="t">
+          <a:bodyPr wrap="square" lIns="0" tIns="0" rIns="0" bIns="0" anchor="t">
             <a:spAutoFit/>
           </a:bodyPr>
           <a:lstStyle/>
@@ -7863,7 +7704,7 @@
           <p:nvPr/>
         </p:nvPicPr>
         <p:blipFill>
-          <a:blip r:embed="rId2"/>
+          <a:blip r:embed="rId3"/>
           <a:stretch>
             <a:fillRect/>
           </a:stretch>
@@ -7895,7 +7736,7 @@
           <a:noFill/>
         </p:spPr>
         <p:txBody>
-          <a:bodyPr wrap="square" lIns="0" rIns="0" tIns="0" bIns="0" anchor="t">
+          <a:bodyPr wrap="square" lIns="0" tIns="0" rIns="0" bIns="0" anchor="t">
             <a:spAutoFit/>
           </a:bodyPr>
           <a:lstStyle/>
@@ -7930,7 +7771,7 @@
           <a:noFill/>
         </p:spPr>
         <p:txBody>
-          <a:bodyPr wrap="square" lIns="0" rIns="0" tIns="0" bIns="0" anchor="t">
+          <a:bodyPr wrap="square" lIns="0" tIns="0" rIns="0" bIns="0" anchor="t">
             <a:spAutoFit/>
           </a:bodyPr>
           <a:lstStyle/>
@@ -7957,7 +7798,7 @@
 </file>
 
 <file path=ppt/slides/slide8.xml><?xml version="1.0" encoding="utf-8"?>
-<p:sld xmlns:a="http://schemas.openxmlformats.org/drawingml/2006/main" xmlns:p="http://schemas.openxmlformats.org/presentationml/2006/main" xmlns:r="http://schemas.openxmlformats.org/officeDocument/2006/relationships">
+<p:sld xmlns:a="http://schemas.openxmlformats.org/drawingml/2006/main" xmlns:r="http://schemas.openxmlformats.org/officeDocument/2006/relationships" xmlns:p="http://schemas.openxmlformats.org/presentationml/2006/main">
   <p:cSld>
     <p:spTree>
       <p:nvGrpSpPr>
@@ -7965,7 +7806,14 @@
         <p:cNvGrpSpPr/>
         <p:nvPr/>
       </p:nvGrpSpPr>
-      <p:grpSpPr/>
+      <p:grpSpPr>
+        <a:xfrm>
+          <a:off x="0" y="0"/>
+          <a:ext cx="0" cy="0"/>
+          <a:chOff x="0" y="0"/>
+          <a:chExt cx="0" cy="0"/>
+        </a:xfrm>
+      </p:grpSpPr>
       <p:sp>
         <p:nvSpPr>
           <p:cNvPr id="2" name="Rectangle 1"/>
@@ -8007,6 +7855,7 @@
           <a:lstStyle/>
           <a:p>
             <a:pPr algn="ctr"/>
+            <a:endParaRPr/>
           </a:p>
         </p:txBody>
       </p:sp>
@@ -8051,6 +7900,7 @@
           <a:lstStyle/>
           <a:p>
             <a:pPr algn="ctr"/>
+            <a:endParaRPr/>
           </a:p>
         </p:txBody>
       </p:sp>
@@ -8071,7 +7921,7 @@
           <a:noFill/>
         </p:spPr>
         <p:txBody>
-          <a:bodyPr wrap="square" lIns="0" rIns="0" tIns="0" bIns="0" anchor="t">
+          <a:bodyPr wrap="square" lIns="0" tIns="0" rIns="0" bIns="0" anchor="t">
             <a:spAutoFit/>
           </a:bodyPr>
           <a:lstStyle/>
@@ -8106,7 +7956,7 @@
           <a:noFill/>
         </p:spPr>
         <p:txBody>
-          <a:bodyPr wrap="square" lIns="0" rIns="0" tIns="0" bIns="0" anchor="t">
+          <a:bodyPr wrap="square" lIns="0" tIns="0" rIns="0" bIns="0" anchor="t">
             <a:spAutoFit/>
           </a:bodyPr>
           <a:lstStyle/>
@@ -8168,6 +8018,7 @@
           <a:lstStyle/>
           <a:p>
             <a:pPr algn="ctr"/>
+            <a:endParaRPr/>
           </a:p>
         </p:txBody>
       </p:sp>
@@ -8212,6 +8063,7 @@
           <a:lstStyle/>
           <a:p>
             <a:pPr algn="ctr"/>
+            <a:endParaRPr/>
           </a:p>
         </p:txBody>
       </p:sp>
@@ -8256,6 +8108,7 @@
           <a:lstStyle/>
           <a:p>
             <a:pPr algn="ctr"/>
+            <a:endParaRPr/>
           </a:p>
         </p:txBody>
       </p:sp>
@@ -8276,7 +8129,7 @@
           <a:noFill/>
         </p:spPr>
         <p:txBody>
-          <a:bodyPr wrap="square" lIns="0" rIns="0" tIns="0" bIns="0" anchor="t">
+          <a:bodyPr wrap="square" lIns="0" tIns="0" rIns="0" bIns="0" anchor="t">
             <a:spAutoFit/>
           </a:bodyPr>
           <a:lstStyle/>
@@ -8311,7 +8164,7 @@
           <a:noFill/>
         </p:spPr>
         <p:txBody>
-          <a:bodyPr wrap="square" lIns="0" rIns="0" tIns="0" bIns="0" anchor="t">
+          <a:bodyPr wrap="square" lIns="0" tIns="0" rIns="0" bIns="0" anchor="t">
             <a:spAutoFit/>
           </a:bodyPr>
           <a:lstStyle/>
@@ -8346,7 +8199,7 @@
           <a:noFill/>
         </p:spPr>
         <p:txBody>
-          <a:bodyPr wrap="square" lIns="0" rIns="0" tIns="0" bIns="0" anchor="t">
+          <a:bodyPr wrap="square" lIns="0" tIns="0" rIns="0" bIns="0" anchor="t">
             <a:spAutoFit/>
           </a:bodyPr>
           <a:lstStyle/>
@@ -8410,6 +8263,7 @@
           <a:lstStyle/>
           <a:p>
             <a:pPr algn="ctr"/>
+            <a:endParaRPr/>
           </a:p>
         </p:txBody>
       </p:sp>
@@ -8454,6 +8308,7 @@
           <a:lstStyle/>
           <a:p>
             <a:pPr algn="ctr"/>
+            <a:endParaRPr/>
           </a:p>
         </p:txBody>
       </p:sp>
@@ -8498,6 +8353,7 @@
           <a:lstStyle/>
           <a:p>
             <a:pPr algn="ctr"/>
+            <a:endParaRPr/>
           </a:p>
         </p:txBody>
       </p:sp>
@@ -8518,7 +8374,7 @@
           <a:noFill/>
         </p:spPr>
         <p:txBody>
-          <a:bodyPr wrap="square" lIns="0" rIns="0" tIns="0" bIns="0" anchor="t">
+          <a:bodyPr wrap="square" lIns="0" tIns="0" rIns="0" bIns="0" anchor="t">
             <a:spAutoFit/>
           </a:bodyPr>
           <a:lstStyle/>
@@ -8553,7 +8409,7 @@
           <a:noFill/>
         </p:spPr>
         <p:txBody>
-          <a:bodyPr wrap="square" lIns="0" rIns="0" tIns="0" bIns="0" anchor="t">
+          <a:bodyPr wrap="square" lIns="0" tIns="0" rIns="0" bIns="0" anchor="t">
             <a:spAutoFit/>
           </a:bodyPr>
           <a:lstStyle/>
@@ -8588,7 +8444,7 @@
           <a:noFill/>
         </p:spPr>
         <p:txBody>
-          <a:bodyPr wrap="square" lIns="0" rIns="0" tIns="0" bIns="0" anchor="t">
+          <a:bodyPr wrap="square" lIns="0" tIns="0" rIns="0" bIns="0" anchor="t">
             <a:spAutoFit/>
           </a:bodyPr>
           <a:lstStyle/>
@@ -8653,6 +8509,7 @@
           <a:lstStyle/>
           <a:p>
             <a:pPr algn="ctr"/>
+            <a:endParaRPr/>
           </a:p>
         </p:txBody>
       </p:sp>
@@ -8697,6 +8554,7 @@
           <a:lstStyle/>
           <a:p>
             <a:pPr algn="ctr"/>
+            <a:endParaRPr/>
           </a:p>
         </p:txBody>
       </p:sp>
@@ -8741,6 +8599,7 @@
           <a:lstStyle/>
           <a:p>
             <a:pPr algn="ctr"/>
+            <a:endParaRPr/>
           </a:p>
         </p:txBody>
       </p:sp>
@@ -8785,6 +8644,7 @@
           <a:lstStyle/>
           <a:p>
             <a:pPr algn="ctr"/>
+            <a:endParaRPr/>
           </a:p>
         </p:txBody>
       </p:sp>
@@ -8805,7 +8665,7 @@
           <a:noFill/>
         </p:spPr>
         <p:txBody>
-          <a:bodyPr wrap="square" lIns="0" rIns="0" tIns="0" bIns="0" anchor="t">
+          <a:bodyPr wrap="square" lIns="0" tIns="0" rIns="0" bIns="0" anchor="t">
             <a:spAutoFit/>
           </a:bodyPr>
           <a:lstStyle/>
@@ -8840,7 +8700,7 @@
           <a:noFill/>
         </p:spPr>
         <p:txBody>
-          <a:bodyPr wrap="square" lIns="0" rIns="0" tIns="0" bIns="0" anchor="t">
+          <a:bodyPr wrap="square" lIns="0" tIns="0" rIns="0" bIns="0" anchor="t">
             <a:spAutoFit/>
           </a:bodyPr>
           <a:lstStyle/>
@@ -8875,7 +8735,7 @@
           <a:noFill/>
         </p:spPr>
         <p:txBody>
-          <a:bodyPr wrap="square" lIns="0" rIns="0" tIns="0" bIns="0" anchor="t">
+          <a:bodyPr wrap="square" lIns="0" tIns="0" rIns="0" bIns="0" anchor="t">
             <a:spAutoFit/>
           </a:bodyPr>
           <a:lstStyle/>
@@ -8937,6 +8797,7 @@
           <a:lstStyle/>
           <a:p>
             <a:pPr algn="ctr"/>
+            <a:endParaRPr/>
           </a:p>
         </p:txBody>
       </p:sp>
@@ -8981,6 +8842,7 @@
           <a:lstStyle/>
           <a:p>
             <a:pPr algn="ctr"/>
+            <a:endParaRPr/>
           </a:p>
         </p:txBody>
       </p:sp>
@@ -9001,7 +8863,7 @@
           <a:noFill/>
         </p:spPr>
         <p:txBody>
-          <a:bodyPr wrap="square" lIns="0" rIns="0" tIns="0" bIns="0" anchor="t">
+          <a:bodyPr wrap="square" lIns="0" tIns="0" rIns="0" bIns="0" anchor="t">
             <a:spAutoFit/>
           </a:bodyPr>
           <a:lstStyle/>
@@ -9036,7 +8898,7 @@
           <a:noFill/>
         </p:spPr>
         <p:txBody>
-          <a:bodyPr wrap="square" lIns="0" rIns="0" tIns="0" bIns="0" anchor="t">
+          <a:bodyPr wrap="square" lIns="0" tIns="0" rIns="0" bIns="0" anchor="t">
             <a:spAutoFit/>
           </a:bodyPr>
           <a:lstStyle/>
@@ -9063,7 +8925,7 @@
 </file>
 
 <file path=ppt/slides/slide9.xml><?xml version="1.0" encoding="utf-8"?>
-<p:sld xmlns:a="http://schemas.openxmlformats.org/drawingml/2006/main" xmlns:p="http://schemas.openxmlformats.org/presentationml/2006/main" xmlns:r="http://schemas.openxmlformats.org/officeDocument/2006/relationships">
+<p:sld xmlns:a="http://schemas.openxmlformats.org/drawingml/2006/main" xmlns:r="http://schemas.openxmlformats.org/officeDocument/2006/relationships" xmlns:p="http://schemas.openxmlformats.org/presentationml/2006/main">
   <p:cSld>
     <p:spTree>
       <p:nvGrpSpPr>
@@ -9071,7 +8933,14 @@
         <p:cNvGrpSpPr/>
         <p:nvPr/>
       </p:nvGrpSpPr>
-      <p:grpSpPr/>
+      <p:grpSpPr>
+        <a:xfrm>
+          <a:off x="0" y="0"/>
+          <a:ext cx="0" cy="0"/>
+          <a:chOff x="0" y="0"/>
+          <a:chExt cx="0" cy="0"/>
+        </a:xfrm>
+      </p:grpSpPr>
       <p:sp>
         <p:nvSpPr>
           <p:cNvPr id="2" name="Rectangle 1"/>
@@ -9113,6 +8982,7 @@
           <a:lstStyle/>
           <a:p>
             <a:pPr algn="ctr"/>
+            <a:endParaRPr/>
           </a:p>
         </p:txBody>
       </p:sp>
@@ -9157,6 +9027,7 @@
           <a:lstStyle/>
           <a:p>
             <a:pPr algn="ctr"/>
+            <a:endParaRPr/>
           </a:p>
         </p:txBody>
       </p:sp>
@@ -9177,7 +9048,7 @@
           <a:noFill/>
         </p:spPr>
         <p:txBody>
-          <a:bodyPr wrap="square" lIns="0" rIns="0" tIns="0" bIns="0" anchor="t">
+          <a:bodyPr wrap="square" lIns="0" tIns="0" rIns="0" bIns="0" anchor="t">
             <a:spAutoFit/>
           </a:bodyPr>
           <a:lstStyle/>
@@ -9212,7 +9083,7 @@
           <a:noFill/>
         </p:spPr>
         <p:txBody>
-          <a:bodyPr wrap="square" lIns="0" rIns="0" tIns="0" bIns="0" anchor="t">
+          <a:bodyPr wrap="square" lIns="0" tIns="0" rIns="0" bIns="0" anchor="t">
             <a:spAutoFit/>
           </a:bodyPr>
           <a:lstStyle/>
@@ -9247,7 +9118,7 @@
           <a:noFill/>
         </p:spPr>
         <p:txBody>
-          <a:bodyPr wrap="square" lIns="0" rIns="0" tIns="0" bIns="0" anchor="t">
+          <a:bodyPr wrap="square" lIns="0" tIns="0" rIns="0" bIns="0" anchor="t">
             <a:spAutoFit/>
           </a:bodyPr>
           <a:lstStyle/>
@@ -9306,6 +9177,7 @@
           <a:lstStyle/>
           <a:p>
             <a:pPr algn="ctr"/>
+            <a:endParaRPr/>
           </a:p>
         </p:txBody>
       </p:sp>
@@ -9326,7 +9198,7 @@
           <a:noFill/>
         </p:spPr>
         <p:txBody>
-          <a:bodyPr wrap="square" lIns="0" rIns="0" tIns="0" bIns="0" anchor="t">
+          <a:bodyPr wrap="square" lIns="0" tIns="0" rIns="0" bIns="0" anchor="t">
             <a:spAutoFit/>
           </a:bodyPr>
           <a:lstStyle/>
@@ -9361,7 +9233,7 @@
           <a:noFill/>
         </p:spPr>
         <p:txBody>
-          <a:bodyPr wrap="square" lIns="0" rIns="0" tIns="0" bIns="0" anchor="t">
+          <a:bodyPr wrap="square" lIns="0" tIns="0" rIns="0" bIns="0" anchor="t">
             <a:spAutoFit/>
           </a:bodyPr>
           <a:lstStyle/>
@@ -9420,6 +9292,7 @@
           <a:lstStyle/>
           <a:p>
             <a:pPr algn="ctr"/>
+            <a:endParaRPr/>
           </a:p>
         </p:txBody>
       </p:sp>
@@ -9440,7 +9313,7 @@
           <a:noFill/>
         </p:spPr>
         <p:txBody>
-          <a:bodyPr wrap="square" lIns="0" rIns="0" tIns="0" bIns="0" anchor="t">
+          <a:bodyPr wrap="square" lIns="0" tIns="0" rIns="0" bIns="0" anchor="t">
             <a:spAutoFit/>
           </a:bodyPr>
           <a:lstStyle/>
@@ -9475,7 +9348,7 @@
           <a:noFill/>
         </p:spPr>
         <p:txBody>
-          <a:bodyPr wrap="square" lIns="0" rIns="0" tIns="0" bIns="0" anchor="t">
+          <a:bodyPr wrap="square" lIns="0" tIns="0" rIns="0" bIns="0" anchor="t">
             <a:spAutoFit/>
           </a:bodyPr>
           <a:lstStyle/>
@@ -9534,6 +9407,7 @@
           <a:lstStyle/>
           <a:p>
             <a:pPr algn="ctr"/>
+            <a:endParaRPr/>
           </a:p>
         </p:txBody>
       </p:sp>
@@ -9554,7 +9428,7 @@
           <a:noFill/>
         </p:spPr>
         <p:txBody>
-          <a:bodyPr wrap="square" lIns="0" rIns="0" tIns="0" bIns="0" anchor="t">
+          <a:bodyPr wrap="square" lIns="0" tIns="0" rIns="0" bIns="0" anchor="t">
             <a:spAutoFit/>
           </a:bodyPr>
           <a:lstStyle/>
@@ -9589,7 +9463,7 @@
           <a:noFill/>
         </p:spPr>
         <p:txBody>
-          <a:bodyPr wrap="square" lIns="0" rIns="0" tIns="0" bIns="0" anchor="t">
+          <a:bodyPr wrap="square" lIns="0" tIns="0" rIns="0" bIns="0" anchor="t">
             <a:spAutoFit/>
           </a:bodyPr>
           <a:lstStyle/>
@@ -9648,6 +9522,7 @@
           <a:lstStyle/>
           <a:p>
             <a:pPr algn="ctr"/>
+            <a:endParaRPr/>
           </a:p>
         </p:txBody>
       </p:sp>
@@ -9668,7 +9543,7 @@
           <a:noFill/>
         </p:spPr>
         <p:txBody>
-          <a:bodyPr wrap="square" lIns="0" rIns="0" tIns="0" bIns="0" anchor="t">
+          <a:bodyPr wrap="square" lIns="0" tIns="0" rIns="0" bIns="0" anchor="t">
             <a:spAutoFit/>
           </a:bodyPr>
           <a:lstStyle/>
@@ -9703,7 +9578,7 @@
           <a:noFill/>
         </p:spPr>
         <p:txBody>
-          <a:bodyPr wrap="square" lIns="0" rIns="0" tIns="0" bIns="0" anchor="t">
+          <a:bodyPr wrap="square" lIns="0" tIns="0" rIns="0" bIns="0" anchor="t">
             <a:spAutoFit/>
           </a:bodyPr>
           <a:lstStyle/>
@@ -9762,6 +9637,7 @@
           <a:lstStyle/>
           <a:p>
             <a:pPr algn="ctr"/>
+            <a:endParaRPr/>
           </a:p>
         </p:txBody>
       </p:sp>
@@ -9782,7 +9658,7 @@
           <a:noFill/>
         </p:spPr>
         <p:txBody>
-          <a:bodyPr wrap="square" lIns="0" rIns="0" tIns="0" bIns="0" anchor="t">
+          <a:bodyPr wrap="square" lIns="0" tIns="0" rIns="0" bIns="0" anchor="t">
             <a:spAutoFit/>
           </a:bodyPr>
           <a:lstStyle/>
@@ -9817,7 +9693,7 @@
           <a:noFill/>
         </p:spPr>
         <p:txBody>
-          <a:bodyPr wrap="square" lIns="0" rIns="0" tIns="0" bIns="0" anchor="t">
+          <a:bodyPr wrap="square" lIns="0" tIns="0" rIns="0" bIns="0" anchor="t">
             <a:spAutoFit/>
           </a:bodyPr>
           <a:lstStyle/>
@@ -9876,6 +9752,7 @@
           <a:lstStyle/>
           <a:p>
             <a:pPr algn="ctr"/>
+            <a:endParaRPr/>
           </a:p>
         </p:txBody>
       </p:sp>
@@ -9896,7 +9773,7 @@
           <a:noFill/>
         </p:spPr>
         <p:txBody>
-          <a:bodyPr wrap="square" lIns="0" rIns="0" tIns="0" bIns="0" anchor="t">
+          <a:bodyPr wrap="square" lIns="0" tIns="0" rIns="0" bIns="0" anchor="t">
             <a:spAutoFit/>
           </a:bodyPr>
           <a:lstStyle/>
@@ -9931,7 +9808,7 @@
           <a:noFill/>
         </p:spPr>
         <p:txBody>
-          <a:bodyPr wrap="square" lIns="0" rIns="0" tIns="0" bIns="0" anchor="t">
+          <a:bodyPr wrap="square" lIns="0" tIns="0" rIns="0" bIns="0" anchor="t">
             <a:spAutoFit/>
           </a:bodyPr>
           <a:lstStyle/>
@@ -9990,6 +9867,7 @@
           <a:lstStyle/>
           <a:p>
             <a:pPr algn="ctr"/>
+            <a:endParaRPr/>
           </a:p>
         </p:txBody>
       </p:sp>
@@ -10010,7 +9888,7 @@
           <a:noFill/>
         </p:spPr>
         <p:txBody>
-          <a:bodyPr wrap="square" lIns="0" rIns="0" tIns="0" bIns="0" anchor="t">
+          <a:bodyPr wrap="square" lIns="0" tIns="0" rIns="0" bIns="0" anchor="t">
             <a:spAutoFit/>
           </a:bodyPr>
           <a:lstStyle/>
@@ -10045,7 +9923,7 @@
           <a:noFill/>
         </p:spPr>
         <p:txBody>
-          <a:bodyPr wrap="square" lIns="0" rIns="0" tIns="0" bIns="0" anchor="t">
+          <a:bodyPr wrap="square" lIns="0" tIns="0" rIns="0" bIns="0" anchor="t">
             <a:spAutoFit/>
           </a:bodyPr>
           <a:lstStyle/>
@@ -10104,6 +9982,7 @@
           <a:lstStyle/>
           <a:p>
             <a:pPr algn="ctr"/>
+            <a:endParaRPr/>
           </a:p>
         </p:txBody>
       </p:sp>
@@ -10124,7 +10003,7 @@
           <a:noFill/>
         </p:spPr>
         <p:txBody>
-          <a:bodyPr wrap="square" lIns="0" rIns="0" tIns="0" bIns="0" anchor="t">
+          <a:bodyPr wrap="square" lIns="0" tIns="0" rIns="0" bIns="0" anchor="t">
             <a:spAutoFit/>
           </a:bodyPr>
           <a:lstStyle/>
@@ -10159,7 +10038,7 @@
           <a:noFill/>
         </p:spPr>
         <p:txBody>
-          <a:bodyPr wrap="square" lIns="0" rIns="0" tIns="0" bIns="0" anchor="t">
+          <a:bodyPr wrap="square" lIns="0" tIns="0" rIns="0" bIns="0" anchor="t">
             <a:spAutoFit/>
           </a:bodyPr>
           <a:lstStyle/>
@@ -10218,6 +10097,7 @@
           <a:lstStyle/>
           <a:p>
             <a:pPr algn="ctr"/>
+            <a:endParaRPr/>
           </a:p>
         </p:txBody>
       </p:sp>
@@ -10238,7 +10118,7 @@
           <a:noFill/>
         </p:spPr>
         <p:txBody>
-          <a:bodyPr wrap="square" lIns="0" rIns="0" tIns="0" bIns="0" anchor="t">
+          <a:bodyPr wrap="square" lIns="0" tIns="0" rIns="0" bIns="0" anchor="t">
             <a:spAutoFit/>
           </a:bodyPr>
           <a:lstStyle/>
@@ -10273,7 +10153,7 @@
           <a:noFill/>
         </p:spPr>
         <p:txBody>
-          <a:bodyPr wrap="square" lIns="0" rIns="0" tIns="0" bIns="0" anchor="t">
+          <a:bodyPr wrap="square" lIns="0" tIns="0" rIns="0" bIns="0" anchor="t">
             <a:spAutoFit/>
           </a:bodyPr>
           <a:lstStyle/>
@@ -10332,6 +10212,7 @@
           <a:lstStyle/>
           <a:p>
             <a:pPr algn="ctr"/>
+            <a:endParaRPr/>
           </a:p>
         </p:txBody>
       </p:sp>
@@ -10352,7 +10233,7 @@
           <a:noFill/>
         </p:spPr>
         <p:txBody>
-          <a:bodyPr wrap="square" lIns="0" rIns="0" tIns="0" bIns="0" anchor="t">
+          <a:bodyPr wrap="square" lIns="0" tIns="0" rIns="0" bIns="0" anchor="t">
             <a:spAutoFit/>
           </a:bodyPr>
           <a:lstStyle/>
@@ -10387,7 +10268,7 @@
           <a:noFill/>
         </p:spPr>
         <p:txBody>
-          <a:bodyPr wrap="square" lIns="0" rIns="0" tIns="0" bIns="0" anchor="t">
+          <a:bodyPr wrap="square" lIns="0" tIns="0" rIns="0" bIns="0" anchor="t">
             <a:spAutoFit/>
           </a:bodyPr>
           <a:lstStyle/>
@@ -10446,6 +10327,7 @@
           <a:lstStyle/>
           <a:p>
             <a:pPr algn="ctr"/>
+            <a:endParaRPr/>
           </a:p>
         </p:txBody>
       </p:sp>
@@ -10466,7 +10348,7 @@
           <a:noFill/>
         </p:spPr>
         <p:txBody>
-          <a:bodyPr wrap="square" lIns="0" rIns="0" tIns="0" bIns="0" anchor="t">
+          <a:bodyPr wrap="square" lIns="0" tIns="0" rIns="0" bIns="0" anchor="t">
             <a:spAutoFit/>
           </a:bodyPr>
           <a:lstStyle/>
@@ -10501,7 +10383,7 @@
           <a:noFill/>
         </p:spPr>
         <p:txBody>
-          <a:bodyPr wrap="square" lIns="0" rIns="0" tIns="0" bIns="0" anchor="t">
+          <a:bodyPr wrap="square" lIns="0" tIns="0" rIns="0" bIns="0" anchor="t">
             <a:spAutoFit/>
           </a:bodyPr>
           <a:lstStyle/>
@@ -10536,7 +10418,7 @@
           <a:noFill/>
         </p:spPr>
         <p:txBody>
-          <a:bodyPr wrap="square" lIns="0" rIns="0" tIns="0" bIns="0" anchor="t">
+          <a:bodyPr wrap="square" lIns="0" tIns="0" rIns="0" bIns="0" anchor="t">
             <a:spAutoFit/>
           </a:bodyPr>
           <a:lstStyle/>
@@ -10571,7 +10453,7 @@
           <a:noFill/>
         </p:spPr>
         <p:txBody>
-          <a:bodyPr wrap="square" lIns="0" rIns="0" tIns="0" bIns="0" anchor="t">
+          <a:bodyPr wrap="square" lIns="0" tIns="0" rIns="0" bIns="0" anchor="t">
             <a:spAutoFit/>
           </a:bodyPr>
           <a:lstStyle/>
@@ -10928,44 +10810,44 @@
         <a:sysClr val="window" lastClr="FFFFFF"/>
       </a:lt1>
       <a:dk2>
-        <a:srgbClr val="1F497D"/>
+        <a:srgbClr val="0E2841"/>
       </a:dk2>
       <a:lt2>
-        <a:srgbClr val="EEECE1"/>
+        <a:srgbClr val="E8E8E8"/>
       </a:lt2>
       <a:accent1>
-        <a:srgbClr val="4F81BD"/>
+        <a:srgbClr val="156082"/>
       </a:accent1>
       <a:accent2>
-        <a:srgbClr val="C0504D"/>
+        <a:srgbClr val="E97132"/>
       </a:accent2>
       <a:accent3>
-        <a:srgbClr val="9BBB59"/>
+        <a:srgbClr val="196B24"/>
       </a:accent3>
       <a:accent4>
-        <a:srgbClr val="8064A2"/>
+        <a:srgbClr val="0F9ED5"/>
       </a:accent4>
       <a:accent5>
-        <a:srgbClr val="4BACC6"/>
+        <a:srgbClr val="A02B93"/>
       </a:accent5>
       <a:accent6>
-        <a:srgbClr val="F79646"/>
+        <a:srgbClr val="4EA72E"/>
       </a:accent6>
       <a:hlink>
-        <a:srgbClr val="0000FF"/>
+        <a:srgbClr val="467886"/>
       </a:hlink>
       <a:folHlink>
-        <a:srgbClr val="800080"/>
+        <a:srgbClr val="96607D"/>
       </a:folHlink>
     </a:clrScheme>
     <a:fontScheme name="Office">
       <a:majorFont>
-        <a:latin typeface="Calibri"/>
+        <a:latin typeface="Aptos Display" panose="02110004020202020204"/>
         <a:ea typeface=""/>
         <a:cs typeface=""/>
-        <a:font script="Jpan" typeface="ＭＳ Ｐゴシック"/>
+        <a:font script="Jpan" typeface="游ゴシック Light"/>
         <a:font script="Hang" typeface="맑은 고딕"/>
-        <a:font script="Hans" typeface="宋体"/>
+        <a:font script="Hans" typeface="等线 Light"/>
         <a:font script="Hant" typeface="新細明體"/>
         <a:font script="Arab" typeface="Times New Roman"/>
         <a:font script="Hebr" typeface="Times New Roman"/>
@@ -10993,14 +10875,31 @@
         <a:font script="Viet" typeface="Times New Roman"/>
         <a:font script="Uigh" typeface="Microsoft Uighur"/>
         <a:font script="Geor" typeface="Sylfaen"/>
+        <a:font script="Armn" typeface="Arial"/>
+        <a:font script="Bugi" typeface="Leelawadee UI"/>
+        <a:font script="Bopo" typeface="Microsoft JhengHei"/>
+        <a:font script="Java" typeface="Javanese Text"/>
+        <a:font script="Lisu" typeface="Segoe UI"/>
+        <a:font script="Mymr" typeface="Myanmar Text"/>
+        <a:font script="Nkoo" typeface="Ebrima"/>
+        <a:font script="Olck" typeface="Nirmala UI"/>
+        <a:font script="Osma" typeface="Ebrima"/>
+        <a:font script="Phag" typeface="Phagspa"/>
+        <a:font script="Syrn" typeface="Estrangelo Edessa"/>
+        <a:font script="Syrj" typeface="Estrangelo Edessa"/>
+        <a:font script="Syre" typeface="Estrangelo Edessa"/>
+        <a:font script="Sora" typeface="Nirmala UI"/>
+        <a:font script="Tale" typeface="Microsoft Tai Le"/>
+        <a:font script="Talu" typeface="Microsoft New Tai Lue"/>
+        <a:font script="Tfng" typeface="Ebrima"/>
       </a:majorFont>
       <a:minorFont>
-        <a:latin typeface="Calibri"/>
+        <a:latin typeface="Aptos" panose="02110004020202020204"/>
         <a:ea typeface=""/>
         <a:cs typeface=""/>
-        <a:font script="Jpan" typeface="ＭＳ Ｐゴシック"/>
+        <a:font script="Jpan" typeface="游ゴシック"/>
         <a:font script="Hang" typeface="맑은 고딕"/>
-        <a:font script="Hans" typeface="宋体"/>
+        <a:font script="Hans" typeface="等线"/>
         <a:font script="Hant" typeface="新細明體"/>
         <a:font script="Arab" typeface="Arial"/>
         <a:font script="Hebr" typeface="Arial"/>
@@ -11028,6 +10927,23 @@
         <a:font script="Viet" typeface="Arial"/>
         <a:font script="Uigh" typeface="Microsoft Uighur"/>
         <a:font script="Geor" typeface="Sylfaen"/>
+        <a:font script="Armn" typeface="Arial"/>
+        <a:font script="Bugi" typeface="Leelawadee UI"/>
+        <a:font script="Bopo" typeface="Microsoft JhengHei"/>
+        <a:font script="Java" typeface="Javanese Text"/>
+        <a:font script="Lisu" typeface="Segoe UI"/>
+        <a:font script="Mymr" typeface="Myanmar Text"/>
+        <a:font script="Nkoo" typeface="Ebrima"/>
+        <a:font script="Olck" typeface="Nirmala UI"/>
+        <a:font script="Osma" typeface="Ebrima"/>
+        <a:font script="Phag" typeface="Phagspa"/>
+        <a:font script="Syrn" typeface="Estrangelo Edessa"/>
+        <a:font script="Syrj" typeface="Estrangelo Edessa"/>
+        <a:font script="Syre" typeface="Estrangelo Edessa"/>
+        <a:font script="Sora" typeface="Nirmala UI"/>
+        <a:font script="Tale" typeface="Microsoft Tai Le"/>
+        <a:font script="Talu" typeface="Microsoft New Tai Lue"/>
+        <a:font script="Tfng" typeface="Ebrima"/>
       </a:minorFont>
     </a:fontScheme>
     <a:fmtScheme name="Office">
@@ -11039,180 +10955,136 @@
           <a:gsLst>
             <a:gs pos="0">
               <a:schemeClr val="phClr">
-                <a:tint val="50000"/>
-                <a:satMod val="300000"/>
+                <a:lumMod val="110000"/>
+                <a:satMod val="105000"/>
+                <a:tint val="67000"/>
               </a:schemeClr>
             </a:gs>
-            <a:gs pos="35000">
+            <a:gs pos="50000">
               <a:schemeClr val="phClr">
-                <a:tint val="37000"/>
-                <a:satMod val="300000"/>
+                <a:lumMod val="105000"/>
+                <a:satMod val="103000"/>
+                <a:tint val="73000"/>
               </a:schemeClr>
             </a:gs>
             <a:gs pos="100000">
               <a:schemeClr val="phClr">
-                <a:tint val="15000"/>
-                <a:satMod val="350000"/>
+                <a:lumMod val="105000"/>
+                <a:satMod val="109000"/>
+                <a:tint val="81000"/>
               </a:schemeClr>
             </a:gs>
           </a:gsLst>
-          <a:lin ang="16200000" scaled="1"/>
+          <a:lin ang="5400000" scaled="0"/>
         </a:gradFill>
         <a:gradFill rotWithShape="1">
           <a:gsLst>
             <a:gs pos="0">
               <a:schemeClr val="phClr">
-                <a:tint val="100000"/>
+                <a:satMod val="103000"/>
+                <a:lumMod val="102000"/>
+                <a:tint val="94000"/>
+              </a:schemeClr>
+            </a:gs>
+            <a:gs pos="50000">
+              <a:schemeClr val="phClr">
+                <a:satMod val="110000"/>
+                <a:lumMod val="100000"/>
                 <a:shade val="100000"/>
-                <a:satMod val="130000"/>
               </a:schemeClr>
             </a:gs>
             <a:gs pos="100000">
               <a:schemeClr val="phClr">
-                <a:tint val="50000"/>
-                <a:shade val="100000"/>
-                <a:satMod val="350000"/>
+                <a:lumMod val="99000"/>
+                <a:satMod val="120000"/>
+                <a:shade val="78000"/>
               </a:schemeClr>
             </a:gs>
           </a:gsLst>
-          <a:lin ang="16200000" scaled="0"/>
+          <a:lin ang="5400000" scaled="0"/>
         </a:gradFill>
       </a:fillStyleLst>
       <a:lnStyleLst>
-        <a:ln w="9525" cap="flat" cmpd="sng" algn="ctr">
+        <a:ln w="12700" cap="flat" cmpd="sng" algn="ctr">
           <a:solidFill>
-            <a:schemeClr val="phClr">
-              <a:shade val="95000"/>
-              <a:satMod val="105000"/>
-            </a:schemeClr>
+            <a:schemeClr val="phClr"/>
           </a:solidFill>
           <a:prstDash val="solid"/>
+          <a:miter lim="800000"/>
+        </a:ln>
+        <a:ln w="19050" cap="flat" cmpd="sng" algn="ctr">
+          <a:solidFill>
+            <a:schemeClr val="phClr"/>
+          </a:solidFill>
+          <a:prstDash val="solid"/>
+          <a:miter lim="800000"/>
         </a:ln>
         <a:ln w="25400" cap="flat" cmpd="sng" algn="ctr">
           <a:solidFill>
             <a:schemeClr val="phClr"/>
           </a:solidFill>
           <a:prstDash val="solid"/>
-        </a:ln>
-        <a:ln w="38100" cap="flat" cmpd="sng" algn="ctr">
-          <a:solidFill>
-            <a:schemeClr val="phClr"/>
-          </a:solidFill>
-          <a:prstDash val="solid"/>
+          <a:miter lim="800000"/>
         </a:ln>
       </a:lnStyleLst>
       <a:effectStyleLst>
         <a:effectStyle>
+          <a:effectLst/>
+        </a:effectStyle>
+        <a:effectStyle>
+          <a:effectLst/>
+        </a:effectStyle>
+        <a:effectStyle>
           <a:effectLst>
-            <a:outerShdw blurRad="40000" dist="20000" dir="5400000" rotWithShape="0">
+            <a:outerShdw blurRad="57150" dist="19050" dir="5400000" algn="ctr" rotWithShape="0">
               <a:srgbClr val="000000">
-                <a:alpha val="38000"/>
+                <a:alpha val="63000"/>
               </a:srgbClr>
             </a:outerShdw>
           </a:effectLst>
-        </a:effectStyle>
-        <a:effectStyle>
-          <a:effectLst>
-            <a:outerShdw blurRad="40000" dist="23000" dir="5400000" rotWithShape="0">
-              <a:srgbClr val="000000">
-                <a:alpha val="35000"/>
-              </a:srgbClr>
-            </a:outerShdw>
-          </a:effectLst>
-        </a:effectStyle>
-        <a:effectStyle>
-          <a:effectLst>
-            <a:outerShdw blurRad="40000" dist="23000" dir="5400000" rotWithShape="0">
-              <a:srgbClr val="000000">
-                <a:alpha val="35000"/>
-              </a:srgbClr>
-            </a:outerShdw>
-          </a:effectLst>
-          <a:scene3d>
-            <a:camera prst="orthographicFront">
-              <a:rot lat="0" lon="0" rev="0"/>
-            </a:camera>
-            <a:lightRig rig="threePt" dir="t">
-              <a:rot lat="0" lon="0" rev="1200000"/>
-            </a:lightRig>
-          </a:scene3d>
-          <a:sp3d>
-            <a:bevelT w="63500" h="25400"/>
-          </a:sp3d>
         </a:effectStyle>
       </a:effectStyleLst>
       <a:bgFillStyleLst>
         <a:solidFill>
           <a:schemeClr val="phClr"/>
         </a:solidFill>
+        <a:solidFill>
+          <a:schemeClr val="phClr">
+            <a:tint val="95000"/>
+            <a:satMod val="170000"/>
+          </a:schemeClr>
+        </a:solidFill>
         <a:gradFill rotWithShape="1">
           <a:gsLst>
             <a:gs pos="0">
               <a:schemeClr val="phClr">
-                <a:tint val="40000"/>
-                <a:satMod val="350000"/>
+                <a:tint val="93000"/>
+                <a:satMod val="150000"/>
+                <a:shade val="98000"/>
+                <a:lumMod val="102000"/>
               </a:schemeClr>
             </a:gs>
-            <a:gs pos="40000">
+            <a:gs pos="50000">
               <a:schemeClr val="phClr">
-                <a:tint val="45000"/>
-                <a:shade val="99000"/>
-                <a:satMod val="350000"/>
+                <a:tint val="98000"/>
+                <a:satMod val="130000"/>
+                <a:shade val="90000"/>
+                <a:lumMod val="103000"/>
               </a:schemeClr>
             </a:gs>
             <a:gs pos="100000">
               <a:schemeClr val="phClr">
-                <a:shade val="20000"/>
-                <a:satMod val="255000"/>
+                <a:shade val="63000"/>
+                <a:satMod val="120000"/>
               </a:schemeClr>
             </a:gs>
           </a:gsLst>
-          <a:path path="circle">
-            <a:fillToRect l="50000" t="-80000" r="50000" b="180000"/>
-          </a:path>
-        </a:gradFill>
-        <a:gradFill rotWithShape="1">
-          <a:gsLst>
-            <a:gs pos="0">
-              <a:schemeClr val="phClr">
-                <a:tint val="80000"/>
-                <a:satMod val="300000"/>
-              </a:schemeClr>
-            </a:gs>
-            <a:gs pos="100000">
-              <a:schemeClr val="phClr">
-                <a:shade val="30000"/>
-                <a:satMod val="200000"/>
-              </a:schemeClr>
-            </a:gs>
-          </a:gsLst>
-          <a:path path="circle">
-            <a:fillToRect l="50000" t="50000" r="50000" b="50000"/>
-          </a:path>
+          <a:lin ang="5400000" scaled="0"/>
         </a:gradFill>
       </a:bgFillStyleLst>
     </a:fmtScheme>
   </a:themeElements>
   <a:objectDefaults>
-    <a:spDef>
-      <a:spPr/>
-      <a:bodyPr/>
-      <a:lstStyle/>
-      <a:style>
-        <a:lnRef idx="1">
-          <a:schemeClr val="accent1"/>
-        </a:lnRef>
-        <a:fillRef idx="3">
-          <a:schemeClr val="accent1"/>
-        </a:fillRef>
-        <a:effectRef idx="2">
-          <a:schemeClr val="accent1"/>
-        </a:effectRef>
-        <a:fontRef idx="minor">
-          <a:schemeClr val="lt1"/>
-        </a:fontRef>
-      </a:style>
-    </a:spDef>
     <a:lnDef>
       <a:spPr/>
       <a:bodyPr/>
@@ -11234,5 +11106,10 @@
     </a:lnDef>
   </a:objectDefaults>
   <a:extraClrSchemeLst/>
+  <a:extLst>
+    <a:ext uri="{05A4C25C-085E-4340-85A3-A5531E510DB2}">
+      <thm15:themeFamily xmlns:thm15="http://schemas.microsoft.com/office/thememl/2012/main" name="Office Theme" id="{2E142A2C-CD16-42D6-873A-C26D2A0506FA}" vid="{1BDDFF52-6CD6-40A5-AB3C-68EB2F1E4D0A}"/>
+    </a:ext>
+  </a:extLst>
 </a:theme>
 </file>